--- a/exports/pptx/lessons/middle-module-06-moon-phases-tithi/day-09-cross-cultural.pptx
+++ b/exports/pptx/lessons/middle-module-06-moon-phases-tithi/day-09-cross-cultural.pptx
@@ -15,9 +15,18 @@
     <p:sldId id="263" r:id="rId9"/>
     <p:sldId id="264" r:id="rId10"/>
     <p:sldId id="265" r:id="rId11"/>
+    <p:sldId id="266" r:id="rId12"/>
+    <p:sldId id="267" r:id="rId13"/>
+    <p:sldId id="268" r:id="rId14"/>
+    <p:sldId id="269" r:id="rId15"/>
+    <p:sldId id="270" r:id="rId16"/>
+    <p:sldId id="271" r:id="rId17"/>
+    <p:sldId id="272" r:id="rId18"/>
+    <p:sldId id="273" r:id="rId19"/>
+    <p:sldId id="274" r:id="rId20"/>
   </p:sldIdLst>
   <p:notesMasterIdLst>
-    <p:notesMasterId r:id="rId12"/>
+    <p:notesMasterId r:id="rId21"/>
   </p:notesMasterIdLst>
   <p:sldSz cx="9144000" cy="5143500"/>
   <p:notesSz cx="5143500" cy="9144000"/>
@@ -623,6 +632,798 @@
             <a:fld id="{F7021451-1387-4CA6-816F-3879F97B5CBC}" type="slidenum">
               <a:rPr lang="en-US"/>
               <a:t>10</a:t>
+            </a:fld>
+            <a:endParaRPr lang="en-US"/>
+          </a:p>
+        </p:txBody>
+      </p:sp>
+    </p:spTree>
+    <p:extLst>
+      <p:ext uri="{BB962C8B-B14F-4D97-AF65-F5344CB8AC3E}">
+        <p14:creationId xmlns:p14="http://schemas.microsoft.com/office/powerpoint/2010/main" val="1024086991"/>
+      </p:ext>
+    </p:extLst>
+  </p:cSld>
+  <p:clrMapOvr>
+    <a:masterClrMapping/>
+  </p:clrMapOvr>
+</p:notes>
+</file>
+
+<file path=ppt/notesSlides/notesSlide11.xml><?xml version="1.0" encoding="utf-8"?>
+<p:notes xmlns:a="http://schemas.openxmlformats.org/drawingml/2006/main" xmlns:r="http://schemas.openxmlformats.org/officeDocument/2006/relationships" xmlns:p="http://schemas.openxmlformats.org/presentationml/2006/main">
+  <p:cSld>
+    <p:spTree>
+      <p:nvGrpSpPr>
+        <p:cNvPr id="1" name=""/>
+        <p:cNvGrpSpPr/>
+        <p:nvPr/>
+      </p:nvGrpSpPr>
+      <p:grpSpPr>
+        <a:xfrm>
+          <a:off x="0" y="0"/>
+          <a:ext cx="0" cy="0"/>
+          <a:chOff x="0" y="0"/>
+          <a:chExt cx="0" cy="0"/>
+        </a:xfrm>
+      </p:grpSpPr>
+      <p:sp>
+        <p:nvSpPr>
+          <p:cNvPr id="2" name="Slide Image Placeholder 1"/>
+          <p:cNvSpPr>
+            <a:spLocks noGrp="1" noRot="1" noChangeAspect="1"/>
+          </p:cNvSpPr>
+          <p:nvPr>
+            <p:ph type="sldImg"/>
+          </p:nvPr>
+        </p:nvSpPr>
+        <p:spPr/>
+      </p:sp>
+      <p:sp>
+        <p:nvSpPr>
+          <p:cNvPr id="3" name="Notes Placeholder 2"/>
+          <p:cNvSpPr>
+            <a:spLocks noGrp="1"/>
+          </p:cNvSpPr>
+          <p:nvPr>
+            <p:ph type="body" idx="1"/>
+          </p:nvPr>
+        </p:nvSpPr>
+        <p:spPr/>
+        <p:txBody>
+          <a:bodyPr/>
+          <a:lstStyle/>
+          <a:p>
+            <a:r>
+              <a:rPr lang="en-US" dirty="0"/>
+              <a:t/>
+            </a:r>
+            <a:endParaRPr lang="en-US" dirty="0"/>
+          </a:p>
+        </p:txBody>
+      </p:sp>
+      <p:sp>
+        <p:nvSpPr>
+          <p:cNvPr id="4" name="Slide Number Placeholder 3"/>
+          <p:cNvSpPr>
+            <a:spLocks noGrp="1"/>
+          </p:cNvSpPr>
+          <p:nvPr>
+            <p:ph type="sldNum" sz="quarter" idx="10"/>
+          </p:nvPr>
+        </p:nvSpPr>
+        <p:spPr/>
+        <p:txBody>
+          <a:bodyPr/>
+          <a:lstStyle/>
+          <a:p>
+            <a:fld id="{F7021451-1387-4CA6-816F-3879F97B5CBC}" type="slidenum">
+              <a:rPr lang="en-US"/>
+              <a:t>11</a:t>
+            </a:fld>
+            <a:endParaRPr lang="en-US"/>
+          </a:p>
+        </p:txBody>
+      </p:sp>
+    </p:spTree>
+    <p:extLst>
+      <p:ext uri="{BB962C8B-B14F-4D97-AF65-F5344CB8AC3E}">
+        <p14:creationId xmlns:p14="http://schemas.microsoft.com/office/powerpoint/2010/main" val="1024086991"/>
+      </p:ext>
+    </p:extLst>
+  </p:cSld>
+  <p:clrMapOvr>
+    <a:masterClrMapping/>
+  </p:clrMapOvr>
+</p:notes>
+</file>
+
+<file path=ppt/notesSlides/notesSlide12.xml><?xml version="1.0" encoding="utf-8"?>
+<p:notes xmlns:a="http://schemas.openxmlformats.org/drawingml/2006/main" xmlns:r="http://schemas.openxmlformats.org/officeDocument/2006/relationships" xmlns:p="http://schemas.openxmlformats.org/presentationml/2006/main">
+  <p:cSld>
+    <p:spTree>
+      <p:nvGrpSpPr>
+        <p:cNvPr id="1" name=""/>
+        <p:cNvGrpSpPr/>
+        <p:nvPr/>
+      </p:nvGrpSpPr>
+      <p:grpSpPr>
+        <a:xfrm>
+          <a:off x="0" y="0"/>
+          <a:ext cx="0" cy="0"/>
+          <a:chOff x="0" y="0"/>
+          <a:chExt cx="0" cy="0"/>
+        </a:xfrm>
+      </p:grpSpPr>
+      <p:sp>
+        <p:nvSpPr>
+          <p:cNvPr id="2" name="Slide Image Placeholder 1"/>
+          <p:cNvSpPr>
+            <a:spLocks noGrp="1" noRot="1" noChangeAspect="1"/>
+          </p:cNvSpPr>
+          <p:nvPr>
+            <p:ph type="sldImg"/>
+          </p:nvPr>
+        </p:nvSpPr>
+        <p:spPr/>
+      </p:sp>
+      <p:sp>
+        <p:nvSpPr>
+          <p:cNvPr id="3" name="Notes Placeholder 2"/>
+          <p:cNvSpPr>
+            <a:spLocks noGrp="1"/>
+          </p:cNvSpPr>
+          <p:nvPr>
+            <p:ph type="body" idx="1"/>
+          </p:nvPr>
+        </p:nvSpPr>
+        <p:spPr/>
+        <p:txBody>
+          <a:bodyPr/>
+          <a:lstStyle/>
+          <a:p>
+            <a:r>
+              <a:rPr lang="en-US" dirty="0"/>
+              <a:t/>
+            </a:r>
+            <a:endParaRPr lang="en-US" dirty="0"/>
+          </a:p>
+        </p:txBody>
+      </p:sp>
+      <p:sp>
+        <p:nvSpPr>
+          <p:cNvPr id="4" name="Slide Number Placeholder 3"/>
+          <p:cNvSpPr>
+            <a:spLocks noGrp="1"/>
+          </p:cNvSpPr>
+          <p:nvPr>
+            <p:ph type="sldNum" sz="quarter" idx="10"/>
+          </p:nvPr>
+        </p:nvSpPr>
+        <p:spPr/>
+        <p:txBody>
+          <a:bodyPr/>
+          <a:lstStyle/>
+          <a:p>
+            <a:fld id="{F7021451-1387-4CA6-816F-3879F97B5CBC}" type="slidenum">
+              <a:rPr lang="en-US"/>
+              <a:t>12</a:t>
+            </a:fld>
+            <a:endParaRPr lang="en-US"/>
+          </a:p>
+        </p:txBody>
+      </p:sp>
+    </p:spTree>
+    <p:extLst>
+      <p:ext uri="{BB962C8B-B14F-4D97-AF65-F5344CB8AC3E}">
+        <p14:creationId xmlns:p14="http://schemas.microsoft.com/office/powerpoint/2010/main" val="1024086991"/>
+      </p:ext>
+    </p:extLst>
+  </p:cSld>
+  <p:clrMapOvr>
+    <a:masterClrMapping/>
+  </p:clrMapOvr>
+</p:notes>
+</file>
+
+<file path=ppt/notesSlides/notesSlide13.xml><?xml version="1.0" encoding="utf-8"?>
+<p:notes xmlns:a="http://schemas.openxmlformats.org/drawingml/2006/main" xmlns:r="http://schemas.openxmlformats.org/officeDocument/2006/relationships" xmlns:p="http://schemas.openxmlformats.org/presentationml/2006/main">
+  <p:cSld>
+    <p:spTree>
+      <p:nvGrpSpPr>
+        <p:cNvPr id="1" name=""/>
+        <p:cNvGrpSpPr/>
+        <p:nvPr/>
+      </p:nvGrpSpPr>
+      <p:grpSpPr>
+        <a:xfrm>
+          <a:off x="0" y="0"/>
+          <a:ext cx="0" cy="0"/>
+          <a:chOff x="0" y="0"/>
+          <a:chExt cx="0" cy="0"/>
+        </a:xfrm>
+      </p:grpSpPr>
+      <p:sp>
+        <p:nvSpPr>
+          <p:cNvPr id="2" name="Slide Image Placeholder 1"/>
+          <p:cNvSpPr>
+            <a:spLocks noGrp="1" noRot="1" noChangeAspect="1"/>
+          </p:cNvSpPr>
+          <p:nvPr>
+            <p:ph type="sldImg"/>
+          </p:nvPr>
+        </p:nvSpPr>
+        <p:spPr/>
+      </p:sp>
+      <p:sp>
+        <p:nvSpPr>
+          <p:cNvPr id="3" name="Notes Placeholder 2"/>
+          <p:cNvSpPr>
+            <a:spLocks noGrp="1"/>
+          </p:cNvSpPr>
+          <p:nvPr>
+            <p:ph type="body" idx="1"/>
+          </p:nvPr>
+        </p:nvSpPr>
+        <p:spPr/>
+        <p:txBody>
+          <a:bodyPr/>
+          <a:lstStyle/>
+          <a:p>
+            <a:r>
+              <a:rPr lang="en-US" dirty="0"/>
+              <a:t/>
+            </a:r>
+            <a:endParaRPr lang="en-US" dirty="0"/>
+          </a:p>
+        </p:txBody>
+      </p:sp>
+      <p:sp>
+        <p:nvSpPr>
+          <p:cNvPr id="4" name="Slide Number Placeholder 3"/>
+          <p:cNvSpPr>
+            <a:spLocks noGrp="1"/>
+          </p:cNvSpPr>
+          <p:nvPr>
+            <p:ph type="sldNum" sz="quarter" idx="10"/>
+          </p:nvPr>
+        </p:nvSpPr>
+        <p:spPr/>
+        <p:txBody>
+          <a:bodyPr/>
+          <a:lstStyle/>
+          <a:p>
+            <a:fld id="{F7021451-1387-4CA6-816F-3879F97B5CBC}" type="slidenum">
+              <a:rPr lang="en-US"/>
+              <a:t>13</a:t>
+            </a:fld>
+            <a:endParaRPr lang="en-US"/>
+          </a:p>
+        </p:txBody>
+      </p:sp>
+    </p:spTree>
+    <p:extLst>
+      <p:ext uri="{BB962C8B-B14F-4D97-AF65-F5344CB8AC3E}">
+        <p14:creationId xmlns:p14="http://schemas.microsoft.com/office/powerpoint/2010/main" val="1024086991"/>
+      </p:ext>
+    </p:extLst>
+  </p:cSld>
+  <p:clrMapOvr>
+    <a:masterClrMapping/>
+  </p:clrMapOvr>
+</p:notes>
+</file>
+
+<file path=ppt/notesSlides/notesSlide14.xml><?xml version="1.0" encoding="utf-8"?>
+<p:notes xmlns:a="http://schemas.openxmlformats.org/drawingml/2006/main" xmlns:r="http://schemas.openxmlformats.org/officeDocument/2006/relationships" xmlns:p="http://schemas.openxmlformats.org/presentationml/2006/main">
+  <p:cSld>
+    <p:spTree>
+      <p:nvGrpSpPr>
+        <p:cNvPr id="1" name=""/>
+        <p:cNvGrpSpPr/>
+        <p:nvPr/>
+      </p:nvGrpSpPr>
+      <p:grpSpPr>
+        <a:xfrm>
+          <a:off x="0" y="0"/>
+          <a:ext cx="0" cy="0"/>
+          <a:chOff x="0" y="0"/>
+          <a:chExt cx="0" cy="0"/>
+        </a:xfrm>
+      </p:grpSpPr>
+      <p:sp>
+        <p:nvSpPr>
+          <p:cNvPr id="2" name="Slide Image Placeholder 1"/>
+          <p:cNvSpPr>
+            <a:spLocks noGrp="1" noRot="1" noChangeAspect="1"/>
+          </p:cNvSpPr>
+          <p:nvPr>
+            <p:ph type="sldImg"/>
+          </p:nvPr>
+        </p:nvSpPr>
+        <p:spPr/>
+      </p:sp>
+      <p:sp>
+        <p:nvSpPr>
+          <p:cNvPr id="3" name="Notes Placeholder 2"/>
+          <p:cNvSpPr>
+            <a:spLocks noGrp="1"/>
+          </p:cNvSpPr>
+          <p:nvPr>
+            <p:ph type="body" idx="1"/>
+          </p:nvPr>
+        </p:nvSpPr>
+        <p:spPr/>
+        <p:txBody>
+          <a:bodyPr/>
+          <a:lstStyle/>
+          <a:p>
+            <a:r>
+              <a:rPr lang="en-US" dirty="0"/>
+              <a:t/>
+            </a:r>
+            <a:endParaRPr lang="en-US" dirty="0"/>
+          </a:p>
+        </p:txBody>
+      </p:sp>
+      <p:sp>
+        <p:nvSpPr>
+          <p:cNvPr id="4" name="Slide Number Placeholder 3"/>
+          <p:cNvSpPr>
+            <a:spLocks noGrp="1"/>
+          </p:cNvSpPr>
+          <p:nvPr>
+            <p:ph type="sldNum" sz="quarter" idx="10"/>
+          </p:nvPr>
+        </p:nvSpPr>
+        <p:spPr/>
+        <p:txBody>
+          <a:bodyPr/>
+          <a:lstStyle/>
+          <a:p>
+            <a:fld id="{F7021451-1387-4CA6-816F-3879F97B5CBC}" type="slidenum">
+              <a:rPr lang="en-US"/>
+              <a:t>14</a:t>
+            </a:fld>
+            <a:endParaRPr lang="en-US"/>
+          </a:p>
+        </p:txBody>
+      </p:sp>
+    </p:spTree>
+    <p:extLst>
+      <p:ext uri="{BB962C8B-B14F-4D97-AF65-F5344CB8AC3E}">
+        <p14:creationId xmlns:p14="http://schemas.microsoft.com/office/powerpoint/2010/main" val="1024086991"/>
+      </p:ext>
+    </p:extLst>
+  </p:cSld>
+  <p:clrMapOvr>
+    <a:masterClrMapping/>
+  </p:clrMapOvr>
+</p:notes>
+</file>
+
+<file path=ppt/notesSlides/notesSlide15.xml><?xml version="1.0" encoding="utf-8"?>
+<p:notes xmlns:a="http://schemas.openxmlformats.org/drawingml/2006/main" xmlns:r="http://schemas.openxmlformats.org/officeDocument/2006/relationships" xmlns:p="http://schemas.openxmlformats.org/presentationml/2006/main">
+  <p:cSld>
+    <p:spTree>
+      <p:nvGrpSpPr>
+        <p:cNvPr id="1" name=""/>
+        <p:cNvGrpSpPr/>
+        <p:nvPr/>
+      </p:nvGrpSpPr>
+      <p:grpSpPr>
+        <a:xfrm>
+          <a:off x="0" y="0"/>
+          <a:ext cx="0" cy="0"/>
+          <a:chOff x="0" y="0"/>
+          <a:chExt cx="0" cy="0"/>
+        </a:xfrm>
+      </p:grpSpPr>
+      <p:sp>
+        <p:nvSpPr>
+          <p:cNvPr id="2" name="Slide Image Placeholder 1"/>
+          <p:cNvSpPr>
+            <a:spLocks noGrp="1" noRot="1" noChangeAspect="1"/>
+          </p:cNvSpPr>
+          <p:nvPr>
+            <p:ph type="sldImg"/>
+          </p:nvPr>
+        </p:nvSpPr>
+        <p:spPr/>
+      </p:sp>
+      <p:sp>
+        <p:nvSpPr>
+          <p:cNvPr id="3" name="Notes Placeholder 2"/>
+          <p:cNvSpPr>
+            <a:spLocks noGrp="1"/>
+          </p:cNvSpPr>
+          <p:nvPr>
+            <p:ph type="body" idx="1"/>
+          </p:nvPr>
+        </p:nvSpPr>
+        <p:spPr/>
+        <p:txBody>
+          <a:bodyPr/>
+          <a:lstStyle/>
+          <a:p>
+            <a:r>
+              <a:rPr lang="en-US" dirty="0"/>
+              <a:t/>
+            </a:r>
+            <a:endParaRPr lang="en-US" dirty="0"/>
+          </a:p>
+        </p:txBody>
+      </p:sp>
+      <p:sp>
+        <p:nvSpPr>
+          <p:cNvPr id="4" name="Slide Number Placeholder 3"/>
+          <p:cNvSpPr>
+            <a:spLocks noGrp="1"/>
+          </p:cNvSpPr>
+          <p:nvPr>
+            <p:ph type="sldNum" sz="quarter" idx="10"/>
+          </p:nvPr>
+        </p:nvSpPr>
+        <p:spPr/>
+        <p:txBody>
+          <a:bodyPr/>
+          <a:lstStyle/>
+          <a:p>
+            <a:fld id="{F7021451-1387-4CA6-816F-3879F97B5CBC}" type="slidenum">
+              <a:rPr lang="en-US"/>
+              <a:t>15</a:t>
+            </a:fld>
+            <a:endParaRPr lang="en-US"/>
+          </a:p>
+        </p:txBody>
+      </p:sp>
+    </p:spTree>
+    <p:extLst>
+      <p:ext uri="{BB962C8B-B14F-4D97-AF65-F5344CB8AC3E}">
+        <p14:creationId xmlns:p14="http://schemas.microsoft.com/office/powerpoint/2010/main" val="1024086991"/>
+      </p:ext>
+    </p:extLst>
+  </p:cSld>
+  <p:clrMapOvr>
+    <a:masterClrMapping/>
+  </p:clrMapOvr>
+</p:notes>
+</file>
+
+<file path=ppt/notesSlides/notesSlide16.xml><?xml version="1.0" encoding="utf-8"?>
+<p:notes xmlns:a="http://schemas.openxmlformats.org/drawingml/2006/main" xmlns:r="http://schemas.openxmlformats.org/officeDocument/2006/relationships" xmlns:p="http://schemas.openxmlformats.org/presentationml/2006/main">
+  <p:cSld>
+    <p:spTree>
+      <p:nvGrpSpPr>
+        <p:cNvPr id="1" name=""/>
+        <p:cNvGrpSpPr/>
+        <p:nvPr/>
+      </p:nvGrpSpPr>
+      <p:grpSpPr>
+        <a:xfrm>
+          <a:off x="0" y="0"/>
+          <a:ext cx="0" cy="0"/>
+          <a:chOff x="0" y="0"/>
+          <a:chExt cx="0" cy="0"/>
+        </a:xfrm>
+      </p:grpSpPr>
+      <p:sp>
+        <p:nvSpPr>
+          <p:cNvPr id="2" name="Slide Image Placeholder 1"/>
+          <p:cNvSpPr>
+            <a:spLocks noGrp="1" noRot="1" noChangeAspect="1"/>
+          </p:cNvSpPr>
+          <p:nvPr>
+            <p:ph type="sldImg"/>
+          </p:nvPr>
+        </p:nvSpPr>
+        <p:spPr/>
+      </p:sp>
+      <p:sp>
+        <p:nvSpPr>
+          <p:cNvPr id="3" name="Notes Placeholder 2"/>
+          <p:cNvSpPr>
+            <a:spLocks noGrp="1"/>
+          </p:cNvSpPr>
+          <p:nvPr>
+            <p:ph type="body" idx="1"/>
+          </p:nvPr>
+        </p:nvSpPr>
+        <p:spPr/>
+        <p:txBody>
+          <a:bodyPr/>
+          <a:lstStyle/>
+          <a:p>
+            <a:r>
+              <a:rPr lang="en-US" dirty="0"/>
+              <a:t/>
+            </a:r>
+            <a:endParaRPr lang="en-US" dirty="0"/>
+          </a:p>
+        </p:txBody>
+      </p:sp>
+      <p:sp>
+        <p:nvSpPr>
+          <p:cNvPr id="4" name="Slide Number Placeholder 3"/>
+          <p:cNvSpPr>
+            <a:spLocks noGrp="1"/>
+          </p:cNvSpPr>
+          <p:nvPr>
+            <p:ph type="sldNum" sz="quarter" idx="10"/>
+          </p:nvPr>
+        </p:nvSpPr>
+        <p:spPr/>
+        <p:txBody>
+          <a:bodyPr/>
+          <a:lstStyle/>
+          <a:p>
+            <a:fld id="{F7021451-1387-4CA6-816F-3879F97B5CBC}" type="slidenum">
+              <a:rPr lang="en-US"/>
+              <a:t>16</a:t>
+            </a:fld>
+            <a:endParaRPr lang="en-US"/>
+          </a:p>
+        </p:txBody>
+      </p:sp>
+    </p:spTree>
+    <p:extLst>
+      <p:ext uri="{BB962C8B-B14F-4D97-AF65-F5344CB8AC3E}">
+        <p14:creationId xmlns:p14="http://schemas.microsoft.com/office/powerpoint/2010/main" val="1024086991"/>
+      </p:ext>
+    </p:extLst>
+  </p:cSld>
+  <p:clrMapOvr>
+    <a:masterClrMapping/>
+  </p:clrMapOvr>
+</p:notes>
+</file>
+
+<file path=ppt/notesSlides/notesSlide17.xml><?xml version="1.0" encoding="utf-8"?>
+<p:notes xmlns:a="http://schemas.openxmlformats.org/drawingml/2006/main" xmlns:r="http://schemas.openxmlformats.org/officeDocument/2006/relationships" xmlns:p="http://schemas.openxmlformats.org/presentationml/2006/main">
+  <p:cSld>
+    <p:spTree>
+      <p:nvGrpSpPr>
+        <p:cNvPr id="1" name=""/>
+        <p:cNvGrpSpPr/>
+        <p:nvPr/>
+      </p:nvGrpSpPr>
+      <p:grpSpPr>
+        <a:xfrm>
+          <a:off x="0" y="0"/>
+          <a:ext cx="0" cy="0"/>
+          <a:chOff x="0" y="0"/>
+          <a:chExt cx="0" cy="0"/>
+        </a:xfrm>
+      </p:grpSpPr>
+      <p:sp>
+        <p:nvSpPr>
+          <p:cNvPr id="2" name="Slide Image Placeholder 1"/>
+          <p:cNvSpPr>
+            <a:spLocks noGrp="1" noRot="1" noChangeAspect="1"/>
+          </p:cNvSpPr>
+          <p:nvPr>
+            <p:ph type="sldImg"/>
+          </p:nvPr>
+        </p:nvSpPr>
+        <p:spPr/>
+      </p:sp>
+      <p:sp>
+        <p:nvSpPr>
+          <p:cNvPr id="3" name="Notes Placeholder 2"/>
+          <p:cNvSpPr>
+            <a:spLocks noGrp="1"/>
+          </p:cNvSpPr>
+          <p:nvPr>
+            <p:ph type="body" idx="1"/>
+          </p:nvPr>
+        </p:nvSpPr>
+        <p:spPr/>
+        <p:txBody>
+          <a:bodyPr/>
+          <a:lstStyle/>
+          <a:p>
+            <a:r>
+              <a:rPr lang="en-US" dirty="0"/>
+              <a:t/>
+            </a:r>
+            <a:endParaRPr lang="en-US" dirty="0"/>
+          </a:p>
+        </p:txBody>
+      </p:sp>
+      <p:sp>
+        <p:nvSpPr>
+          <p:cNvPr id="4" name="Slide Number Placeholder 3"/>
+          <p:cNvSpPr>
+            <a:spLocks noGrp="1"/>
+          </p:cNvSpPr>
+          <p:nvPr>
+            <p:ph type="sldNum" sz="quarter" idx="10"/>
+          </p:nvPr>
+        </p:nvSpPr>
+        <p:spPr/>
+        <p:txBody>
+          <a:bodyPr/>
+          <a:lstStyle/>
+          <a:p>
+            <a:fld id="{F7021451-1387-4CA6-816F-3879F97B5CBC}" type="slidenum">
+              <a:rPr lang="en-US"/>
+              <a:t>17</a:t>
+            </a:fld>
+            <a:endParaRPr lang="en-US"/>
+          </a:p>
+        </p:txBody>
+      </p:sp>
+    </p:spTree>
+    <p:extLst>
+      <p:ext uri="{BB962C8B-B14F-4D97-AF65-F5344CB8AC3E}">
+        <p14:creationId xmlns:p14="http://schemas.microsoft.com/office/powerpoint/2010/main" val="1024086991"/>
+      </p:ext>
+    </p:extLst>
+  </p:cSld>
+  <p:clrMapOvr>
+    <a:masterClrMapping/>
+  </p:clrMapOvr>
+</p:notes>
+</file>
+
+<file path=ppt/notesSlides/notesSlide18.xml><?xml version="1.0" encoding="utf-8"?>
+<p:notes xmlns:a="http://schemas.openxmlformats.org/drawingml/2006/main" xmlns:r="http://schemas.openxmlformats.org/officeDocument/2006/relationships" xmlns:p="http://schemas.openxmlformats.org/presentationml/2006/main">
+  <p:cSld>
+    <p:spTree>
+      <p:nvGrpSpPr>
+        <p:cNvPr id="1" name=""/>
+        <p:cNvGrpSpPr/>
+        <p:nvPr/>
+      </p:nvGrpSpPr>
+      <p:grpSpPr>
+        <a:xfrm>
+          <a:off x="0" y="0"/>
+          <a:ext cx="0" cy="0"/>
+          <a:chOff x="0" y="0"/>
+          <a:chExt cx="0" cy="0"/>
+        </a:xfrm>
+      </p:grpSpPr>
+      <p:sp>
+        <p:nvSpPr>
+          <p:cNvPr id="2" name="Slide Image Placeholder 1"/>
+          <p:cNvSpPr>
+            <a:spLocks noGrp="1" noRot="1" noChangeAspect="1"/>
+          </p:cNvSpPr>
+          <p:nvPr>
+            <p:ph type="sldImg"/>
+          </p:nvPr>
+        </p:nvSpPr>
+        <p:spPr/>
+      </p:sp>
+      <p:sp>
+        <p:nvSpPr>
+          <p:cNvPr id="3" name="Notes Placeholder 2"/>
+          <p:cNvSpPr>
+            <a:spLocks noGrp="1"/>
+          </p:cNvSpPr>
+          <p:nvPr>
+            <p:ph type="body" idx="1"/>
+          </p:nvPr>
+        </p:nvSpPr>
+        <p:spPr/>
+        <p:txBody>
+          <a:bodyPr/>
+          <a:lstStyle/>
+          <a:p>
+            <a:r>
+              <a:rPr lang="en-US" dirty="0"/>
+              <a:t/>
+            </a:r>
+            <a:endParaRPr lang="en-US" dirty="0"/>
+          </a:p>
+        </p:txBody>
+      </p:sp>
+      <p:sp>
+        <p:nvSpPr>
+          <p:cNvPr id="4" name="Slide Number Placeholder 3"/>
+          <p:cNvSpPr>
+            <a:spLocks noGrp="1"/>
+          </p:cNvSpPr>
+          <p:nvPr>
+            <p:ph type="sldNum" sz="quarter" idx="10"/>
+          </p:nvPr>
+        </p:nvSpPr>
+        <p:spPr/>
+        <p:txBody>
+          <a:bodyPr/>
+          <a:lstStyle/>
+          <a:p>
+            <a:fld id="{F7021451-1387-4CA6-816F-3879F97B5CBC}" type="slidenum">
+              <a:rPr lang="en-US"/>
+              <a:t>18</a:t>
+            </a:fld>
+            <a:endParaRPr lang="en-US"/>
+          </a:p>
+        </p:txBody>
+      </p:sp>
+    </p:spTree>
+    <p:extLst>
+      <p:ext uri="{BB962C8B-B14F-4D97-AF65-F5344CB8AC3E}">
+        <p14:creationId xmlns:p14="http://schemas.microsoft.com/office/powerpoint/2010/main" val="1024086991"/>
+      </p:ext>
+    </p:extLst>
+  </p:cSld>
+  <p:clrMapOvr>
+    <a:masterClrMapping/>
+  </p:clrMapOvr>
+</p:notes>
+</file>
+
+<file path=ppt/notesSlides/notesSlide19.xml><?xml version="1.0" encoding="utf-8"?>
+<p:notes xmlns:a="http://schemas.openxmlformats.org/drawingml/2006/main" xmlns:r="http://schemas.openxmlformats.org/officeDocument/2006/relationships" xmlns:p="http://schemas.openxmlformats.org/presentationml/2006/main">
+  <p:cSld>
+    <p:spTree>
+      <p:nvGrpSpPr>
+        <p:cNvPr id="1" name=""/>
+        <p:cNvGrpSpPr/>
+        <p:nvPr/>
+      </p:nvGrpSpPr>
+      <p:grpSpPr>
+        <a:xfrm>
+          <a:off x="0" y="0"/>
+          <a:ext cx="0" cy="0"/>
+          <a:chOff x="0" y="0"/>
+          <a:chExt cx="0" cy="0"/>
+        </a:xfrm>
+      </p:grpSpPr>
+      <p:sp>
+        <p:nvSpPr>
+          <p:cNvPr id="2" name="Slide Image Placeholder 1"/>
+          <p:cNvSpPr>
+            <a:spLocks noGrp="1" noRot="1" noChangeAspect="1"/>
+          </p:cNvSpPr>
+          <p:nvPr>
+            <p:ph type="sldImg"/>
+          </p:nvPr>
+        </p:nvSpPr>
+        <p:spPr/>
+      </p:sp>
+      <p:sp>
+        <p:nvSpPr>
+          <p:cNvPr id="3" name="Notes Placeholder 2"/>
+          <p:cNvSpPr>
+            <a:spLocks noGrp="1"/>
+          </p:cNvSpPr>
+          <p:nvPr>
+            <p:ph type="body" idx="1"/>
+          </p:nvPr>
+        </p:nvSpPr>
+        <p:spPr/>
+        <p:txBody>
+          <a:bodyPr/>
+          <a:lstStyle/>
+          <a:p>
+            <a:r>
+              <a:rPr lang="en-US" dirty="0"/>
+              <a:t/>
+            </a:r>
+            <a:endParaRPr lang="en-US" dirty="0"/>
+          </a:p>
+        </p:txBody>
+      </p:sp>
+      <p:sp>
+        <p:nvSpPr>
+          <p:cNvPr id="4" name="Slide Number Placeholder 3"/>
+          <p:cNvSpPr>
+            <a:spLocks noGrp="1"/>
+          </p:cNvSpPr>
+          <p:nvPr>
+            <p:ph type="sldNum" sz="quarter" idx="10"/>
+          </p:nvPr>
+        </p:nvSpPr>
+        <p:spPr/>
+        <p:txBody>
+          <a:bodyPr/>
+          <a:lstStyle/>
+          <a:p>
+            <a:fld id="{F7021451-1387-4CA6-816F-3879F97B5CBC}" type="slidenum">
+              <a:rPr lang="en-US"/>
+              <a:t>19</a:t>
             </a:fld>
             <a:endParaRPr lang="en-US"/>
           </a:p>
@@ -1922,102 +2723,6 @@
         </p:nvSpPr>
         <p:spPr>
           <a:xfrm>
-            <a:off x="406301" y="1574453"/>
-            <a:ext cx="8498026" cy="274290"/>
-          </a:xfrm>
-          <a:prstGeom prst="rect">
-            <a:avLst/>
-          </a:prstGeom>
-          <a:noFill/>
-          <a:ln/>
-        </p:spPr>
-        <p:txBody>
-          <a:bodyPr wrap="square" lIns="0" tIns="0" rIns="0" bIns="0" rtlCol="0" anchor="t"/>
-          <a:lstStyle/>
-          <a:p>
-            <a:pPr algn="l" indent="0" marL="0">
-              <a:lnSpc>
-                <a:spcPts val="2160"/>
-              </a:lnSpc>
-              <a:spcBef>
-                <a:spcPts val="600"/>
-              </a:spcBef>
-              <a:spcAft>
-                <a:spcPts val="800"/>
-              </a:spcAft>
-              <a:buNone/>
-            </a:pPr>
-            <a:r>
-              <a:rPr lang="en-US" sz="1800" b="1" dirty="0">
-                <a:solidFill>
-                  <a:srgbClr val="FE4447"/>
-                </a:solidFill>
-                <a:latin typeface="Georgia" pitchFamily="34" charset="0"/>
-                <a:ea typeface="Georgia" pitchFamily="34" charset="-122"/>
-                <a:cs typeface="Georgia" pitchFamily="34" charset="-120"/>
-              </a:rPr>
-              <a:t>Learning objective</a:t>
-            </a:r>
-            <a:endParaRPr lang="en-US" sz="1800" dirty="0"/>
-          </a:p>
-        </p:txBody>
-      </p:sp>
-      <p:sp>
-        <p:nvSpPr>
-          <p:cNvPr id="6" name="Text 4"/>
-          <p:cNvSpPr/>
-          <p:nvPr/>
-        </p:nvSpPr>
-        <p:spPr>
-          <a:xfrm>
-            <a:off x="406301" y="1988344"/>
-            <a:ext cx="8498026" cy="426541"/>
-          </a:xfrm>
-          <a:prstGeom prst="rect">
-            <a:avLst/>
-          </a:prstGeom>
-          <a:noFill/>
-          <a:ln/>
-        </p:spPr>
-        <p:txBody>
-          <a:bodyPr wrap="square" lIns="0" tIns="0" rIns="0" bIns="0" rtlCol="0" anchor="t"/>
-          <a:lstStyle/>
-          <a:p>
-            <a:pPr algn="l" indent="0" marL="0">
-              <a:lnSpc>
-                <a:spcPts val="1680"/>
-              </a:lnSpc>
-              <a:spcBef>
-                <a:spcPts val="300"/>
-              </a:spcBef>
-              <a:spcAft>
-                <a:spcPts val="300"/>
-              </a:spcAft>
-              <a:buNone/>
-            </a:pPr>
-            <a:r>
-              <a:rPr lang="en-US" sz="1200" dirty="0">
-                <a:solidFill>
-                  <a:srgbClr val="1C2833"/>
-                </a:solidFill>
-                <a:latin typeface="Arial" pitchFamily="34" charset="0"/>
-                <a:ea typeface="Arial" pitchFamily="34" charset="-122"/>
-                <a:cs typeface="Arial" pitchFamily="34" charset="-120"/>
-              </a:rPr>
-              <a:t>Students will compare the Indian lunisolar calendar with three other lunar/lunisolar calendars (Islamic Hijri, Chinese, Hebrew) — identifying what is shared (lunar month basis) and what differs (intercalation rules).</a:t>
-            </a:r>
-            <a:endParaRPr lang="en-US" sz="1200" dirty="0"/>
-          </a:p>
-        </p:txBody>
-      </p:sp>
-      <p:sp>
-        <p:nvSpPr>
-          <p:cNvPr id="7" name="Text 5"/>
-          <p:cNvSpPr/>
-          <p:nvPr/>
-        </p:nvSpPr>
-        <p:spPr>
-          <a:xfrm>
             <a:off x="406301" y="4434929"/>
             <a:ext cx="8498026" cy="213271"/>
           </a:xfrm>
@@ -2162,7 +2867,7 @@
                 <a:ea typeface="Georgia" pitchFamily="34" charset="-122"/>
                 <a:cs typeface="Georgia" pitchFamily="34" charset="-120"/>
               </a:rPr>
-              <a:t>Citation(s) used in this lesson</a:t>
+              <a:t>Core content (15 min) (cont.)</a:t>
             </a:r>
             <a:endParaRPr lang="en-US" sz="1800" dirty="0"/>
           </a:p>
@@ -2176,6 +2881,1230 @@
         </p:nvSpPr>
         <p:spPr>
           <a:xfrm>
+            <a:off x="634901" y="883593"/>
+            <a:ext cx="8102798" cy="281880"/>
+          </a:xfrm>
+          <a:prstGeom prst="rect">
+            <a:avLst/>
+          </a:prstGeom>
+          <a:noFill/>
+          <a:ln/>
+        </p:spPr>
+        <p:txBody>
+          <a:bodyPr wrap="square" lIns="0" tIns="0" rIns="0" bIns="0" rtlCol="0" anchor="t"/>
+          <a:lstStyle/>
+          <a:p>
+            <a:pPr algn="l" marL="342900" indent="-342900">
+              <a:lnSpc>
+                <a:spcPts val="1620"/>
+              </a:lnSpc>
+              <a:spcAft>
+                <a:spcPts val="300"/>
+              </a:spcAft>
+              <a:buSzPct val="100000"/>
+              <a:buChar char="•"/>
+            </a:pPr>
+            <a:r>
+              <a:rPr lang="en-US" sz="1200" b="1" dirty="0">
+                <a:solidFill>
+                  <a:srgbClr val="1C2833"/>
+                </a:solidFill>
+                <a:latin typeface="Arial" pitchFamily="34" charset="0"/>
+                <a:ea typeface="Arial" pitchFamily="34" charset="-122"/>
+                <a:cs typeface="Arial" pitchFamily="34" charset="-120"/>
+              </a:rPr>
+              <a:t>Drift through seasons</a:t>
+            </a:r>
+            <a:pPr algn="l" indent="0" marL="0">
+              <a:lnSpc>
+                <a:spcPts val="1620"/>
+              </a:lnSpc>
+              <a:spcAft>
+                <a:spcPts val="300"/>
+              </a:spcAft>
+              <a:buNone/>
+            </a:pPr>
+            <a:r>
+              <a:rPr lang="en-US" sz="1200" dirty="0">
+                <a:solidFill>
+                  <a:srgbClr val="1C2833"/>
+                </a:solidFill>
+                <a:latin typeface="Arial" pitchFamily="34" charset="0"/>
+                <a:ea typeface="Arial" pitchFamily="34" charset="-122"/>
+                <a:cs typeface="Arial" pitchFamily="34" charset="-120"/>
+              </a:rPr>
+              <a:t> — Stays aligned · Drifts ~11 days/year backward · Stays aligned · Stays aligned</a:t>
+            </a:r>
+            <a:endParaRPr lang="en-US" sz="1200" dirty="0"/>
+          </a:p>
+        </p:txBody>
+      </p:sp>
+      <p:sp>
+        <p:nvSpPr>
+          <p:cNvPr id="5" name="Text 3"/>
+          <p:cNvSpPr/>
+          <p:nvPr/>
+        </p:nvSpPr>
+        <p:spPr>
+          <a:xfrm>
+            <a:off x="634901" y="1266974"/>
+            <a:ext cx="8102798" cy="898922"/>
+          </a:xfrm>
+          <a:prstGeom prst="rect">
+            <a:avLst/>
+          </a:prstGeom>
+          <a:noFill/>
+          <a:ln/>
+        </p:spPr>
+        <p:txBody>
+          <a:bodyPr wrap="square" lIns="0" tIns="0" rIns="0" bIns="0" rtlCol="0" anchor="t"/>
+          <a:lstStyle/>
+          <a:p>
+            <a:pPr algn="l" marL="342900" indent="-342900">
+              <a:lnSpc>
+                <a:spcPts val="1620"/>
+              </a:lnSpc>
+              <a:spcAft>
+                <a:spcPts val="300"/>
+              </a:spcAft>
+              <a:buSzPct val="100000"/>
+              <a:buChar char="•"/>
+            </a:pPr>
+            <a:r>
+              <a:rPr lang="en-US" sz="1200" b="1" dirty="0">
+                <a:solidFill>
+                  <a:srgbClr val="1C2833"/>
+                </a:solidFill>
+                <a:latin typeface="Arial" pitchFamily="34" charset="0"/>
+                <a:ea typeface="Arial" pitchFamily="34" charset="-122"/>
+                <a:cs typeface="Arial" pitchFamily="34" charset="-120"/>
+              </a:rPr>
+              <a:t>A specific example.</a:t>
+            </a:r>
+            <a:pPr algn="l" indent="0" marL="0">
+              <a:lnSpc>
+                <a:spcPts val="1620"/>
+              </a:lnSpc>
+              <a:spcAft>
+                <a:spcPts val="300"/>
+              </a:spcAft>
+              <a:buNone/>
+            </a:pPr>
+            <a:r>
+              <a:rPr lang="en-US" sz="1200" dirty="0">
+                <a:solidFill>
+                  <a:srgbClr val="1C2833"/>
+                </a:solidFill>
+                <a:latin typeface="Arial" pitchFamily="34" charset="0"/>
+                <a:ea typeface="Arial" pitchFamily="34" charset="-122"/>
+                <a:cs typeface="Arial" pitchFamily="34" charset="-120"/>
+              </a:rPr>
+              <a:t> </a:t>
+            </a:r>
+            <a:pPr algn="l" indent="0" marL="0">
+              <a:lnSpc>
+                <a:spcPts val="1620"/>
+              </a:lnSpc>
+              <a:spcAft>
+                <a:spcPts val="300"/>
+              </a:spcAft>
+              <a:buNone/>
+            </a:pPr>
+            <a:r>
+              <a:rPr lang="en-US" sz="1200" i="1" dirty="0">
+                <a:solidFill>
+                  <a:srgbClr val="1C2833"/>
+                </a:solidFill>
+                <a:latin typeface="Arial" pitchFamily="34" charset="0"/>
+                <a:ea typeface="Arial" pitchFamily="34" charset="-122"/>
+                <a:cs typeface="Arial" pitchFamily="34" charset="-120"/>
+              </a:rPr>
+              <a:t>Ramaḍān</a:t>
+            </a:r>
+            <a:pPr algn="l" indent="0" marL="0">
+              <a:lnSpc>
+                <a:spcPts val="1620"/>
+              </a:lnSpc>
+              <a:spcAft>
+                <a:spcPts val="300"/>
+              </a:spcAft>
+              <a:buNone/>
+            </a:pPr>
+            <a:r>
+              <a:rPr lang="en-US" sz="1200" dirty="0">
+                <a:solidFill>
+                  <a:srgbClr val="1C2833"/>
+                </a:solidFill>
+                <a:latin typeface="Arial" pitchFamily="34" charset="0"/>
+                <a:ea typeface="Arial" pitchFamily="34" charset="-122"/>
+                <a:cs typeface="Arial" pitchFamily="34" charset="-120"/>
+              </a:rPr>
+              <a:t> (Islamic) shifts ~11 days earlier each Gregorian year. </a:t>
+            </a:r>
+            <a:pPr algn="l" indent="0" marL="0">
+              <a:lnSpc>
+                <a:spcPts val="1620"/>
+              </a:lnSpc>
+              <a:spcAft>
+                <a:spcPts val="300"/>
+              </a:spcAft>
+              <a:buNone/>
+            </a:pPr>
+            <a:r>
+              <a:rPr lang="en-US" sz="1200" i="1" dirty="0">
+                <a:solidFill>
+                  <a:srgbClr val="1C2833"/>
+                </a:solidFill>
+                <a:latin typeface="Arial" pitchFamily="34" charset="0"/>
+                <a:ea typeface="Arial" pitchFamily="34" charset="-122"/>
+                <a:cs typeface="Arial" pitchFamily="34" charset="-120"/>
+              </a:rPr>
+              <a:t>Caitra śukla pratipadā</a:t>
+            </a:r>
+            <a:pPr algn="l" indent="0" marL="0">
+              <a:lnSpc>
+                <a:spcPts val="1620"/>
+              </a:lnSpc>
+              <a:spcAft>
+                <a:spcPts val="300"/>
+              </a:spcAft>
+              <a:buNone/>
+            </a:pPr>
+            <a:r>
+              <a:rPr lang="en-US" sz="1200" dirty="0">
+                <a:solidFill>
+                  <a:srgbClr val="1C2833"/>
+                </a:solidFill>
+                <a:latin typeface="Arial" pitchFamily="34" charset="0"/>
+                <a:ea typeface="Arial" pitchFamily="34" charset="-122"/>
+                <a:cs typeface="Arial" pitchFamily="34" charset="-120"/>
+              </a:rPr>
+              <a:t> (Indian new year, </a:t>
+            </a:r>
+            <a:pPr algn="l" indent="0" marL="0">
+              <a:lnSpc>
+                <a:spcPts val="1620"/>
+              </a:lnSpc>
+              <a:spcAft>
+                <a:spcPts val="300"/>
+              </a:spcAft>
+              <a:buNone/>
+            </a:pPr>
+            <a:r>
+              <a:rPr lang="en-US" sz="1200" i="1" dirty="0">
+                <a:solidFill>
+                  <a:srgbClr val="1C2833"/>
+                </a:solidFill>
+                <a:latin typeface="Arial" pitchFamily="34" charset="0"/>
+                <a:ea typeface="Arial" pitchFamily="34" charset="-122"/>
+                <a:cs typeface="Arial" pitchFamily="34" charset="-120"/>
+              </a:rPr>
+              <a:t>Ugādi/Gudi Pādvā</a:t>
+            </a:r>
+            <a:pPr algn="l" indent="0" marL="0">
+              <a:lnSpc>
+                <a:spcPts val="1620"/>
+              </a:lnSpc>
+              <a:spcAft>
+                <a:spcPts val="300"/>
+              </a:spcAft>
+              <a:buNone/>
+            </a:pPr>
+            <a:r>
+              <a:rPr lang="en-US" sz="1200" dirty="0">
+                <a:solidFill>
+                  <a:srgbClr val="1C2833"/>
+                </a:solidFill>
+                <a:latin typeface="Arial" pitchFamily="34" charset="0"/>
+                <a:ea typeface="Arial" pitchFamily="34" charset="-122"/>
+                <a:cs typeface="Arial" pitchFamily="34" charset="-120"/>
+              </a:rPr>
+              <a:t>) stays in March–April. </a:t>
+            </a:r>
+            <a:pPr algn="l" indent="0" marL="0">
+              <a:lnSpc>
+                <a:spcPts val="1620"/>
+              </a:lnSpc>
+              <a:spcAft>
+                <a:spcPts val="300"/>
+              </a:spcAft>
+              <a:buNone/>
+            </a:pPr>
+            <a:r>
+              <a:rPr lang="en-US" sz="1200" i="1" dirty="0">
+                <a:solidFill>
+                  <a:srgbClr val="1C2833"/>
+                </a:solidFill>
+                <a:latin typeface="Arial" pitchFamily="34" charset="0"/>
+                <a:ea typeface="Arial" pitchFamily="34" charset="-122"/>
+                <a:cs typeface="Arial" pitchFamily="34" charset="-120"/>
+              </a:rPr>
+              <a:t>Pesach</a:t>
+            </a:r>
+            <a:pPr algn="l" indent="0" marL="0">
+              <a:lnSpc>
+                <a:spcPts val="1620"/>
+              </a:lnSpc>
+              <a:spcAft>
+                <a:spcPts val="300"/>
+              </a:spcAft>
+              <a:buNone/>
+            </a:pPr>
+            <a:r>
+              <a:rPr lang="en-US" sz="1200" dirty="0">
+                <a:solidFill>
+                  <a:srgbClr val="1C2833"/>
+                </a:solidFill>
+                <a:latin typeface="Arial" pitchFamily="34" charset="0"/>
+                <a:ea typeface="Arial" pitchFamily="34" charset="-122"/>
+                <a:cs typeface="Arial" pitchFamily="34" charset="-120"/>
+              </a:rPr>
+              <a:t> (Hebrew) stays in spring. </a:t>
+            </a:r>
+            <a:pPr algn="l" indent="0" marL="0">
+              <a:lnSpc>
+                <a:spcPts val="1620"/>
+              </a:lnSpc>
+              <a:spcAft>
+                <a:spcPts val="300"/>
+              </a:spcAft>
+              <a:buNone/>
+            </a:pPr>
+            <a:r>
+              <a:rPr lang="en-US" sz="1200" i="1" dirty="0">
+                <a:solidFill>
+                  <a:srgbClr val="1C2833"/>
+                </a:solidFill>
+                <a:latin typeface="Arial" pitchFamily="34" charset="0"/>
+                <a:ea typeface="Arial" pitchFamily="34" charset="-122"/>
+                <a:cs typeface="Arial" pitchFamily="34" charset="-120"/>
+              </a:rPr>
+              <a:t>Chūn Jié</a:t>
+            </a:r>
+            <a:pPr algn="l" indent="0" marL="0">
+              <a:lnSpc>
+                <a:spcPts val="1620"/>
+              </a:lnSpc>
+              <a:spcAft>
+                <a:spcPts val="300"/>
+              </a:spcAft>
+              <a:buNone/>
+            </a:pPr>
+            <a:r>
+              <a:rPr lang="en-US" sz="1200" dirty="0">
+                <a:solidFill>
+                  <a:srgbClr val="1C2833"/>
+                </a:solidFill>
+                <a:latin typeface="Arial" pitchFamily="34" charset="0"/>
+                <a:ea typeface="Arial" pitchFamily="34" charset="-122"/>
+                <a:cs typeface="Arial" pitchFamily="34" charset="-120"/>
+              </a:rPr>
+              <a:t> (Chinese new year) stays in late January / early February. The lunisolar systems all use intercalation to keep their months in-season; the pure lunar system does not.</a:t>
+            </a:r>
+            <a:endParaRPr lang="en-US" sz="1200" dirty="0"/>
+          </a:p>
+        </p:txBody>
+      </p:sp>
+      <p:sp>
+        <p:nvSpPr>
+          <p:cNvPr id="6" name="Text 4"/>
+          <p:cNvSpPr/>
+          <p:nvPr/>
+        </p:nvSpPr>
+        <p:spPr>
+          <a:xfrm>
+            <a:off x="406301" y="4434929"/>
+            <a:ext cx="8498026" cy="213271"/>
+          </a:xfrm>
+          <a:prstGeom prst="rect">
+            <a:avLst/>
+          </a:prstGeom>
+          <a:noFill/>
+          <a:ln/>
+        </p:spPr>
+        <p:txBody>
+          <a:bodyPr wrap="square" lIns="0" tIns="0" rIns="0" bIns="0" rtlCol="0" anchor="t"/>
+          <a:lstStyle/>
+          <a:p>
+            <a:pPr algn="l" indent="0" marL="0">
+              <a:lnSpc>
+                <a:spcPts val="1680"/>
+              </a:lnSpc>
+              <a:spcBef>
+                <a:spcPts val="300"/>
+              </a:spcBef>
+              <a:spcAft>
+                <a:spcPts val="300"/>
+              </a:spcAft>
+              <a:buNone/>
+            </a:pPr>
+            <a:r>
+              <a:rPr lang="en-US" sz="1200" dirty="0">
+                <a:solidFill>
+                  <a:srgbClr val="1C2833"/>
+                </a:solidFill>
+                <a:latin typeface="Arial" pitchFamily="34" charset="0"/>
+                <a:ea typeface="Arial" pitchFamily="34" charset="-122"/>
+                <a:cs typeface="Arial" pitchFamily="34" charset="-120"/>
+              </a:rPr>
+              <a:t>Middle ·  · IKS Curriculum</a:t>
+            </a:r>
+            <a:endParaRPr lang="en-US" sz="1200" dirty="0"/>
+          </a:p>
+        </p:txBody>
+      </p:sp>
+    </p:spTree>
+  </p:cSld>
+  <p:clrMapOvr>
+    <a:masterClrMapping/>
+  </p:clrMapOvr>
+</p:sld>
+</file>
+
+<file path=ppt/slides/slide11.xml><?xml version="1.0" encoding="utf-8"?>
+<p:sld xmlns:a="http://schemas.openxmlformats.org/drawingml/2006/main" xmlns:r="http://schemas.openxmlformats.org/officeDocument/2006/relationships" xmlns:p="http://schemas.openxmlformats.org/presentationml/2006/main">
+  <p:cSld name="Slide 11">
+    <p:bg>
+      <p:bgPr>
+        <a:solidFill>
+          <a:srgbClr val="FFFFFF"/>
+        </a:solidFill>
+      </p:bgPr>
+    </p:bg>
+    <p:spTree>
+      <p:nvGrpSpPr>
+        <p:cNvPr id="1" name=""/>
+        <p:cNvGrpSpPr/>
+        <p:nvPr/>
+      </p:nvGrpSpPr>
+      <p:grpSpPr>
+        <a:xfrm>
+          <a:off x="0" y="0"/>
+          <a:ext cx="0" cy="0"/>
+          <a:chOff x="0" y="0"/>
+          <a:chExt cx="0" cy="0"/>
+        </a:xfrm>
+      </p:grpSpPr>
+      <p:sp>
+        <p:nvSpPr>
+          <p:cNvPr id="2" name="Text 0"/>
+          <p:cNvSpPr/>
+          <p:nvPr/>
+        </p:nvSpPr>
+        <p:spPr>
+          <a:xfrm>
+            <a:off x="0" y="0"/>
+            <a:ext cx="9144000" cy="101501"/>
+          </a:xfrm>
+          <a:prstGeom prst="rect">
+            <a:avLst/>
+          </a:prstGeom>
+          <a:solidFill>
+            <a:srgbClr val="277884"/>
+          </a:solidFill>
+          <a:ln/>
+        </p:spPr>
+        <p:txBody>
+          <a:bodyPr wrap="square" rtlCol="0" anchor="ctr"/>
+          <a:lstStyle/>
+          <a:p>
+            <a:pPr indent="0" marL="0">
+              <a:buNone/>
+            </a:pPr>
+            <a:endParaRPr lang="en-US" dirty="0"/>
+          </a:p>
+        </p:txBody>
+      </p:sp>
+      <p:sp>
+        <p:nvSpPr>
+          <p:cNvPr id="3" name="Text 1"/>
+          <p:cNvSpPr/>
+          <p:nvPr/>
+        </p:nvSpPr>
+        <p:spPr>
+          <a:xfrm>
+            <a:off x="406301" y="457051"/>
+            <a:ext cx="8498026" cy="274290"/>
+          </a:xfrm>
+          <a:prstGeom prst="rect">
+            <a:avLst/>
+          </a:prstGeom>
+          <a:noFill/>
+          <a:ln/>
+        </p:spPr>
+        <p:txBody>
+          <a:bodyPr wrap="square" lIns="0" tIns="0" rIns="0" bIns="0" rtlCol="0" anchor="t"/>
+          <a:lstStyle/>
+          <a:p>
+            <a:pPr algn="l" indent="0" marL="0">
+              <a:lnSpc>
+                <a:spcPts val="2160"/>
+              </a:lnSpc>
+              <a:spcBef>
+                <a:spcPts val="600"/>
+              </a:spcBef>
+              <a:spcAft>
+                <a:spcPts val="800"/>
+              </a:spcAft>
+              <a:buNone/>
+            </a:pPr>
+            <a:r>
+              <a:rPr lang="en-US" sz="1800" b="1" dirty="0">
+                <a:solidFill>
+                  <a:srgbClr val="FE4447"/>
+                </a:solidFill>
+                <a:latin typeface="Georgia" pitchFamily="34" charset="0"/>
+                <a:ea typeface="Georgia" pitchFamily="34" charset="-122"/>
+                <a:cs typeface="Georgia" pitchFamily="34" charset="-120"/>
+              </a:rPr>
+              <a:t>Core content (15 min) (cont.)</a:t>
+            </a:r>
+            <a:endParaRPr lang="en-US" sz="1800" dirty="0"/>
+          </a:p>
+        </p:txBody>
+      </p:sp>
+      <p:sp>
+        <p:nvSpPr>
+          <p:cNvPr id="4" name="Text 2"/>
+          <p:cNvSpPr/>
+          <p:nvPr/>
+        </p:nvSpPr>
+        <p:spPr>
+          <a:xfrm>
+            <a:off x="634901" y="883593"/>
+            <a:ext cx="8102798" cy="281880"/>
+          </a:xfrm>
+          <a:prstGeom prst="rect">
+            <a:avLst/>
+          </a:prstGeom>
+          <a:noFill/>
+          <a:ln/>
+        </p:spPr>
+        <p:txBody>
+          <a:bodyPr wrap="square" lIns="0" tIns="0" rIns="0" bIns="0" rtlCol="0" anchor="t"/>
+          <a:lstStyle/>
+          <a:p>
+            <a:pPr algn="l" marL="342900" indent="-342900">
+              <a:lnSpc>
+                <a:spcPts val="1620"/>
+              </a:lnSpc>
+              <a:spcAft>
+                <a:spcPts val="300"/>
+              </a:spcAft>
+              <a:buSzPct val="100000"/>
+              <a:buChar char="•"/>
+            </a:pPr>
+            <a:r>
+              <a:rPr lang="en-US" sz="1200" b="1" dirty="0">
+                <a:solidFill>
+                  <a:srgbClr val="1C2833"/>
+                </a:solidFill>
+                <a:latin typeface="Arial" pitchFamily="34" charset="0"/>
+                <a:ea typeface="Arial" pitchFamily="34" charset="-122"/>
+                <a:cs typeface="Arial" pitchFamily="34" charset="-120"/>
+              </a:rPr>
+              <a:t>Why does any of this matter?</a:t>
+            </a:r>
+            <a:pPr algn="l" indent="0" marL="0">
+              <a:lnSpc>
+                <a:spcPts val="1620"/>
+              </a:lnSpc>
+              <a:spcAft>
+                <a:spcPts val="300"/>
+              </a:spcAft>
+              <a:buNone/>
+            </a:pPr>
+            <a:r>
+              <a:rPr lang="en-US" sz="1200" dirty="0">
+                <a:solidFill>
+                  <a:srgbClr val="1C2833"/>
+                </a:solidFill>
+                <a:latin typeface="Arial" pitchFamily="34" charset="0"/>
+                <a:ea typeface="Arial" pitchFamily="34" charset="-122"/>
+                <a:cs typeface="Arial" pitchFamily="34" charset="-120"/>
+              </a:rPr>
+              <a:t> Three reasons:</a:t>
+            </a:r>
+            <a:endParaRPr lang="en-US" sz="1200" dirty="0"/>
+          </a:p>
+        </p:txBody>
+      </p:sp>
+      <p:sp>
+        <p:nvSpPr>
+          <p:cNvPr id="5" name="Text 3"/>
+          <p:cNvSpPr/>
+          <p:nvPr/>
+        </p:nvSpPr>
+        <p:spPr>
+          <a:xfrm>
+            <a:off x="634901" y="1266974"/>
+            <a:ext cx="8102798" cy="1180802"/>
+          </a:xfrm>
+          <a:prstGeom prst="rect">
+            <a:avLst/>
+          </a:prstGeom>
+          <a:noFill/>
+          <a:ln/>
+        </p:spPr>
+        <p:txBody>
+          <a:bodyPr wrap="square" lIns="0" tIns="0" rIns="0" bIns="0" rtlCol="0" anchor="t"/>
+          <a:lstStyle/>
+          <a:p>
+            <a:pPr algn="l" marL="342900" indent="-342900">
+              <a:lnSpc>
+                <a:spcPts val="1620"/>
+              </a:lnSpc>
+              <a:spcAft>
+                <a:spcPts val="300"/>
+              </a:spcAft>
+              <a:buSzPct val="100000"/>
+              <a:buChar char="•"/>
+            </a:pPr>
+            <a:r>
+              <a:rPr lang="en-US" sz="1200" b="1" dirty="0">
+                <a:solidFill>
+                  <a:srgbClr val="1C2833"/>
+                </a:solidFill>
+                <a:latin typeface="Arial" pitchFamily="34" charset="0"/>
+                <a:ea typeface="Arial" pitchFamily="34" charset="-122"/>
+                <a:cs typeface="Arial" pitchFamily="34" charset="-120"/>
+              </a:rPr>
+              <a:t>Cultural literacy.</a:t>
+            </a:r>
+            <a:pPr algn="l" indent="0" marL="0">
+              <a:lnSpc>
+                <a:spcPts val="1620"/>
+              </a:lnSpc>
+              <a:spcAft>
+                <a:spcPts val="300"/>
+              </a:spcAft>
+              <a:buNone/>
+            </a:pPr>
+            <a:r>
+              <a:rPr lang="en-US" sz="1200" dirty="0">
+                <a:solidFill>
+                  <a:srgbClr val="1C2833"/>
+                </a:solidFill>
+                <a:latin typeface="Arial" pitchFamily="34" charset="0"/>
+                <a:ea typeface="Arial" pitchFamily="34" charset="-122"/>
+                <a:cs typeface="Arial" pitchFamily="34" charset="-120"/>
+              </a:rPr>
+              <a:t> Knowing how other calendars work helps in a multi-cultural society.</a:t>
+            </a:r>
+            <a:endParaRPr lang="en-US" sz="1200" dirty="0"/>
+          </a:p>
+          <a:p>
+            <a:pPr algn="l" marL="342900" indent="-342900">
+              <a:lnSpc>
+                <a:spcPts val="1620"/>
+              </a:lnSpc>
+              <a:spcAft>
+                <a:spcPts val="300"/>
+              </a:spcAft>
+              <a:buSzPct val="100000"/>
+              <a:buChar char="•"/>
+            </a:pPr>
+            <a:r>
+              <a:rPr lang="en-US" sz="1200" b="1" dirty="0">
+                <a:solidFill>
+                  <a:srgbClr val="1C2833"/>
+                </a:solidFill>
+                <a:latin typeface="Arial" pitchFamily="34" charset="0"/>
+                <a:ea typeface="Arial" pitchFamily="34" charset="-122"/>
+                <a:cs typeface="Arial" pitchFamily="34" charset="-120"/>
+              </a:rPr>
+              <a:t>Astronomical insight.</a:t>
+            </a:r>
+            <a:pPr algn="l" indent="0" marL="0">
+              <a:lnSpc>
+                <a:spcPts val="1620"/>
+              </a:lnSpc>
+              <a:spcAft>
+                <a:spcPts val="300"/>
+              </a:spcAft>
+              <a:buNone/>
+            </a:pPr>
+            <a:r>
+              <a:rPr lang="en-US" sz="1200" dirty="0">
+                <a:solidFill>
+                  <a:srgbClr val="1C2833"/>
+                </a:solidFill>
+                <a:latin typeface="Arial" pitchFamily="34" charset="0"/>
+                <a:ea typeface="Arial" pitchFamily="34" charset="-122"/>
+                <a:cs typeface="Arial" pitchFamily="34" charset="-120"/>
+              </a:rPr>
+              <a:t> Each calendar reveals a different choice in handling the same underlying mismatch (29.5 vs. 365.24).</a:t>
+            </a:r>
+            <a:endParaRPr lang="en-US" sz="1200" dirty="0"/>
+          </a:p>
+          <a:p>
+            <a:pPr algn="l" marL="342900" indent="-342900">
+              <a:lnSpc>
+                <a:spcPts val="1620"/>
+              </a:lnSpc>
+              <a:spcAft>
+                <a:spcPts val="300"/>
+              </a:spcAft>
+              <a:buSzPct val="100000"/>
+              <a:buChar char="•"/>
+            </a:pPr>
+            <a:r>
+              <a:rPr lang="en-US" sz="1200" b="1" dirty="0">
+                <a:solidFill>
+                  <a:srgbClr val="1C2833"/>
+                </a:solidFill>
+                <a:latin typeface="Arial" pitchFamily="34" charset="0"/>
+                <a:ea typeface="Arial" pitchFamily="34" charset="-122"/>
+                <a:cs typeface="Arial" pitchFamily="34" charset="-120"/>
+              </a:rPr>
+              <a:t>Historical depth.</a:t>
+            </a:r>
+            <a:pPr algn="l" indent="0" marL="0">
+              <a:lnSpc>
+                <a:spcPts val="1620"/>
+              </a:lnSpc>
+              <a:spcAft>
+                <a:spcPts val="300"/>
+              </a:spcAft>
+              <a:buNone/>
+            </a:pPr>
+            <a:r>
+              <a:rPr lang="en-US" sz="1200" dirty="0">
+                <a:solidFill>
+                  <a:srgbClr val="1C2833"/>
+                </a:solidFill>
+                <a:latin typeface="Arial" pitchFamily="34" charset="0"/>
+                <a:ea typeface="Arial" pitchFamily="34" charset="-122"/>
+                <a:cs typeface="Arial" pitchFamily="34" charset="-120"/>
+              </a:rPr>
+              <a:t> All four systems were refined over many centuries. The Indian, Chinese, and Hebrew systems independently arrived at lunisolar intercalation — convergent astronomical reasoning.</a:t>
+            </a:r>
+            <a:endParaRPr lang="en-US" sz="1200" dirty="0"/>
+          </a:p>
+        </p:txBody>
+      </p:sp>
+      <p:sp>
+        <p:nvSpPr>
+          <p:cNvPr id="6" name="Text 4"/>
+          <p:cNvSpPr/>
+          <p:nvPr/>
+        </p:nvSpPr>
+        <p:spPr>
+          <a:xfrm>
+            <a:off x="406301" y="4434929"/>
+            <a:ext cx="8498026" cy="213271"/>
+          </a:xfrm>
+          <a:prstGeom prst="rect">
+            <a:avLst/>
+          </a:prstGeom>
+          <a:noFill/>
+          <a:ln/>
+        </p:spPr>
+        <p:txBody>
+          <a:bodyPr wrap="square" lIns="0" tIns="0" rIns="0" bIns="0" rtlCol="0" anchor="t"/>
+          <a:lstStyle/>
+          <a:p>
+            <a:pPr algn="l" indent="0" marL="0">
+              <a:lnSpc>
+                <a:spcPts val="1680"/>
+              </a:lnSpc>
+              <a:spcBef>
+                <a:spcPts val="300"/>
+              </a:spcBef>
+              <a:spcAft>
+                <a:spcPts val="300"/>
+              </a:spcAft>
+              <a:buNone/>
+            </a:pPr>
+            <a:r>
+              <a:rPr lang="en-US" sz="1200" dirty="0">
+                <a:solidFill>
+                  <a:srgbClr val="1C2833"/>
+                </a:solidFill>
+                <a:latin typeface="Arial" pitchFamily="34" charset="0"/>
+                <a:ea typeface="Arial" pitchFamily="34" charset="-122"/>
+                <a:cs typeface="Arial" pitchFamily="34" charset="-120"/>
+              </a:rPr>
+              <a:t>Middle ·  · IKS Curriculum</a:t>
+            </a:r>
+            <a:endParaRPr lang="en-US" sz="1200" dirty="0"/>
+          </a:p>
+        </p:txBody>
+      </p:sp>
+    </p:spTree>
+  </p:cSld>
+  <p:clrMapOvr>
+    <a:masterClrMapping/>
+  </p:clrMapOvr>
+</p:sld>
+</file>
+
+<file path=ppt/slides/slide12.xml><?xml version="1.0" encoding="utf-8"?>
+<p:sld xmlns:a="http://schemas.openxmlformats.org/drawingml/2006/main" xmlns:r="http://schemas.openxmlformats.org/officeDocument/2006/relationships" xmlns:p="http://schemas.openxmlformats.org/presentationml/2006/main">
+  <p:cSld name="Slide 12">
+    <p:bg>
+      <p:bgPr>
+        <a:solidFill>
+          <a:srgbClr val="FFFFFF"/>
+        </a:solidFill>
+      </p:bgPr>
+    </p:bg>
+    <p:spTree>
+      <p:nvGrpSpPr>
+        <p:cNvPr id="1" name=""/>
+        <p:cNvGrpSpPr/>
+        <p:nvPr/>
+      </p:nvGrpSpPr>
+      <p:grpSpPr>
+        <a:xfrm>
+          <a:off x="0" y="0"/>
+          <a:ext cx="0" cy="0"/>
+          <a:chOff x="0" y="0"/>
+          <a:chExt cx="0" cy="0"/>
+        </a:xfrm>
+      </p:grpSpPr>
+      <p:sp>
+        <p:nvSpPr>
+          <p:cNvPr id="2" name="Text 0"/>
+          <p:cNvSpPr/>
+          <p:nvPr/>
+        </p:nvSpPr>
+        <p:spPr>
+          <a:xfrm>
+            <a:off x="0" y="0"/>
+            <a:ext cx="9144000" cy="101501"/>
+          </a:xfrm>
+          <a:prstGeom prst="rect">
+            <a:avLst/>
+          </a:prstGeom>
+          <a:solidFill>
+            <a:srgbClr val="277884"/>
+          </a:solidFill>
+          <a:ln/>
+        </p:spPr>
+        <p:txBody>
+          <a:bodyPr wrap="square" rtlCol="0" anchor="ctr"/>
+          <a:lstStyle/>
+          <a:p>
+            <a:pPr indent="0" marL="0">
+              <a:buNone/>
+            </a:pPr>
+            <a:endParaRPr lang="en-US" dirty="0"/>
+          </a:p>
+        </p:txBody>
+      </p:sp>
+      <p:sp>
+        <p:nvSpPr>
+          <p:cNvPr id="3" name="Text 1"/>
+          <p:cNvSpPr/>
+          <p:nvPr/>
+        </p:nvSpPr>
+        <p:spPr>
+          <a:xfrm>
+            <a:off x="406301" y="457051"/>
+            <a:ext cx="8498026" cy="274290"/>
+          </a:xfrm>
+          <a:prstGeom prst="rect">
+            <a:avLst/>
+          </a:prstGeom>
+          <a:noFill/>
+          <a:ln/>
+        </p:spPr>
+        <p:txBody>
+          <a:bodyPr wrap="square" lIns="0" tIns="0" rIns="0" bIns="0" rtlCol="0" anchor="t"/>
+          <a:lstStyle/>
+          <a:p>
+            <a:pPr algn="l" indent="0" marL="0">
+              <a:lnSpc>
+                <a:spcPts val="2160"/>
+              </a:lnSpc>
+              <a:spcBef>
+                <a:spcPts val="600"/>
+              </a:spcBef>
+              <a:spcAft>
+                <a:spcPts val="800"/>
+              </a:spcAft>
+              <a:buNone/>
+            </a:pPr>
+            <a:r>
+              <a:rPr lang="en-US" sz="1800" b="1" dirty="0">
+                <a:solidFill>
+                  <a:srgbClr val="FE4447"/>
+                </a:solidFill>
+                <a:latin typeface="Georgia" pitchFamily="34" charset="0"/>
+                <a:ea typeface="Georgia" pitchFamily="34" charset="-122"/>
+                <a:cs typeface="Georgia" pitchFamily="34" charset="-120"/>
+              </a:rPr>
+              <a:t>Activity (25 min) — Project build</a:t>
+            </a:r>
+            <a:endParaRPr lang="en-US" sz="1800" dirty="0"/>
+          </a:p>
+        </p:txBody>
+      </p:sp>
+      <p:sp>
+        <p:nvSpPr>
+          <p:cNvPr id="4" name="Text 2"/>
+          <p:cNvSpPr/>
+          <p:nvPr/>
+        </p:nvSpPr>
+        <p:spPr>
+          <a:xfrm>
+            <a:off x="406301" y="870942"/>
+            <a:ext cx="8498026" cy="213271"/>
+          </a:xfrm>
+          <a:prstGeom prst="rect">
+            <a:avLst/>
+          </a:prstGeom>
+          <a:noFill/>
+          <a:ln/>
+        </p:spPr>
+        <p:txBody>
+          <a:bodyPr wrap="square" lIns="0" tIns="0" rIns="0" bIns="0" rtlCol="0" anchor="t"/>
+          <a:lstStyle/>
+          <a:p>
+            <a:pPr algn="l" indent="0" marL="0">
+              <a:lnSpc>
+                <a:spcPts val="1680"/>
+              </a:lnSpc>
+              <a:spcBef>
+                <a:spcPts val="300"/>
+              </a:spcBef>
+              <a:spcAft>
+                <a:spcPts val="300"/>
+              </a:spcAft>
+              <a:buNone/>
+            </a:pPr>
+            <a:r>
+              <a:rPr lang="en-US" sz="1200" dirty="0">
+                <a:solidFill>
+                  <a:srgbClr val="1C2833"/>
+                </a:solidFill>
+                <a:latin typeface="Arial" pitchFamily="34" charset="0"/>
+                <a:ea typeface="Arial" pitchFamily="34" charset="-122"/>
+                <a:cs typeface="Arial" pitchFamily="34" charset="-120"/>
+              </a:rPr>
+              <a:t>Pairs continue their projects from Day 8. The teacher rotates with two priorities:</a:t>
+            </a:r>
+            <a:endParaRPr lang="en-US" sz="1200" dirty="0"/>
+          </a:p>
+        </p:txBody>
+      </p:sp>
+      <p:sp>
+        <p:nvSpPr>
+          <p:cNvPr id="5" name="Text 3"/>
+          <p:cNvSpPr/>
+          <p:nvPr/>
+        </p:nvSpPr>
+        <p:spPr>
+          <a:xfrm>
+            <a:off x="634901" y="1173063"/>
+            <a:ext cx="8102798" cy="731341"/>
+          </a:xfrm>
+          <a:prstGeom prst="rect">
+            <a:avLst/>
+          </a:prstGeom>
+          <a:noFill/>
+          <a:ln/>
+        </p:spPr>
+        <p:txBody>
+          <a:bodyPr wrap="square" lIns="0" tIns="0" rIns="0" bIns="0" rtlCol="0" anchor="t"/>
+          <a:lstStyle/>
+          <a:p>
+            <a:pPr algn="l" marL="342900" indent="-342900">
+              <a:lnSpc>
+                <a:spcPts val="1620"/>
+              </a:lnSpc>
+              <a:spcAft>
+                <a:spcPts val="300"/>
+              </a:spcAft>
+              <a:buSzPct val="100000"/>
+              <a:buChar char="•"/>
+            </a:pPr>
+            <a:r>
+              <a:rPr lang="en-US" sz="1200" b="1" dirty="0">
+                <a:solidFill>
+                  <a:srgbClr val="1C2833"/>
+                </a:solidFill>
+                <a:latin typeface="Arial" pitchFamily="34" charset="0"/>
+                <a:ea typeface="Arial" pitchFamily="34" charset="-122"/>
+                <a:cs typeface="Arial" pitchFamily="34" charset="-120"/>
+              </a:rPr>
+              <a:t>Source check.</a:t>
+            </a:r>
+            <a:pPr algn="l" indent="0" marL="0">
+              <a:lnSpc>
+                <a:spcPts val="1620"/>
+              </a:lnSpc>
+              <a:spcAft>
+                <a:spcPts val="300"/>
+              </a:spcAft>
+              <a:buNone/>
+            </a:pPr>
+            <a:r>
+              <a:rPr lang="en-US" sz="1200" dirty="0">
+                <a:solidFill>
+                  <a:srgbClr val="1C2833"/>
+                </a:solidFill>
+                <a:latin typeface="Arial" pitchFamily="34" charset="0"/>
+                <a:ea typeface="Arial" pitchFamily="34" charset="-122"/>
+                <a:cs typeface="Arial" pitchFamily="34" charset="-120"/>
+              </a:rPr>
+              <a:t> Every project has a real, named citation by end of class today. No invented references.</a:t>
+            </a:r>
+            <a:endParaRPr lang="en-US" sz="1200" dirty="0"/>
+          </a:p>
+          <a:p>
+            <a:pPr algn="l" marL="342900" indent="-342900">
+              <a:lnSpc>
+                <a:spcPts val="1620"/>
+              </a:lnSpc>
+              <a:spcAft>
+                <a:spcPts val="300"/>
+              </a:spcAft>
+              <a:buSzPct val="100000"/>
+              <a:buChar char="•"/>
+            </a:pPr>
+            <a:r>
+              <a:rPr lang="en-US" sz="1200" b="1" dirty="0">
+                <a:solidFill>
+                  <a:srgbClr val="1C2833"/>
+                </a:solidFill>
+                <a:latin typeface="Arial" pitchFamily="34" charset="0"/>
+                <a:ea typeface="Arial" pitchFamily="34" charset="-122"/>
+                <a:cs typeface="Arial" pitchFamily="34" charset="-120"/>
+              </a:rPr>
+              <a:t>3-minute script check.</a:t>
+            </a:r>
+            <a:pPr algn="l" indent="0" marL="0">
+              <a:lnSpc>
+                <a:spcPts val="1620"/>
+              </a:lnSpc>
+              <a:spcAft>
+                <a:spcPts val="300"/>
+              </a:spcAft>
+              <a:buNone/>
+            </a:pPr>
+            <a:r>
+              <a:rPr lang="en-US" sz="1200" dirty="0">
+                <a:solidFill>
+                  <a:srgbClr val="1C2833"/>
+                </a:solidFill>
+                <a:latin typeface="Arial" pitchFamily="34" charset="0"/>
+                <a:ea typeface="Arial" pitchFamily="34" charset="-122"/>
+                <a:cs typeface="Arial" pitchFamily="34" charset="-120"/>
+              </a:rPr>
+              <a:t> Every pair has written or rehearsed a 3-minute presentation script. The artefact alone is not the project; the </a:t>
+            </a:r>
+            <a:pPr algn="l" indent="0" marL="0">
+              <a:lnSpc>
+                <a:spcPts val="1620"/>
+              </a:lnSpc>
+              <a:spcAft>
+                <a:spcPts val="300"/>
+              </a:spcAft>
+              <a:buNone/>
+            </a:pPr>
+            <a:r>
+              <a:rPr lang="en-US" sz="1200" i="1" dirty="0">
+                <a:solidFill>
+                  <a:srgbClr val="1C2833"/>
+                </a:solidFill>
+                <a:latin typeface="Arial" pitchFamily="34" charset="0"/>
+                <a:ea typeface="Arial" pitchFamily="34" charset="-122"/>
+                <a:cs typeface="Arial" pitchFamily="34" charset="-120"/>
+              </a:rPr>
+              <a:t>explanation</a:t>
+            </a:r>
+            <a:pPr algn="l" indent="0" marL="0">
+              <a:lnSpc>
+                <a:spcPts val="1620"/>
+              </a:lnSpc>
+              <a:spcAft>
+                <a:spcPts val="300"/>
+              </a:spcAft>
+              <a:buNone/>
+            </a:pPr>
+            <a:r>
+              <a:rPr lang="en-US" sz="1200" dirty="0">
+                <a:solidFill>
+                  <a:srgbClr val="1C2833"/>
+                </a:solidFill>
+                <a:latin typeface="Arial" pitchFamily="34" charset="0"/>
+                <a:ea typeface="Arial" pitchFamily="34" charset="-122"/>
+                <a:cs typeface="Arial" pitchFamily="34" charset="-120"/>
+              </a:rPr>
+              <a:t> is.</a:t>
+            </a:r>
+            <a:endParaRPr lang="en-US" sz="1200" dirty="0"/>
+          </a:p>
+        </p:txBody>
+      </p:sp>
+      <p:sp>
+        <p:nvSpPr>
+          <p:cNvPr id="6" name="Text 4"/>
+          <p:cNvSpPr/>
+          <p:nvPr/>
+        </p:nvSpPr>
+        <p:spPr>
+          <a:xfrm>
+            <a:off x="406301" y="4434929"/>
+            <a:ext cx="8498026" cy="213271"/>
+          </a:xfrm>
+          <a:prstGeom prst="rect">
+            <a:avLst/>
+          </a:prstGeom>
+          <a:noFill/>
+          <a:ln/>
+        </p:spPr>
+        <p:txBody>
+          <a:bodyPr wrap="square" lIns="0" tIns="0" rIns="0" bIns="0" rtlCol="0" anchor="t"/>
+          <a:lstStyle/>
+          <a:p>
+            <a:pPr algn="l" indent="0" marL="0">
+              <a:lnSpc>
+                <a:spcPts val="1680"/>
+              </a:lnSpc>
+              <a:spcBef>
+                <a:spcPts val="300"/>
+              </a:spcBef>
+              <a:spcAft>
+                <a:spcPts val="300"/>
+              </a:spcAft>
+              <a:buNone/>
+            </a:pPr>
+            <a:r>
+              <a:rPr lang="en-US" sz="1200" dirty="0">
+                <a:solidFill>
+                  <a:srgbClr val="1C2833"/>
+                </a:solidFill>
+                <a:latin typeface="Arial" pitchFamily="34" charset="0"/>
+                <a:ea typeface="Arial" pitchFamily="34" charset="-122"/>
+                <a:cs typeface="Arial" pitchFamily="34" charset="-120"/>
+              </a:rPr>
+              <a:t>Middle ·  · IKS Curriculum</a:t>
+            </a:r>
+            <a:endParaRPr lang="en-US" sz="1200" dirty="0"/>
+          </a:p>
+        </p:txBody>
+      </p:sp>
+    </p:spTree>
+  </p:cSld>
+  <p:clrMapOvr>
+    <a:masterClrMapping/>
+  </p:clrMapOvr>
+</p:sld>
+</file>
+
+<file path=ppt/slides/slide13.xml><?xml version="1.0" encoding="utf-8"?>
+<p:sld xmlns:a="http://schemas.openxmlformats.org/drawingml/2006/main" xmlns:r="http://schemas.openxmlformats.org/officeDocument/2006/relationships" xmlns:p="http://schemas.openxmlformats.org/presentationml/2006/main">
+  <p:cSld name="Slide 13">
+    <p:bg>
+      <p:bgPr>
+        <a:solidFill>
+          <a:srgbClr val="FFFFFF"/>
+        </a:solidFill>
+      </p:bgPr>
+    </p:bg>
+    <p:spTree>
+      <p:nvGrpSpPr>
+        <p:cNvPr id="1" name=""/>
+        <p:cNvGrpSpPr/>
+        <p:nvPr/>
+      </p:nvGrpSpPr>
+      <p:grpSpPr>
+        <a:xfrm>
+          <a:off x="0" y="0"/>
+          <a:ext cx="0" cy="0"/>
+          <a:chOff x="0" y="0"/>
+          <a:chExt cx="0" cy="0"/>
+        </a:xfrm>
+      </p:grpSpPr>
+      <p:sp>
+        <p:nvSpPr>
+          <p:cNvPr id="2" name="Text 0"/>
+          <p:cNvSpPr/>
+          <p:nvPr/>
+        </p:nvSpPr>
+        <p:spPr>
+          <a:xfrm>
+            <a:off x="0" y="0"/>
+            <a:ext cx="9144000" cy="101501"/>
+          </a:xfrm>
+          <a:prstGeom prst="rect">
+            <a:avLst/>
+          </a:prstGeom>
+          <a:solidFill>
+            <a:srgbClr val="277884"/>
+          </a:solidFill>
+          <a:ln/>
+        </p:spPr>
+        <p:txBody>
+          <a:bodyPr wrap="square" rtlCol="0" anchor="ctr"/>
+          <a:lstStyle/>
+          <a:p>
+            <a:pPr indent="0" marL="0">
+              <a:buNone/>
+            </a:pPr>
+            <a:endParaRPr lang="en-US" dirty="0"/>
+          </a:p>
+        </p:txBody>
+      </p:sp>
+      <p:sp>
+        <p:nvSpPr>
+          <p:cNvPr id="3" name="Text 1"/>
+          <p:cNvSpPr/>
+          <p:nvPr/>
+        </p:nvSpPr>
+        <p:spPr>
+          <a:xfrm>
+            <a:off x="406301" y="457051"/>
+            <a:ext cx="8498026" cy="274290"/>
+          </a:xfrm>
+          <a:prstGeom prst="rect">
+            <a:avLst/>
+          </a:prstGeom>
+          <a:noFill/>
+          <a:ln/>
+        </p:spPr>
+        <p:txBody>
+          <a:bodyPr wrap="square" lIns="0" tIns="0" rIns="0" bIns="0" rtlCol="0" anchor="t"/>
+          <a:lstStyle/>
+          <a:p>
+            <a:pPr algn="l" indent="0" marL="0">
+              <a:lnSpc>
+                <a:spcPts val="2160"/>
+              </a:lnSpc>
+              <a:spcBef>
+                <a:spcPts val="600"/>
+              </a:spcBef>
+              <a:spcAft>
+                <a:spcPts val="800"/>
+              </a:spcAft>
+              <a:buNone/>
+            </a:pPr>
+            <a:r>
+              <a:rPr lang="en-US" sz="1800" b="1" dirty="0">
+                <a:solidFill>
+                  <a:srgbClr val="FE4447"/>
+                </a:solidFill>
+                <a:latin typeface="Georgia" pitchFamily="34" charset="0"/>
+                <a:ea typeface="Georgia" pitchFamily="34" charset="-122"/>
+                <a:cs typeface="Georgia" pitchFamily="34" charset="-120"/>
+              </a:rPr>
+              <a:t>Activity (25 min) — Project build (cont.)</a:t>
+            </a:r>
+            <a:endParaRPr lang="en-US" sz="1800" dirty="0"/>
+          </a:p>
+        </p:txBody>
+      </p:sp>
+      <p:sp>
+        <p:nvSpPr>
+          <p:cNvPr id="4" name="Text 2"/>
+          <p:cNvSpPr/>
+          <p:nvPr/>
+        </p:nvSpPr>
+        <p:spPr>
+          <a:xfrm>
             <a:off x="406301" y="870942"/>
             <a:ext cx="8498026" cy="426541"/>
           </a:xfrm>
@@ -2210,8 +4139,33 @@
                 <a:ea typeface="Arial" pitchFamily="34" charset="-122"/>
                 <a:cs typeface="Arial" pitchFamily="34" charset="-120"/>
               </a:rPr>
-              <a:t>– General references for each calendar — use any standard encyclopaedic source (e.g. </a:t>
-            </a:r>
+              <a:t>Pairs whose project relates to cross-cultural lunar calendars can use the Day 9 content directly. Others are encouraged to add a one-sentence cross-cultural note ("this Indian system, like the Chinese and Hebrew, is lunisolar...").</a:t>
+            </a:r>
+            <a:endParaRPr lang="en-US" sz="1200" dirty="0"/>
+          </a:p>
+        </p:txBody>
+      </p:sp>
+      <p:sp>
+        <p:nvSpPr>
+          <p:cNvPr id="5" name="Text 3"/>
+          <p:cNvSpPr/>
+          <p:nvPr/>
+        </p:nvSpPr>
+        <p:spPr>
+          <a:xfrm>
+            <a:off x="406301" y="4434929"/>
+            <a:ext cx="8498026" cy="213271"/>
+          </a:xfrm>
+          <a:prstGeom prst="rect">
+            <a:avLst/>
+          </a:prstGeom>
+          <a:noFill/>
+          <a:ln/>
+        </p:spPr>
+        <p:txBody>
+          <a:bodyPr wrap="square" lIns="0" tIns="0" rIns="0" bIns="0" rtlCol="0" anchor="t"/>
+          <a:lstStyle/>
+          <a:p>
             <a:pPr algn="l" indent="0" marL="0">
               <a:lnSpc>
                 <a:spcPts val="1680"/>
@@ -2225,6 +4179,206 @@
               <a:buNone/>
             </a:pPr>
             <a:r>
+              <a:rPr lang="en-US" sz="1200" dirty="0">
+                <a:solidFill>
+                  <a:srgbClr val="1C2833"/>
+                </a:solidFill>
+                <a:latin typeface="Arial" pitchFamily="34" charset="0"/>
+                <a:ea typeface="Arial" pitchFamily="34" charset="-122"/>
+                <a:cs typeface="Arial" pitchFamily="34" charset="-120"/>
+              </a:rPr>
+              <a:t>Middle ·  · IKS Curriculum</a:t>
+            </a:r>
+            <a:endParaRPr lang="en-US" sz="1200" dirty="0"/>
+          </a:p>
+        </p:txBody>
+      </p:sp>
+    </p:spTree>
+  </p:cSld>
+  <p:clrMapOvr>
+    <a:masterClrMapping/>
+  </p:clrMapOvr>
+</p:sld>
+</file>
+
+<file path=ppt/slides/slide14.xml><?xml version="1.0" encoding="utf-8"?>
+<p:sld xmlns:a="http://schemas.openxmlformats.org/drawingml/2006/main" xmlns:r="http://schemas.openxmlformats.org/officeDocument/2006/relationships" xmlns:p="http://schemas.openxmlformats.org/presentationml/2006/main">
+  <p:cSld name="Slide 14">
+    <p:bg>
+      <p:bgPr>
+        <a:solidFill>
+          <a:srgbClr val="FFFFFF"/>
+        </a:solidFill>
+      </p:bgPr>
+    </p:bg>
+    <p:spTree>
+      <p:nvGrpSpPr>
+        <p:cNvPr id="1" name=""/>
+        <p:cNvGrpSpPr/>
+        <p:nvPr/>
+      </p:nvGrpSpPr>
+      <p:grpSpPr>
+        <a:xfrm>
+          <a:off x="0" y="0"/>
+          <a:ext cx="0" cy="0"/>
+          <a:chOff x="0" y="0"/>
+          <a:chExt cx="0" cy="0"/>
+        </a:xfrm>
+      </p:grpSpPr>
+      <p:sp>
+        <p:nvSpPr>
+          <p:cNvPr id="2" name="Text 0"/>
+          <p:cNvSpPr/>
+          <p:nvPr/>
+        </p:nvSpPr>
+        <p:spPr>
+          <a:xfrm>
+            <a:off x="0" y="0"/>
+            <a:ext cx="9144000" cy="101501"/>
+          </a:xfrm>
+          <a:prstGeom prst="rect">
+            <a:avLst/>
+          </a:prstGeom>
+          <a:solidFill>
+            <a:srgbClr val="277884"/>
+          </a:solidFill>
+          <a:ln/>
+        </p:spPr>
+        <p:txBody>
+          <a:bodyPr wrap="square" rtlCol="0" anchor="ctr"/>
+          <a:lstStyle/>
+          <a:p>
+            <a:pPr indent="0" marL="0">
+              <a:buNone/>
+            </a:pPr>
+            <a:endParaRPr lang="en-US" dirty="0"/>
+          </a:p>
+        </p:txBody>
+      </p:sp>
+      <p:sp>
+        <p:nvSpPr>
+          <p:cNvPr id="3" name="Text 1"/>
+          <p:cNvSpPr/>
+          <p:nvPr/>
+        </p:nvSpPr>
+        <p:spPr>
+          <a:xfrm>
+            <a:off x="406301" y="457051"/>
+            <a:ext cx="8498026" cy="274290"/>
+          </a:xfrm>
+          <a:prstGeom prst="rect">
+            <a:avLst/>
+          </a:prstGeom>
+          <a:noFill/>
+          <a:ln/>
+        </p:spPr>
+        <p:txBody>
+          <a:bodyPr wrap="square" lIns="0" tIns="0" rIns="0" bIns="0" rtlCol="0" anchor="t"/>
+          <a:lstStyle/>
+          <a:p>
+            <a:pPr algn="l" indent="0" marL="0">
+              <a:lnSpc>
+                <a:spcPts val="2160"/>
+              </a:lnSpc>
+              <a:spcBef>
+                <a:spcPts val="600"/>
+              </a:spcBef>
+              <a:spcAft>
+                <a:spcPts val="800"/>
+              </a:spcAft>
+              <a:buNone/>
+            </a:pPr>
+            <a:r>
+              <a:rPr lang="en-US" sz="1800" b="1" dirty="0">
+                <a:solidFill>
+                  <a:srgbClr val="FE4447"/>
+                </a:solidFill>
+                <a:latin typeface="Georgia" pitchFamily="34" charset="0"/>
+                <a:ea typeface="Georgia" pitchFamily="34" charset="-122"/>
+                <a:cs typeface="Georgia" pitchFamily="34" charset="-120"/>
+              </a:rPr>
+              <a:t>Wrap-up (5 min)</a:t>
+            </a:r>
+            <a:endParaRPr lang="en-US" sz="1800" dirty="0"/>
+          </a:p>
+        </p:txBody>
+      </p:sp>
+      <p:sp>
+        <p:nvSpPr>
+          <p:cNvPr id="4" name="Text 2"/>
+          <p:cNvSpPr/>
+          <p:nvPr/>
+        </p:nvSpPr>
+        <p:spPr>
+          <a:xfrm>
+            <a:off x="634901" y="883593"/>
+            <a:ext cx="8102798" cy="769441"/>
+          </a:xfrm>
+          <a:prstGeom prst="rect">
+            <a:avLst/>
+          </a:prstGeom>
+          <a:noFill/>
+          <a:ln/>
+        </p:spPr>
+        <p:txBody>
+          <a:bodyPr wrap="square" lIns="0" tIns="0" rIns="0" bIns="0" rtlCol="0" anchor="t"/>
+          <a:lstStyle/>
+          <a:p>
+            <a:pPr algn="l" marL="342900" indent="-342900">
+              <a:lnSpc>
+                <a:spcPts val="1620"/>
+              </a:lnSpc>
+              <a:spcAft>
+                <a:spcPts val="300"/>
+              </a:spcAft>
+              <a:buSzPct val="100000"/>
+              <a:buChar char="•"/>
+            </a:pPr>
+            <a:r>
+              <a:rPr lang="en-US" sz="1200" dirty="0">
+                <a:solidFill>
+                  <a:srgbClr val="1C2833"/>
+                </a:solidFill>
+                <a:latin typeface="Arial" pitchFamily="34" charset="0"/>
+                <a:ea typeface="Arial" pitchFamily="34" charset="-122"/>
+                <a:cs typeface="Arial" pitchFamily="34" charset="-120"/>
+              </a:rPr>
+              <a:t>All pairs submit a near-final draft (photo / file).</a:t>
+            </a:r>
+            <a:endParaRPr lang="en-US" sz="1200" dirty="0"/>
+          </a:p>
+          <a:p>
+            <a:pPr algn="l" marL="342900" indent="-342900">
+              <a:lnSpc>
+                <a:spcPts val="1620"/>
+              </a:lnSpc>
+              <a:spcAft>
+                <a:spcPts val="300"/>
+              </a:spcAft>
+              <a:buSzPct val="100000"/>
+              <a:buChar char="•"/>
+            </a:pPr>
+            <a:r>
+              <a:rPr lang="en-US" sz="1200" dirty="0">
+                <a:solidFill>
+                  <a:srgbClr val="1C2833"/>
+                </a:solidFill>
+                <a:latin typeface="Arial" pitchFamily="34" charset="0"/>
+                <a:ea typeface="Arial" pitchFamily="34" charset="-122"/>
+                <a:cs typeface="Arial" pitchFamily="34" charset="-120"/>
+              </a:rPr>
+              <a:t>One sentence from each pair on the board: </a:t>
+            </a:r>
+            <a:pPr algn="l" indent="0" marL="0">
+              <a:lnSpc>
+                <a:spcPts val="1620"/>
+              </a:lnSpc>
+              <a:spcAft>
+                <a:spcPts val="300"/>
+              </a:spcAft>
+              <a:buNone/>
+            </a:pPr>
+            <a:r>
               <a:rPr lang="en-US" sz="1200" i="1" dirty="0">
                 <a:solidFill>
                   <a:srgbClr val="1C2833"/>
@@ -2233,15 +4387,1665 @@
                 <a:ea typeface="Arial" pitchFamily="34" charset="-122"/>
                 <a:cs typeface="Arial" pitchFamily="34" charset="-120"/>
               </a:rPr>
+              <a:t>"Our project covers ___ and our source is ___."</a:t>
+            </a:r>
+            <a:endParaRPr lang="en-US" sz="1200" dirty="0"/>
+          </a:p>
+          <a:p>
+            <a:pPr algn="l" marL="342900" indent="-342900">
+              <a:lnSpc>
+                <a:spcPts val="1620"/>
+              </a:lnSpc>
+              <a:spcAft>
+                <a:spcPts val="300"/>
+              </a:spcAft>
+              <a:buSzPct val="100000"/>
+              <a:buChar char="•"/>
+            </a:pPr>
+            <a:r>
+              <a:rPr lang="en-US" sz="1200" b="1" dirty="0">
+                <a:solidFill>
+                  <a:srgbClr val="1C2833"/>
+                </a:solidFill>
+                <a:latin typeface="Arial" pitchFamily="34" charset="0"/>
+                <a:ea typeface="Arial" pitchFamily="34" charset="-122"/>
+                <a:cs typeface="Arial" pitchFamily="34" charset="-120"/>
+              </a:rPr>
+              <a:t>Tomorrow:</a:t>
+            </a:r>
+            <a:pPr algn="l" indent="0" marL="0">
+              <a:lnSpc>
+                <a:spcPts val="1620"/>
+              </a:lnSpc>
+              <a:spcAft>
+                <a:spcPts val="300"/>
+              </a:spcAft>
+              <a:buNone/>
+            </a:pPr>
+            <a:r>
+              <a:rPr lang="en-US" sz="1200" dirty="0">
+                <a:solidFill>
+                  <a:srgbClr val="1C2833"/>
+                </a:solidFill>
+                <a:latin typeface="Arial" pitchFamily="34" charset="0"/>
+                <a:ea typeface="Arial" pitchFamily="34" charset="-122"/>
+                <a:cs typeface="Arial" pitchFamily="34" charset="-120"/>
+              </a:rPr>
+              <a:t> Day 10. 3-minute presentations. Summative quiz.</a:t>
+            </a:r>
+            <a:endParaRPr lang="en-US" sz="1200" dirty="0"/>
+          </a:p>
+        </p:txBody>
+      </p:sp>
+      <p:sp>
+        <p:nvSpPr>
+          <p:cNvPr id="5" name="Text 3"/>
+          <p:cNvSpPr/>
+          <p:nvPr/>
+        </p:nvSpPr>
+        <p:spPr>
+          <a:xfrm>
+            <a:off x="406301" y="4434929"/>
+            <a:ext cx="8498026" cy="213271"/>
+          </a:xfrm>
+          <a:prstGeom prst="rect">
+            <a:avLst/>
+          </a:prstGeom>
+          <a:noFill/>
+          <a:ln/>
+        </p:spPr>
+        <p:txBody>
+          <a:bodyPr wrap="square" lIns="0" tIns="0" rIns="0" bIns="0" rtlCol="0" anchor="t"/>
+          <a:lstStyle/>
+          <a:p>
+            <a:pPr algn="l" indent="0" marL="0">
+              <a:lnSpc>
+                <a:spcPts val="1680"/>
+              </a:lnSpc>
+              <a:spcBef>
+                <a:spcPts val="300"/>
+              </a:spcBef>
+              <a:spcAft>
+                <a:spcPts val="300"/>
+              </a:spcAft>
+              <a:buNone/>
+            </a:pPr>
+            <a:r>
+              <a:rPr lang="en-US" sz="1200" dirty="0">
+                <a:solidFill>
+                  <a:srgbClr val="1C2833"/>
+                </a:solidFill>
+                <a:latin typeface="Arial" pitchFamily="34" charset="0"/>
+                <a:ea typeface="Arial" pitchFamily="34" charset="-122"/>
+                <a:cs typeface="Arial" pitchFamily="34" charset="-120"/>
+              </a:rPr>
+              <a:t>Middle ·  · IKS Curriculum</a:t>
+            </a:r>
+            <a:endParaRPr lang="en-US" sz="1200" dirty="0"/>
+          </a:p>
+        </p:txBody>
+      </p:sp>
+    </p:spTree>
+  </p:cSld>
+  <p:clrMapOvr>
+    <a:masterClrMapping/>
+  </p:clrMapOvr>
+</p:sld>
+</file>
+
+<file path=ppt/slides/slide15.xml><?xml version="1.0" encoding="utf-8"?>
+<p:sld xmlns:a="http://schemas.openxmlformats.org/drawingml/2006/main" xmlns:r="http://schemas.openxmlformats.org/officeDocument/2006/relationships" xmlns:p="http://schemas.openxmlformats.org/presentationml/2006/main">
+  <p:cSld name="Slide 15">
+    <p:bg>
+      <p:bgPr>
+        <a:solidFill>
+          <a:srgbClr val="FFFFFF"/>
+        </a:solidFill>
+      </p:bgPr>
+    </p:bg>
+    <p:spTree>
+      <p:nvGrpSpPr>
+        <p:cNvPr id="1" name=""/>
+        <p:cNvGrpSpPr/>
+        <p:nvPr/>
+      </p:nvGrpSpPr>
+      <p:grpSpPr>
+        <a:xfrm>
+          <a:off x="0" y="0"/>
+          <a:ext cx="0" cy="0"/>
+          <a:chOff x="0" y="0"/>
+          <a:chExt cx="0" cy="0"/>
+        </a:xfrm>
+      </p:grpSpPr>
+      <p:sp>
+        <p:nvSpPr>
+          <p:cNvPr id="2" name="Text 0"/>
+          <p:cNvSpPr/>
+          <p:nvPr/>
+        </p:nvSpPr>
+        <p:spPr>
+          <a:xfrm>
+            <a:off x="0" y="0"/>
+            <a:ext cx="9144000" cy="101501"/>
+          </a:xfrm>
+          <a:prstGeom prst="rect">
+            <a:avLst/>
+          </a:prstGeom>
+          <a:solidFill>
+            <a:srgbClr val="277884"/>
+          </a:solidFill>
+          <a:ln/>
+        </p:spPr>
+        <p:txBody>
+          <a:bodyPr wrap="square" rtlCol="0" anchor="ctr"/>
+          <a:lstStyle/>
+          <a:p>
+            <a:pPr indent="0" marL="0">
+              <a:buNone/>
+            </a:pPr>
+            <a:endParaRPr lang="en-US" dirty="0"/>
+          </a:p>
+        </p:txBody>
+      </p:sp>
+      <p:sp>
+        <p:nvSpPr>
+          <p:cNvPr id="3" name="Text 1"/>
+          <p:cNvSpPr/>
+          <p:nvPr/>
+        </p:nvSpPr>
+        <p:spPr>
+          <a:xfrm>
+            <a:off x="406301" y="457051"/>
+            <a:ext cx="8498026" cy="274290"/>
+          </a:xfrm>
+          <a:prstGeom prst="rect">
+            <a:avLst/>
+          </a:prstGeom>
+          <a:noFill/>
+          <a:ln/>
+        </p:spPr>
+        <p:txBody>
+          <a:bodyPr wrap="square" lIns="0" tIns="0" rIns="0" bIns="0" rtlCol="0" anchor="t"/>
+          <a:lstStyle/>
+          <a:p>
+            <a:pPr algn="l" indent="0" marL="0">
+              <a:lnSpc>
+                <a:spcPts val="2160"/>
+              </a:lnSpc>
+              <a:spcBef>
+                <a:spcPts val="600"/>
+              </a:spcBef>
+              <a:spcAft>
+                <a:spcPts val="800"/>
+              </a:spcAft>
+              <a:buNone/>
+            </a:pPr>
+            <a:r>
+              <a:rPr lang="en-US" sz="1800" b="1" dirty="0">
+                <a:solidFill>
+                  <a:srgbClr val="FE4447"/>
+                </a:solidFill>
+                <a:latin typeface="Georgia" pitchFamily="34" charset="0"/>
+                <a:ea typeface="Georgia" pitchFamily="34" charset="-122"/>
+                <a:cs typeface="Georgia" pitchFamily="34" charset="-120"/>
+              </a:rPr>
+              <a:t>Student-facing content</a:t>
+            </a:r>
+            <a:endParaRPr lang="en-US" sz="1800" dirty="0"/>
+          </a:p>
+        </p:txBody>
+      </p:sp>
+      <p:sp>
+        <p:nvSpPr>
+          <p:cNvPr id="4" name="Text 2"/>
+          <p:cNvSpPr/>
+          <p:nvPr/>
+        </p:nvSpPr>
+        <p:spPr>
+          <a:xfrm>
+            <a:off x="406301" y="883593"/>
+            <a:ext cx="8331398" cy="2188369"/>
+          </a:xfrm>
+          <a:prstGeom prst="rect">
+            <a:avLst/>
+          </a:prstGeom>
+          <a:solidFill>
+            <a:srgbClr val="F4F8F9"/>
+          </a:solidFill>
+          <a:ln/>
+        </p:spPr>
+        <p:txBody>
+          <a:bodyPr wrap="square" rtlCol="0" anchor="ctr"/>
+          <a:lstStyle/>
+          <a:p>
+            <a:pPr indent="0" marL="0">
+              <a:buNone/>
+            </a:pPr>
+            <a:endParaRPr lang="en-US" dirty="0"/>
+          </a:p>
+        </p:txBody>
+      </p:sp>
+      <p:sp>
+        <p:nvSpPr>
+          <p:cNvPr id="5" name="Shape 3"/>
+          <p:cNvSpPr/>
+          <p:nvPr/>
+        </p:nvSpPr>
+        <p:spPr>
+          <a:xfrm>
+            <a:off x="434876" y="883593"/>
+            <a:ext cx="0" cy="2188369"/>
+          </a:xfrm>
+          <a:prstGeom prst="line">
+            <a:avLst/>
+          </a:prstGeom>
+          <a:noFill/>
+          <a:ln w="57150">
+            <a:solidFill>
+              <a:srgbClr val="FE4447"/>
+            </a:solidFill>
+            <a:prstDash val="solid"/>
+          </a:ln>
+        </p:spPr>
+      </p:sp>
+      <p:sp>
+        <p:nvSpPr>
+          <p:cNvPr id="6" name="Text 4"/>
+          <p:cNvSpPr/>
+          <p:nvPr/>
+        </p:nvSpPr>
+        <p:spPr>
+          <a:xfrm>
+            <a:off x="692051" y="1074093"/>
+            <a:ext cx="7973389" cy="230981"/>
+          </a:xfrm>
+          <a:prstGeom prst="rect">
+            <a:avLst/>
+          </a:prstGeom>
+          <a:noFill/>
+          <a:ln/>
+        </p:spPr>
+        <p:txBody>
+          <a:bodyPr wrap="square" lIns="0" tIns="0" rIns="0" bIns="0" rtlCol="0" anchor="t"/>
+          <a:lstStyle/>
+          <a:p>
+            <a:pPr algn="l" indent="0" marL="0">
+              <a:lnSpc>
+                <a:spcPts val="1820"/>
+              </a:lnSpc>
+              <a:spcBef>
+                <a:spcPts val="300"/>
+              </a:spcBef>
+              <a:spcAft>
+                <a:spcPts val="300"/>
+              </a:spcAft>
+              <a:buNone/>
+            </a:pPr>
+            <a:r>
+              <a:rPr lang="en-US" sz="1300" b="1" i="1" dirty="0">
+                <a:solidFill>
+                  <a:srgbClr val="1C2833"/>
+                </a:solidFill>
+                <a:latin typeface="Georgia" pitchFamily="34" charset="0"/>
+                <a:ea typeface="Georgia" pitchFamily="34" charset="-122"/>
+                <a:cs typeface="Georgia" pitchFamily="34" charset="-120"/>
+              </a:rPr>
+              <a:t>Four lunar/lunisolar calendars compared:</a:t>
+            </a:r>
+            <a:endParaRPr lang="en-US" sz="1300" dirty="0"/>
+          </a:p>
+        </p:txBody>
+      </p:sp>
+      <p:sp>
+        <p:nvSpPr>
+          <p:cNvPr id="7" name="Text 5"/>
+          <p:cNvSpPr/>
+          <p:nvPr/>
+        </p:nvSpPr>
+        <p:spPr>
+          <a:xfrm>
+            <a:off x="692051" y="1343174"/>
+            <a:ext cx="7973389" cy="230981"/>
+          </a:xfrm>
+          <a:prstGeom prst="rect">
+            <a:avLst/>
+          </a:prstGeom>
+          <a:noFill/>
+          <a:ln/>
+        </p:spPr>
+        <p:txBody>
+          <a:bodyPr wrap="square" lIns="0" tIns="0" rIns="0" bIns="0" rtlCol="0" anchor="t"/>
+          <a:lstStyle/>
+          <a:p>
+            <a:pPr algn="l" indent="0" marL="0">
+              <a:lnSpc>
+                <a:spcPts val="1820"/>
+              </a:lnSpc>
+              <a:spcBef>
+                <a:spcPts val="300"/>
+              </a:spcBef>
+              <a:spcAft>
+                <a:spcPts val="300"/>
+              </a:spcAft>
+              <a:buNone/>
+            </a:pPr>
+            <a:r>
+              <a:rPr lang="en-US" sz="1300" b="1" i="1" dirty="0">
+                <a:solidFill>
+                  <a:srgbClr val="1C2833"/>
+                </a:solidFill>
+                <a:latin typeface="Georgia" pitchFamily="34" charset="0"/>
+                <a:ea typeface="Georgia" pitchFamily="34" charset="-122"/>
+                <a:cs typeface="Georgia" pitchFamily="34" charset="-120"/>
+              </a:rPr>
+              <a:t>Indian (lunisolar)</a:t>
+            </a:r>
+            <a:pPr algn="l" indent="0" marL="0">
+              <a:lnSpc>
+                <a:spcPts val="1820"/>
+              </a:lnSpc>
+              <a:spcBef>
+                <a:spcPts val="300"/>
+              </a:spcBef>
+              <a:spcAft>
+                <a:spcPts val="300"/>
+              </a:spcAft>
+              <a:buNone/>
+            </a:pPr>
+            <a:r>
+              <a:rPr lang="en-US" sz="1300" dirty="0">
+                <a:solidFill>
+                  <a:srgbClr val="1C2833"/>
+                </a:solidFill>
+                <a:latin typeface="Georgia" pitchFamily="34" charset="0"/>
+                <a:ea typeface="Georgia" pitchFamily="34" charset="-122"/>
+                <a:cs typeface="Georgia" pitchFamily="34" charset="-120"/>
+              </a:rPr>
+              <a:t> — 12 months, </a:t>
+            </a:r>
+            <a:pPr algn="l" indent="0" marL="0">
+              <a:lnSpc>
+                <a:spcPts val="1820"/>
+              </a:lnSpc>
+              <a:spcBef>
+                <a:spcPts val="300"/>
+              </a:spcBef>
+              <a:spcAft>
+                <a:spcPts val="300"/>
+              </a:spcAft>
+              <a:buNone/>
+            </a:pPr>
+            <a:r>
+              <a:rPr lang="en-US" sz="1300" i="1" dirty="0">
+                <a:solidFill>
+                  <a:srgbClr val="1C2833"/>
+                </a:solidFill>
+                <a:latin typeface="Georgia" pitchFamily="34" charset="0"/>
+                <a:ea typeface="Georgia" pitchFamily="34" charset="-122"/>
+                <a:cs typeface="Georgia" pitchFamily="34" charset="-120"/>
+              </a:rPr>
+              <a:t>adhika māsa</a:t>
+            </a:r>
+            <a:pPr algn="l" indent="0" marL="0">
+              <a:lnSpc>
+                <a:spcPts val="1820"/>
+              </a:lnSpc>
+              <a:spcBef>
+                <a:spcPts val="300"/>
+              </a:spcBef>
+              <a:spcAft>
+                <a:spcPts val="300"/>
+              </a:spcAft>
+              <a:buNone/>
+            </a:pPr>
+            <a:r>
+              <a:rPr lang="en-US" sz="1300" dirty="0">
+                <a:solidFill>
+                  <a:srgbClr val="1C2833"/>
+                </a:solidFill>
+                <a:latin typeface="Georgia" pitchFamily="34" charset="0"/>
+                <a:ea typeface="Georgia" pitchFamily="34" charset="-122"/>
+                <a:cs typeface="Georgia" pitchFamily="34" charset="-120"/>
+              </a:rPr>
+              <a:t> every ~32 months.</a:t>
+            </a:r>
+            <a:endParaRPr lang="en-US" sz="1300" dirty="0"/>
+          </a:p>
+        </p:txBody>
+      </p:sp>
+      <p:sp>
+        <p:nvSpPr>
+          <p:cNvPr id="8" name="Text 6"/>
+          <p:cNvSpPr/>
+          <p:nvPr/>
+        </p:nvSpPr>
+        <p:spPr>
+          <a:xfrm>
+            <a:off x="692051" y="1612255"/>
+            <a:ext cx="7973389" cy="230981"/>
+          </a:xfrm>
+          <a:prstGeom prst="rect">
+            <a:avLst/>
+          </a:prstGeom>
+          <a:noFill/>
+          <a:ln/>
+        </p:spPr>
+        <p:txBody>
+          <a:bodyPr wrap="square" lIns="0" tIns="0" rIns="0" bIns="0" rtlCol="0" anchor="t"/>
+          <a:lstStyle/>
+          <a:p>
+            <a:pPr algn="l" indent="0" marL="0">
+              <a:lnSpc>
+                <a:spcPts val="1820"/>
+              </a:lnSpc>
+              <a:spcBef>
+                <a:spcPts val="300"/>
+              </a:spcBef>
+              <a:spcAft>
+                <a:spcPts val="300"/>
+              </a:spcAft>
+              <a:buNone/>
+            </a:pPr>
+            <a:r>
+              <a:rPr lang="en-US" sz="1300" b="1" i="1" dirty="0">
+                <a:solidFill>
+                  <a:srgbClr val="1C2833"/>
+                </a:solidFill>
+                <a:latin typeface="Georgia" pitchFamily="34" charset="0"/>
+                <a:ea typeface="Georgia" pitchFamily="34" charset="-122"/>
+                <a:cs typeface="Georgia" pitchFamily="34" charset="-120"/>
+              </a:rPr>
+              <a:t>Islamic / Hijri (pure lunar)</a:t>
+            </a:r>
+            <a:pPr algn="l" indent="0" marL="0">
+              <a:lnSpc>
+                <a:spcPts val="1820"/>
+              </a:lnSpc>
+              <a:spcBef>
+                <a:spcPts val="300"/>
+              </a:spcBef>
+              <a:spcAft>
+                <a:spcPts val="300"/>
+              </a:spcAft>
+              <a:buNone/>
+            </a:pPr>
+            <a:r>
+              <a:rPr lang="en-US" sz="1300" dirty="0">
+                <a:solidFill>
+                  <a:srgbClr val="1C2833"/>
+                </a:solidFill>
+                <a:latin typeface="Georgia" pitchFamily="34" charset="0"/>
+                <a:ea typeface="Georgia" pitchFamily="34" charset="-122"/>
+                <a:cs typeface="Georgia" pitchFamily="34" charset="-120"/>
+              </a:rPr>
+              <a:t> — 12 months, no intercalation. Drifts ~11 days/year.</a:t>
+            </a:r>
+            <a:endParaRPr lang="en-US" sz="1300" dirty="0"/>
+          </a:p>
+        </p:txBody>
+      </p:sp>
+      <p:sp>
+        <p:nvSpPr>
+          <p:cNvPr id="9" name="Text 7"/>
+          <p:cNvSpPr/>
+          <p:nvPr/>
+        </p:nvSpPr>
+        <p:spPr>
+          <a:xfrm>
+            <a:off x="692051" y="1881336"/>
+            <a:ext cx="7973389" cy="230981"/>
+          </a:xfrm>
+          <a:prstGeom prst="rect">
+            <a:avLst/>
+          </a:prstGeom>
+          <a:noFill/>
+          <a:ln/>
+        </p:spPr>
+        <p:txBody>
+          <a:bodyPr wrap="square" lIns="0" tIns="0" rIns="0" bIns="0" rtlCol="0" anchor="t"/>
+          <a:lstStyle/>
+          <a:p>
+            <a:pPr algn="l" indent="0" marL="0">
+              <a:lnSpc>
+                <a:spcPts val="1820"/>
+              </a:lnSpc>
+              <a:spcBef>
+                <a:spcPts val="300"/>
+              </a:spcBef>
+              <a:spcAft>
+                <a:spcPts val="300"/>
+              </a:spcAft>
+              <a:buNone/>
+            </a:pPr>
+            <a:r>
+              <a:rPr lang="en-US" sz="1300" b="1" i="1" dirty="0">
+                <a:solidFill>
+                  <a:srgbClr val="1C2833"/>
+                </a:solidFill>
+                <a:latin typeface="Georgia" pitchFamily="34" charset="0"/>
+                <a:ea typeface="Georgia" pitchFamily="34" charset="-122"/>
+                <a:cs typeface="Georgia" pitchFamily="34" charset="-120"/>
+              </a:rPr>
+              <a:t>Chinese (lunisolar)</a:t>
+            </a:r>
+            <a:pPr algn="l" indent="0" marL="0">
+              <a:lnSpc>
+                <a:spcPts val="1820"/>
+              </a:lnSpc>
+              <a:spcBef>
+                <a:spcPts val="300"/>
+              </a:spcBef>
+              <a:spcAft>
+                <a:spcPts val="300"/>
+              </a:spcAft>
+              <a:buNone/>
+            </a:pPr>
+            <a:r>
+              <a:rPr lang="en-US" sz="1300" dirty="0">
+                <a:solidFill>
+                  <a:srgbClr val="1C2833"/>
+                </a:solidFill>
+                <a:latin typeface="Georgia" pitchFamily="34" charset="0"/>
+                <a:ea typeface="Georgia" pitchFamily="34" charset="-122"/>
+                <a:cs typeface="Georgia" pitchFamily="34" charset="-120"/>
+              </a:rPr>
+              <a:t> — 12 months, leap month every ~32 months.</a:t>
+            </a:r>
+            <a:endParaRPr lang="en-US" sz="1300" dirty="0"/>
+          </a:p>
+        </p:txBody>
+      </p:sp>
+      <p:sp>
+        <p:nvSpPr>
+          <p:cNvPr id="10" name="Text 8"/>
+          <p:cNvSpPr/>
+          <p:nvPr/>
+        </p:nvSpPr>
+        <p:spPr>
+          <a:xfrm>
+            <a:off x="692051" y="2150418"/>
+            <a:ext cx="7973389" cy="230981"/>
+          </a:xfrm>
+          <a:prstGeom prst="rect">
+            <a:avLst/>
+          </a:prstGeom>
+          <a:noFill/>
+          <a:ln/>
+        </p:spPr>
+        <p:txBody>
+          <a:bodyPr wrap="square" lIns="0" tIns="0" rIns="0" bIns="0" rtlCol="0" anchor="t"/>
+          <a:lstStyle/>
+          <a:p>
+            <a:pPr algn="l" indent="0" marL="0">
+              <a:lnSpc>
+                <a:spcPts val="1820"/>
+              </a:lnSpc>
+              <a:spcBef>
+                <a:spcPts val="300"/>
+              </a:spcBef>
+              <a:spcAft>
+                <a:spcPts val="300"/>
+              </a:spcAft>
+              <a:buNone/>
+            </a:pPr>
+            <a:r>
+              <a:rPr lang="en-US" sz="1300" b="1" i="1" dirty="0">
+                <a:solidFill>
+                  <a:srgbClr val="1C2833"/>
+                </a:solidFill>
+                <a:latin typeface="Georgia" pitchFamily="34" charset="0"/>
+                <a:ea typeface="Georgia" pitchFamily="34" charset="-122"/>
+                <a:cs typeface="Georgia" pitchFamily="34" charset="-120"/>
+              </a:rPr>
+              <a:t>Hebrew (lunisolar)</a:t>
+            </a:r>
+            <a:pPr algn="l" indent="0" marL="0">
+              <a:lnSpc>
+                <a:spcPts val="1820"/>
+              </a:lnSpc>
+              <a:spcBef>
+                <a:spcPts val="300"/>
+              </a:spcBef>
+              <a:spcAft>
+                <a:spcPts val="300"/>
+              </a:spcAft>
+              <a:buNone/>
+            </a:pPr>
+            <a:r>
+              <a:rPr lang="en-US" sz="1300" dirty="0">
+                <a:solidFill>
+                  <a:srgbClr val="1C2833"/>
+                </a:solidFill>
+                <a:latin typeface="Georgia" pitchFamily="34" charset="0"/>
+                <a:ea typeface="Georgia" pitchFamily="34" charset="-122"/>
+                <a:cs typeface="Georgia" pitchFamily="34" charset="-120"/>
+              </a:rPr>
+              <a:t> — 7 leap months in 19 years (Metonic cycle).</a:t>
+            </a:r>
+            <a:endParaRPr lang="en-US" sz="1300" dirty="0"/>
+          </a:p>
+        </p:txBody>
+      </p:sp>
+      <p:sp>
+        <p:nvSpPr>
+          <p:cNvPr id="11" name="Text 9"/>
+          <p:cNvSpPr/>
+          <p:nvPr/>
+        </p:nvSpPr>
+        <p:spPr>
+          <a:xfrm>
+            <a:off x="692051" y="2419499"/>
+            <a:ext cx="7973389" cy="461963"/>
+          </a:xfrm>
+          <a:prstGeom prst="rect">
+            <a:avLst/>
+          </a:prstGeom>
+          <a:noFill/>
+          <a:ln/>
+        </p:spPr>
+        <p:txBody>
+          <a:bodyPr wrap="square" lIns="0" tIns="0" rIns="0" bIns="0" rtlCol="0" anchor="t"/>
+          <a:lstStyle/>
+          <a:p>
+            <a:pPr algn="l" indent="0" marL="0">
+              <a:lnSpc>
+                <a:spcPts val="1820"/>
+              </a:lnSpc>
+              <a:spcBef>
+                <a:spcPts val="300"/>
+              </a:spcBef>
+              <a:spcAft>
+                <a:spcPts val="300"/>
+              </a:spcAft>
+              <a:buNone/>
+            </a:pPr>
+            <a:r>
+              <a:rPr lang="en-US" sz="1300" i="1" dirty="0">
+                <a:solidFill>
+                  <a:srgbClr val="1C2833"/>
+                </a:solidFill>
+                <a:latin typeface="Georgia" pitchFamily="34" charset="0"/>
+                <a:ea typeface="Georgia" pitchFamily="34" charset="-122"/>
+                <a:cs typeface="Georgia" pitchFamily="34" charset="-120"/>
+              </a:rPr>
+              <a:t>The Indian, Chinese, and Hebrew systems independently arrived at lunisolar intercalation. Their rules differ; the underlying problem is the same.</a:t>
+            </a:r>
+            <a:endParaRPr lang="en-US" sz="1300" dirty="0"/>
+          </a:p>
+        </p:txBody>
+      </p:sp>
+      <p:sp>
+        <p:nvSpPr>
+          <p:cNvPr id="12" name="Text 10"/>
+          <p:cNvSpPr/>
+          <p:nvPr/>
+        </p:nvSpPr>
+        <p:spPr>
+          <a:xfrm>
+            <a:off x="406301" y="4434929"/>
+            <a:ext cx="8498026" cy="213271"/>
+          </a:xfrm>
+          <a:prstGeom prst="rect">
+            <a:avLst/>
+          </a:prstGeom>
+          <a:noFill/>
+          <a:ln/>
+        </p:spPr>
+        <p:txBody>
+          <a:bodyPr wrap="square" lIns="0" tIns="0" rIns="0" bIns="0" rtlCol="0" anchor="t"/>
+          <a:lstStyle/>
+          <a:p>
+            <a:pPr algn="l" indent="0" marL="0">
+              <a:lnSpc>
+                <a:spcPts val="1680"/>
+              </a:lnSpc>
+              <a:spcBef>
+                <a:spcPts val="300"/>
+              </a:spcBef>
+              <a:spcAft>
+                <a:spcPts val="300"/>
+              </a:spcAft>
+              <a:buNone/>
+            </a:pPr>
+            <a:r>
+              <a:rPr lang="en-US" sz="1200" dirty="0">
+                <a:solidFill>
+                  <a:srgbClr val="1C2833"/>
+                </a:solidFill>
+                <a:latin typeface="Arial" pitchFamily="34" charset="0"/>
+                <a:ea typeface="Arial" pitchFamily="34" charset="-122"/>
+                <a:cs typeface="Arial" pitchFamily="34" charset="-120"/>
+              </a:rPr>
+              <a:t>Middle ·  · IKS Curriculum</a:t>
+            </a:r>
+            <a:endParaRPr lang="en-US" sz="1200" dirty="0"/>
+          </a:p>
+        </p:txBody>
+      </p:sp>
+    </p:spTree>
+  </p:cSld>
+  <p:clrMapOvr>
+    <a:masterClrMapping/>
+  </p:clrMapOvr>
+</p:sld>
+</file>
+
+<file path=ppt/slides/slide16.xml><?xml version="1.0" encoding="utf-8"?>
+<p:sld xmlns:a="http://schemas.openxmlformats.org/drawingml/2006/main" xmlns:r="http://schemas.openxmlformats.org/officeDocument/2006/relationships" xmlns:p="http://schemas.openxmlformats.org/presentationml/2006/main">
+  <p:cSld name="Slide 16">
+    <p:bg>
+      <p:bgPr>
+        <a:solidFill>
+          <a:srgbClr val="FFFFFF"/>
+        </a:solidFill>
+      </p:bgPr>
+    </p:bg>
+    <p:spTree>
+      <p:nvGrpSpPr>
+        <p:cNvPr id="1" name=""/>
+        <p:cNvGrpSpPr/>
+        <p:nvPr/>
+      </p:nvGrpSpPr>
+      <p:grpSpPr>
+        <a:xfrm>
+          <a:off x="0" y="0"/>
+          <a:ext cx="0" cy="0"/>
+          <a:chOff x="0" y="0"/>
+          <a:chExt cx="0" cy="0"/>
+        </a:xfrm>
+      </p:grpSpPr>
+      <p:sp>
+        <p:nvSpPr>
+          <p:cNvPr id="2" name="Text 0"/>
+          <p:cNvSpPr/>
+          <p:nvPr/>
+        </p:nvSpPr>
+        <p:spPr>
+          <a:xfrm>
+            <a:off x="0" y="0"/>
+            <a:ext cx="9144000" cy="101501"/>
+          </a:xfrm>
+          <a:prstGeom prst="rect">
+            <a:avLst/>
+          </a:prstGeom>
+          <a:solidFill>
+            <a:srgbClr val="277884"/>
+          </a:solidFill>
+          <a:ln/>
+        </p:spPr>
+        <p:txBody>
+          <a:bodyPr wrap="square" rtlCol="0" anchor="ctr"/>
+          <a:lstStyle/>
+          <a:p>
+            <a:pPr indent="0" marL="0">
+              <a:buNone/>
+            </a:pPr>
+            <a:endParaRPr lang="en-US" dirty="0"/>
+          </a:p>
+        </p:txBody>
+      </p:sp>
+      <p:sp>
+        <p:nvSpPr>
+          <p:cNvPr id="3" name="Text 1"/>
+          <p:cNvSpPr/>
+          <p:nvPr/>
+        </p:nvSpPr>
+        <p:spPr>
+          <a:xfrm>
+            <a:off x="406301" y="457051"/>
+            <a:ext cx="8498026" cy="274290"/>
+          </a:xfrm>
+          <a:prstGeom prst="rect">
+            <a:avLst/>
+          </a:prstGeom>
+          <a:noFill/>
+          <a:ln/>
+        </p:spPr>
+        <p:txBody>
+          <a:bodyPr wrap="square" lIns="0" tIns="0" rIns="0" bIns="0" rtlCol="0" anchor="t"/>
+          <a:lstStyle/>
+          <a:p>
+            <a:pPr algn="l" indent="0" marL="0">
+              <a:lnSpc>
+                <a:spcPts val="2160"/>
+              </a:lnSpc>
+              <a:spcBef>
+                <a:spcPts val="600"/>
+              </a:spcBef>
+              <a:spcAft>
+                <a:spcPts val="800"/>
+              </a:spcAft>
+              <a:buNone/>
+            </a:pPr>
+            <a:r>
+              <a:rPr lang="en-US" sz="1800" b="1" dirty="0">
+                <a:solidFill>
+                  <a:srgbClr val="FE4447"/>
+                </a:solidFill>
+                <a:latin typeface="Georgia" pitchFamily="34" charset="0"/>
+                <a:ea typeface="Georgia" pitchFamily="34" charset="-122"/>
+                <a:cs typeface="Georgia" pitchFamily="34" charset="-120"/>
+              </a:rPr>
+              <a:t>Homework</a:t>
+            </a:r>
+            <a:endParaRPr lang="en-US" sz="1800" dirty="0"/>
+          </a:p>
+        </p:txBody>
+      </p:sp>
+      <p:sp>
+        <p:nvSpPr>
+          <p:cNvPr id="4" name="Text 2"/>
+          <p:cNvSpPr/>
+          <p:nvPr/>
+        </p:nvSpPr>
+        <p:spPr>
+          <a:xfrm>
+            <a:off x="634901" y="883593"/>
+            <a:ext cx="8102798" cy="525661"/>
+          </a:xfrm>
+          <a:prstGeom prst="rect">
+            <a:avLst/>
+          </a:prstGeom>
+          <a:noFill/>
+          <a:ln/>
+        </p:spPr>
+        <p:txBody>
+          <a:bodyPr wrap="square" lIns="0" tIns="0" rIns="0" bIns="0" rtlCol="0" anchor="t"/>
+          <a:lstStyle/>
+          <a:p>
+            <a:pPr algn="l" marL="342900" indent="-342900">
+              <a:lnSpc>
+                <a:spcPts val="1620"/>
+              </a:lnSpc>
+              <a:spcAft>
+                <a:spcPts val="300"/>
+              </a:spcAft>
+              <a:buSzPct val="100000"/>
+              <a:buChar char="•"/>
+            </a:pPr>
+            <a:r>
+              <a:rPr lang="en-US" sz="1200" dirty="0">
+                <a:solidFill>
+                  <a:srgbClr val="1C2833"/>
+                </a:solidFill>
+                <a:latin typeface="Arial" pitchFamily="34" charset="0"/>
+                <a:ea typeface="Arial" pitchFamily="34" charset="-122"/>
+                <a:cs typeface="Arial" pitchFamily="34" charset="-120"/>
+              </a:rPr>
+              <a:t>Continue the Moon diary (one night left).</a:t>
+            </a:r>
+            <a:endParaRPr lang="en-US" sz="1200" dirty="0"/>
+          </a:p>
+          <a:p>
+            <a:pPr algn="l" marL="342900" indent="-342900">
+              <a:lnSpc>
+                <a:spcPts val="1620"/>
+              </a:lnSpc>
+              <a:spcAft>
+                <a:spcPts val="300"/>
+              </a:spcAft>
+              <a:buSzPct val="100000"/>
+              <a:buChar char="•"/>
+            </a:pPr>
+            <a:r>
+              <a:rPr lang="en-US" sz="1200" dirty="0">
+                <a:solidFill>
+                  <a:srgbClr val="1C2833"/>
+                </a:solidFill>
+                <a:latin typeface="Arial" pitchFamily="34" charset="0"/>
+                <a:ea typeface="Arial" pitchFamily="34" charset="-122"/>
+                <a:cs typeface="Arial" pitchFamily="34" charset="-120"/>
+              </a:rPr>
+              <a:t>Final touches on your project. Bring everything to class tomorrow.</a:t>
+            </a:r>
+            <a:endParaRPr lang="en-US" sz="1200" dirty="0"/>
+          </a:p>
+        </p:txBody>
+      </p:sp>
+      <p:sp>
+        <p:nvSpPr>
+          <p:cNvPr id="5" name="Text 3"/>
+          <p:cNvSpPr/>
+          <p:nvPr/>
+        </p:nvSpPr>
+        <p:spPr>
+          <a:xfrm>
+            <a:off x="406301" y="4434929"/>
+            <a:ext cx="8498026" cy="213271"/>
+          </a:xfrm>
+          <a:prstGeom prst="rect">
+            <a:avLst/>
+          </a:prstGeom>
+          <a:noFill/>
+          <a:ln/>
+        </p:spPr>
+        <p:txBody>
+          <a:bodyPr wrap="square" lIns="0" tIns="0" rIns="0" bIns="0" rtlCol="0" anchor="t"/>
+          <a:lstStyle/>
+          <a:p>
+            <a:pPr algn="l" indent="0" marL="0">
+              <a:lnSpc>
+                <a:spcPts val="1680"/>
+              </a:lnSpc>
+              <a:spcBef>
+                <a:spcPts val="300"/>
+              </a:spcBef>
+              <a:spcAft>
+                <a:spcPts val="300"/>
+              </a:spcAft>
+              <a:buNone/>
+            </a:pPr>
+            <a:r>
+              <a:rPr lang="en-US" sz="1200" dirty="0">
+                <a:solidFill>
+                  <a:srgbClr val="1C2833"/>
+                </a:solidFill>
+                <a:latin typeface="Arial" pitchFamily="34" charset="0"/>
+                <a:ea typeface="Arial" pitchFamily="34" charset="-122"/>
+                <a:cs typeface="Arial" pitchFamily="34" charset="-120"/>
+              </a:rPr>
+              <a:t>Middle ·  · IKS Curriculum</a:t>
+            </a:r>
+            <a:endParaRPr lang="en-US" sz="1200" dirty="0"/>
+          </a:p>
+        </p:txBody>
+      </p:sp>
+    </p:spTree>
+  </p:cSld>
+  <p:clrMapOvr>
+    <a:masterClrMapping/>
+  </p:clrMapOvr>
+</p:sld>
+</file>
+
+<file path=ppt/slides/slide17.xml><?xml version="1.0" encoding="utf-8"?>
+<p:sld xmlns:a="http://schemas.openxmlformats.org/drawingml/2006/main" xmlns:r="http://schemas.openxmlformats.org/officeDocument/2006/relationships" xmlns:p="http://schemas.openxmlformats.org/presentationml/2006/main">
+  <p:cSld name="Slide 17">
+    <p:bg>
+      <p:bgPr>
+        <a:solidFill>
+          <a:srgbClr val="FFFFFF"/>
+        </a:solidFill>
+      </p:bgPr>
+    </p:bg>
+    <p:spTree>
+      <p:nvGrpSpPr>
+        <p:cNvPr id="1" name=""/>
+        <p:cNvGrpSpPr/>
+        <p:nvPr/>
+      </p:nvGrpSpPr>
+      <p:grpSpPr>
+        <a:xfrm>
+          <a:off x="0" y="0"/>
+          <a:ext cx="0" cy="0"/>
+          <a:chOff x="0" y="0"/>
+          <a:chExt cx="0" cy="0"/>
+        </a:xfrm>
+      </p:grpSpPr>
+      <p:sp>
+        <p:nvSpPr>
+          <p:cNvPr id="2" name="Text 0"/>
+          <p:cNvSpPr/>
+          <p:nvPr/>
+        </p:nvSpPr>
+        <p:spPr>
+          <a:xfrm>
+            <a:off x="0" y="0"/>
+            <a:ext cx="9144000" cy="101501"/>
+          </a:xfrm>
+          <a:prstGeom prst="rect">
+            <a:avLst/>
+          </a:prstGeom>
+          <a:solidFill>
+            <a:srgbClr val="277884"/>
+          </a:solidFill>
+          <a:ln/>
+        </p:spPr>
+        <p:txBody>
+          <a:bodyPr wrap="square" rtlCol="0" anchor="ctr"/>
+          <a:lstStyle/>
+          <a:p>
+            <a:pPr indent="0" marL="0">
+              <a:buNone/>
+            </a:pPr>
+            <a:endParaRPr lang="en-US" dirty="0"/>
+          </a:p>
+        </p:txBody>
+      </p:sp>
+      <p:sp>
+        <p:nvSpPr>
+          <p:cNvPr id="3" name="Text 1"/>
+          <p:cNvSpPr/>
+          <p:nvPr/>
+        </p:nvSpPr>
+        <p:spPr>
+          <a:xfrm>
+            <a:off x="406301" y="457051"/>
+            <a:ext cx="8498026" cy="274290"/>
+          </a:xfrm>
+          <a:prstGeom prst="rect">
+            <a:avLst/>
+          </a:prstGeom>
+          <a:noFill/>
+          <a:ln/>
+        </p:spPr>
+        <p:txBody>
+          <a:bodyPr wrap="square" lIns="0" tIns="0" rIns="0" bIns="0" rtlCol="0" anchor="t"/>
+          <a:lstStyle/>
+          <a:p>
+            <a:pPr algn="l" indent="0" marL="0">
+              <a:lnSpc>
+                <a:spcPts val="2160"/>
+              </a:lnSpc>
+              <a:spcBef>
+                <a:spcPts val="600"/>
+              </a:spcBef>
+              <a:spcAft>
+                <a:spcPts val="800"/>
+              </a:spcAft>
+              <a:buNone/>
+            </a:pPr>
+            <a:r>
+              <a:rPr lang="en-US" sz="1800" b="1" dirty="0">
+                <a:solidFill>
+                  <a:srgbClr val="FE4447"/>
+                </a:solidFill>
+                <a:latin typeface="Georgia" pitchFamily="34" charset="0"/>
+                <a:ea typeface="Georgia" pitchFamily="34" charset="-122"/>
+                <a:cs typeface="Georgia" pitchFamily="34" charset="-120"/>
+              </a:rPr>
+              <a:t>Differentiation</a:t>
+            </a:r>
+            <a:endParaRPr lang="en-US" sz="1800" dirty="0"/>
+          </a:p>
+        </p:txBody>
+      </p:sp>
+      <p:sp>
+        <p:nvSpPr>
+          <p:cNvPr id="4" name="Text 2"/>
+          <p:cNvSpPr/>
+          <p:nvPr/>
+        </p:nvSpPr>
+        <p:spPr>
+          <a:xfrm>
+            <a:off x="634901" y="883593"/>
+            <a:ext cx="8102798" cy="937022"/>
+          </a:xfrm>
+          <a:prstGeom prst="rect">
+            <a:avLst/>
+          </a:prstGeom>
+          <a:noFill/>
+          <a:ln/>
+        </p:spPr>
+        <p:txBody>
+          <a:bodyPr wrap="square" lIns="0" tIns="0" rIns="0" bIns="0" rtlCol="0" anchor="t"/>
+          <a:lstStyle/>
+          <a:p>
+            <a:pPr algn="l" marL="342900" indent="-342900">
+              <a:lnSpc>
+                <a:spcPts val="1620"/>
+              </a:lnSpc>
+              <a:spcAft>
+                <a:spcPts val="300"/>
+              </a:spcAft>
+              <a:buSzPct val="100000"/>
+              <a:buChar char="•"/>
+            </a:pPr>
+            <a:r>
+              <a:rPr lang="en-US" sz="1200" b="1" dirty="0">
+                <a:solidFill>
+                  <a:srgbClr val="1C2833"/>
+                </a:solidFill>
+                <a:latin typeface="Arial" pitchFamily="34" charset="0"/>
+                <a:ea typeface="Arial" pitchFamily="34" charset="-122"/>
+                <a:cs typeface="Arial" pitchFamily="34" charset="-120"/>
+              </a:rPr>
+              <a:t>One tier up:</a:t>
+            </a:r>
+            <a:pPr algn="l" indent="0" marL="0">
+              <a:lnSpc>
+                <a:spcPts val="1620"/>
+              </a:lnSpc>
+              <a:spcAft>
+                <a:spcPts val="300"/>
+              </a:spcAft>
+              <a:buNone/>
+            </a:pPr>
+            <a:r>
+              <a:rPr lang="en-US" sz="1200" dirty="0">
+                <a:solidFill>
+                  <a:srgbClr val="1C2833"/>
+                </a:solidFill>
+                <a:latin typeface="Arial" pitchFamily="34" charset="0"/>
+                <a:ea typeface="Arial" pitchFamily="34" charset="-122"/>
+                <a:cs typeface="Arial" pitchFamily="34" charset="-120"/>
+              </a:rPr>
+              <a:t> Pick TWO calendars and write a paragraph: under what circumstances does each calendar's design choice make sense? (Pure lunar — when religious months not tied to season matter most; lunisolar — when agriculture matters; pure solar — when civil administration matters.)</a:t>
+            </a:r>
+            <a:endParaRPr lang="en-US" sz="1200" dirty="0"/>
+          </a:p>
+          <a:p>
+            <a:pPr algn="l" marL="342900" indent="-342900">
+              <a:lnSpc>
+                <a:spcPts val="1620"/>
+              </a:lnSpc>
+              <a:spcAft>
+                <a:spcPts val="300"/>
+              </a:spcAft>
+              <a:buSzPct val="100000"/>
+              <a:buChar char="•"/>
+            </a:pPr>
+            <a:r>
+              <a:rPr lang="en-US" sz="1200" b="1" dirty="0">
+                <a:solidFill>
+                  <a:srgbClr val="1C2833"/>
+                </a:solidFill>
+                <a:latin typeface="Arial" pitchFamily="34" charset="0"/>
+                <a:ea typeface="Arial" pitchFamily="34" charset="-122"/>
+                <a:cs typeface="Arial" pitchFamily="34" charset="-120"/>
+              </a:rPr>
+              <a:t>One tier down:</a:t>
+            </a:r>
+            <a:pPr algn="l" indent="0" marL="0">
+              <a:lnSpc>
+                <a:spcPts val="1620"/>
+              </a:lnSpc>
+              <a:spcAft>
+                <a:spcPts val="300"/>
+              </a:spcAft>
+              <a:buNone/>
+            </a:pPr>
+            <a:r>
+              <a:rPr lang="en-US" sz="1200" dirty="0">
+                <a:solidFill>
+                  <a:srgbClr val="1C2833"/>
+                </a:solidFill>
+                <a:latin typeface="Arial" pitchFamily="34" charset="0"/>
+                <a:ea typeface="Arial" pitchFamily="34" charset="-122"/>
+                <a:cs typeface="Arial" pitchFamily="34" charset="-120"/>
+              </a:rPr>
+              <a:t> Compare just the Indian and the Hijri (pure lunar). One difference, one similarity. That's enough.</a:t>
+            </a:r>
+            <a:endParaRPr lang="en-US" sz="1200" dirty="0"/>
+          </a:p>
+        </p:txBody>
+      </p:sp>
+      <p:sp>
+        <p:nvSpPr>
+          <p:cNvPr id="5" name="Text 3"/>
+          <p:cNvSpPr/>
+          <p:nvPr/>
+        </p:nvSpPr>
+        <p:spPr>
+          <a:xfrm>
+            <a:off x="406301" y="4434929"/>
+            <a:ext cx="8498026" cy="213271"/>
+          </a:xfrm>
+          <a:prstGeom prst="rect">
+            <a:avLst/>
+          </a:prstGeom>
+          <a:noFill/>
+          <a:ln/>
+        </p:spPr>
+        <p:txBody>
+          <a:bodyPr wrap="square" lIns="0" tIns="0" rIns="0" bIns="0" rtlCol="0" anchor="t"/>
+          <a:lstStyle/>
+          <a:p>
+            <a:pPr algn="l" indent="0" marL="0">
+              <a:lnSpc>
+                <a:spcPts val="1680"/>
+              </a:lnSpc>
+              <a:spcBef>
+                <a:spcPts val="300"/>
+              </a:spcBef>
+              <a:spcAft>
+                <a:spcPts val="300"/>
+              </a:spcAft>
+              <a:buNone/>
+            </a:pPr>
+            <a:r>
+              <a:rPr lang="en-US" sz="1200" dirty="0">
+                <a:solidFill>
+                  <a:srgbClr val="1C2833"/>
+                </a:solidFill>
+                <a:latin typeface="Arial" pitchFamily="34" charset="0"/>
+                <a:ea typeface="Arial" pitchFamily="34" charset="-122"/>
+                <a:cs typeface="Arial" pitchFamily="34" charset="-120"/>
+              </a:rPr>
+              <a:t>Middle ·  · IKS Curriculum</a:t>
+            </a:r>
+            <a:endParaRPr lang="en-US" sz="1200" dirty="0"/>
+          </a:p>
+        </p:txBody>
+      </p:sp>
+    </p:spTree>
+  </p:cSld>
+  <p:clrMapOvr>
+    <a:masterClrMapping/>
+  </p:clrMapOvr>
+</p:sld>
+</file>
+
+<file path=ppt/slides/slide18.xml><?xml version="1.0" encoding="utf-8"?>
+<p:sld xmlns:a="http://schemas.openxmlformats.org/drawingml/2006/main" xmlns:r="http://schemas.openxmlformats.org/officeDocument/2006/relationships" xmlns:p="http://schemas.openxmlformats.org/presentationml/2006/main">
+  <p:cSld name="Slide 18">
+    <p:bg>
+      <p:bgPr>
+        <a:solidFill>
+          <a:srgbClr val="FFFFFF"/>
+        </a:solidFill>
+      </p:bgPr>
+    </p:bg>
+    <p:spTree>
+      <p:nvGrpSpPr>
+        <p:cNvPr id="1" name=""/>
+        <p:cNvGrpSpPr/>
+        <p:nvPr/>
+      </p:nvGrpSpPr>
+      <p:grpSpPr>
+        <a:xfrm>
+          <a:off x="0" y="0"/>
+          <a:ext cx="0" cy="0"/>
+          <a:chOff x="0" y="0"/>
+          <a:chExt cx="0" cy="0"/>
+        </a:xfrm>
+      </p:grpSpPr>
+      <p:sp>
+        <p:nvSpPr>
+          <p:cNvPr id="2" name="Text 0"/>
+          <p:cNvSpPr/>
+          <p:nvPr/>
+        </p:nvSpPr>
+        <p:spPr>
+          <a:xfrm>
+            <a:off x="0" y="0"/>
+            <a:ext cx="9144000" cy="101501"/>
+          </a:xfrm>
+          <a:prstGeom prst="rect">
+            <a:avLst/>
+          </a:prstGeom>
+          <a:solidFill>
+            <a:srgbClr val="277884"/>
+          </a:solidFill>
+          <a:ln/>
+        </p:spPr>
+        <p:txBody>
+          <a:bodyPr wrap="square" rtlCol="0" anchor="ctr"/>
+          <a:lstStyle/>
+          <a:p>
+            <a:pPr indent="0" marL="0">
+              <a:buNone/>
+            </a:pPr>
+            <a:endParaRPr lang="en-US" dirty="0"/>
+          </a:p>
+        </p:txBody>
+      </p:sp>
+      <p:sp>
+        <p:nvSpPr>
+          <p:cNvPr id="3" name="Text 1"/>
+          <p:cNvSpPr/>
+          <p:nvPr/>
+        </p:nvSpPr>
+        <p:spPr>
+          <a:xfrm>
+            <a:off x="406301" y="457051"/>
+            <a:ext cx="8498026" cy="274290"/>
+          </a:xfrm>
+          <a:prstGeom prst="rect">
+            <a:avLst/>
+          </a:prstGeom>
+          <a:noFill/>
+          <a:ln/>
+        </p:spPr>
+        <p:txBody>
+          <a:bodyPr wrap="square" lIns="0" tIns="0" rIns="0" bIns="0" rtlCol="0" anchor="t"/>
+          <a:lstStyle/>
+          <a:p>
+            <a:pPr algn="l" indent="0" marL="0">
+              <a:lnSpc>
+                <a:spcPts val="2160"/>
+              </a:lnSpc>
+              <a:spcBef>
+                <a:spcPts val="600"/>
+              </a:spcBef>
+              <a:spcAft>
+                <a:spcPts val="800"/>
+              </a:spcAft>
+              <a:buNone/>
+            </a:pPr>
+            <a:r>
+              <a:rPr lang="en-US" sz="1800" b="1" dirty="0">
+                <a:solidFill>
+                  <a:srgbClr val="FE4447"/>
+                </a:solidFill>
+                <a:latin typeface="Georgia" pitchFamily="34" charset="0"/>
+                <a:ea typeface="Georgia" pitchFamily="34" charset="-122"/>
+                <a:cs typeface="Georgia" pitchFamily="34" charset="-120"/>
+              </a:rPr>
+              <a:t>Teacher notes</a:t>
+            </a:r>
+            <a:endParaRPr lang="en-US" sz="1800" dirty="0"/>
+          </a:p>
+        </p:txBody>
+      </p:sp>
+      <p:sp>
+        <p:nvSpPr>
+          <p:cNvPr id="4" name="Text 2"/>
+          <p:cNvSpPr/>
+          <p:nvPr/>
+        </p:nvSpPr>
+        <p:spPr>
+          <a:xfrm>
+            <a:off x="634901" y="883593"/>
+            <a:ext cx="8102798" cy="1180802"/>
+          </a:xfrm>
+          <a:prstGeom prst="rect">
+            <a:avLst/>
+          </a:prstGeom>
+          <a:noFill/>
+          <a:ln/>
+        </p:spPr>
+        <p:txBody>
+          <a:bodyPr wrap="square" lIns="0" tIns="0" rIns="0" bIns="0" rtlCol="0" anchor="t"/>
+          <a:lstStyle/>
+          <a:p>
+            <a:pPr algn="l" marL="342900" indent="-342900">
+              <a:lnSpc>
+                <a:spcPts val="1620"/>
+              </a:lnSpc>
+              <a:spcAft>
+                <a:spcPts val="300"/>
+              </a:spcAft>
+              <a:buSzPct val="100000"/>
+              <a:buChar char="•"/>
+            </a:pPr>
+            <a:r>
+              <a:rPr lang="en-US" sz="1200" dirty="0">
+                <a:solidFill>
+                  <a:srgbClr val="1C2833"/>
+                </a:solidFill>
+                <a:latin typeface="Arial" pitchFamily="34" charset="0"/>
+                <a:ea typeface="Arial" pitchFamily="34" charset="-122"/>
+                <a:cs typeface="Arial" pitchFamily="34" charset="-120"/>
+              </a:rPr>
+              <a:t>This content is genuinely cross-cultural. Avoid framing as "ours is best." All four systems work; they encode different priorities.</a:t>
+            </a:r>
+            <a:endParaRPr lang="en-US" sz="1200" dirty="0"/>
+          </a:p>
+          <a:p>
+            <a:pPr algn="l" marL="342900" indent="-342900">
+              <a:lnSpc>
+                <a:spcPts val="1620"/>
+              </a:lnSpc>
+              <a:spcAft>
+                <a:spcPts val="300"/>
+              </a:spcAft>
+              <a:buSzPct val="100000"/>
+              <a:buChar char="•"/>
+            </a:pPr>
+            <a:r>
+              <a:rPr lang="en-US" sz="1200" dirty="0">
+                <a:solidFill>
+                  <a:srgbClr val="1C2833"/>
+                </a:solidFill>
+                <a:latin typeface="Arial" pitchFamily="34" charset="0"/>
+                <a:ea typeface="Arial" pitchFamily="34" charset="-122"/>
+                <a:cs typeface="Arial" pitchFamily="34" charset="-120"/>
+              </a:rPr>
+              <a:t>The Metonic cycle (19-year Hebrew cycle) and the Indian intercalation rule converge to about the same accuracy. This is mathematically interesting — students at Senior band can explore it.</a:t>
+            </a:r>
+            <a:endParaRPr lang="en-US" sz="1200" dirty="0"/>
+          </a:p>
+          <a:p>
+            <a:pPr algn="l" marL="342900" indent="-342900">
+              <a:lnSpc>
+                <a:spcPts val="1620"/>
+              </a:lnSpc>
+              <a:spcAft>
+                <a:spcPts val="300"/>
+              </a:spcAft>
+              <a:buSzPct val="100000"/>
+              <a:buChar char="•"/>
+            </a:pPr>
+            <a:r>
+              <a:rPr lang="en-US" sz="1200" dirty="0">
+                <a:solidFill>
+                  <a:srgbClr val="1C2833"/>
+                </a:solidFill>
+                <a:latin typeface="Arial" pitchFamily="34" charset="0"/>
+                <a:ea typeface="Arial" pitchFamily="34" charset="-122"/>
+                <a:cs typeface="Arial" pitchFamily="34" charset="-120"/>
+              </a:rPr>
+              <a:t>Keep this part to 15 minutes. The project is the major work today.</a:t>
+            </a:r>
+            <a:endParaRPr lang="en-US" sz="1200" dirty="0"/>
+          </a:p>
+        </p:txBody>
+      </p:sp>
+      <p:sp>
+        <p:nvSpPr>
+          <p:cNvPr id="5" name="Text 3"/>
+          <p:cNvSpPr/>
+          <p:nvPr/>
+        </p:nvSpPr>
+        <p:spPr>
+          <a:xfrm>
+            <a:off x="406301" y="4434929"/>
+            <a:ext cx="8498026" cy="213271"/>
+          </a:xfrm>
+          <a:prstGeom prst="rect">
+            <a:avLst/>
+          </a:prstGeom>
+          <a:noFill/>
+          <a:ln/>
+        </p:spPr>
+        <p:txBody>
+          <a:bodyPr wrap="square" lIns="0" tIns="0" rIns="0" bIns="0" rtlCol="0" anchor="t"/>
+          <a:lstStyle/>
+          <a:p>
+            <a:pPr algn="l" indent="0" marL="0">
+              <a:lnSpc>
+                <a:spcPts val="1680"/>
+              </a:lnSpc>
+              <a:spcBef>
+                <a:spcPts val="300"/>
+              </a:spcBef>
+              <a:spcAft>
+                <a:spcPts val="300"/>
+              </a:spcAft>
+              <a:buNone/>
+            </a:pPr>
+            <a:r>
+              <a:rPr lang="en-US" sz="1200" dirty="0">
+                <a:solidFill>
+                  <a:srgbClr val="1C2833"/>
+                </a:solidFill>
+                <a:latin typeface="Arial" pitchFamily="34" charset="0"/>
+                <a:ea typeface="Arial" pitchFamily="34" charset="-122"/>
+                <a:cs typeface="Arial" pitchFamily="34" charset="-120"/>
+              </a:rPr>
+              <a:t>Middle ·  · IKS Curriculum</a:t>
+            </a:r>
+            <a:endParaRPr lang="en-US" sz="1200" dirty="0"/>
+          </a:p>
+        </p:txBody>
+      </p:sp>
+    </p:spTree>
+  </p:cSld>
+  <p:clrMapOvr>
+    <a:masterClrMapping/>
+  </p:clrMapOvr>
+</p:sld>
+</file>
+
+<file path=ppt/slides/slide19.xml><?xml version="1.0" encoding="utf-8"?>
+<p:sld xmlns:a="http://schemas.openxmlformats.org/drawingml/2006/main" xmlns:r="http://schemas.openxmlformats.org/officeDocument/2006/relationships" xmlns:p="http://schemas.openxmlformats.org/presentationml/2006/main">
+  <p:cSld name="Slide 19">
+    <p:bg>
+      <p:bgPr>
+        <a:solidFill>
+          <a:srgbClr val="FFFFFF"/>
+        </a:solidFill>
+      </p:bgPr>
+    </p:bg>
+    <p:spTree>
+      <p:nvGrpSpPr>
+        <p:cNvPr id="1" name=""/>
+        <p:cNvGrpSpPr/>
+        <p:nvPr/>
+      </p:nvGrpSpPr>
+      <p:grpSpPr>
+        <a:xfrm>
+          <a:off x="0" y="0"/>
+          <a:ext cx="0" cy="0"/>
+          <a:chOff x="0" y="0"/>
+          <a:chExt cx="0" cy="0"/>
+        </a:xfrm>
+      </p:grpSpPr>
+      <p:sp>
+        <p:nvSpPr>
+          <p:cNvPr id="2" name="Text 0"/>
+          <p:cNvSpPr/>
+          <p:nvPr/>
+        </p:nvSpPr>
+        <p:spPr>
+          <a:xfrm>
+            <a:off x="0" y="0"/>
+            <a:ext cx="9144000" cy="101501"/>
+          </a:xfrm>
+          <a:prstGeom prst="rect">
+            <a:avLst/>
+          </a:prstGeom>
+          <a:solidFill>
+            <a:srgbClr val="277884"/>
+          </a:solidFill>
+          <a:ln/>
+        </p:spPr>
+        <p:txBody>
+          <a:bodyPr wrap="square" rtlCol="0" anchor="ctr"/>
+          <a:lstStyle/>
+          <a:p>
+            <a:pPr indent="0" marL="0">
+              <a:buNone/>
+            </a:pPr>
+            <a:endParaRPr lang="en-US" dirty="0"/>
+          </a:p>
+        </p:txBody>
+      </p:sp>
+      <p:sp>
+        <p:nvSpPr>
+          <p:cNvPr id="3" name="Text 1"/>
+          <p:cNvSpPr/>
+          <p:nvPr/>
+        </p:nvSpPr>
+        <p:spPr>
+          <a:xfrm>
+            <a:off x="406301" y="457051"/>
+            <a:ext cx="8498026" cy="274290"/>
+          </a:xfrm>
+          <a:prstGeom prst="rect">
+            <a:avLst/>
+          </a:prstGeom>
+          <a:noFill/>
+          <a:ln/>
+        </p:spPr>
+        <p:txBody>
+          <a:bodyPr wrap="square" lIns="0" tIns="0" rIns="0" bIns="0" rtlCol="0" anchor="t"/>
+          <a:lstStyle/>
+          <a:p>
+            <a:pPr algn="l" indent="0" marL="0">
+              <a:lnSpc>
+                <a:spcPts val="2160"/>
+              </a:lnSpc>
+              <a:spcBef>
+                <a:spcPts val="600"/>
+              </a:spcBef>
+              <a:spcAft>
+                <a:spcPts val="800"/>
+              </a:spcAft>
+              <a:buNone/>
+            </a:pPr>
+            <a:r>
+              <a:rPr lang="en-US" sz="1800" b="1" dirty="0">
+                <a:solidFill>
+                  <a:srgbClr val="FE4447"/>
+                </a:solidFill>
+                <a:latin typeface="Georgia" pitchFamily="34" charset="0"/>
+                <a:ea typeface="Georgia" pitchFamily="34" charset="-122"/>
+                <a:cs typeface="Georgia" pitchFamily="34" charset="-120"/>
+              </a:rPr>
+              <a:t>Citation(s) used in this lesson</a:t>
+            </a:r>
+            <a:endParaRPr lang="en-US" sz="1800" dirty="0"/>
+          </a:p>
+        </p:txBody>
+      </p:sp>
+      <p:sp>
+        <p:nvSpPr>
+          <p:cNvPr id="4" name="Text 2"/>
+          <p:cNvSpPr/>
+          <p:nvPr/>
+        </p:nvSpPr>
+        <p:spPr>
+          <a:xfrm>
+            <a:off x="634901" y="883593"/>
+            <a:ext cx="8102798" cy="487561"/>
+          </a:xfrm>
+          <a:prstGeom prst="rect">
+            <a:avLst/>
+          </a:prstGeom>
+          <a:noFill/>
+          <a:ln/>
+        </p:spPr>
+        <p:txBody>
+          <a:bodyPr wrap="square" lIns="0" tIns="0" rIns="0" bIns="0" rtlCol="0" anchor="t"/>
+          <a:lstStyle/>
+          <a:p>
+            <a:pPr algn="l" marL="342900" indent="-342900">
+              <a:lnSpc>
+                <a:spcPts val="1620"/>
+              </a:lnSpc>
+              <a:spcAft>
+                <a:spcPts val="300"/>
+              </a:spcAft>
+              <a:buSzPct val="100000"/>
+              <a:buChar char="•"/>
+            </a:pPr>
+            <a:r>
+              <a:rPr lang="en-US" sz="1200" dirty="0">
+                <a:solidFill>
+                  <a:srgbClr val="1C2833"/>
+                </a:solidFill>
+                <a:latin typeface="Arial" pitchFamily="34" charset="0"/>
+                <a:ea typeface="Arial" pitchFamily="34" charset="-122"/>
+                <a:cs typeface="Arial" pitchFamily="34" charset="-120"/>
+              </a:rPr>
+              <a:t>General references for each calendar — use any standard encyclopaedic source (e.g. </a:t>
+            </a:r>
+            <a:pPr algn="l" indent="0" marL="0">
+              <a:lnSpc>
+                <a:spcPts val="1620"/>
+              </a:lnSpc>
+              <a:spcAft>
+                <a:spcPts val="300"/>
+              </a:spcAft>
+              <a:buNone/>
+            </a:pPr>
+            <a:r>
+              <a:rPr lang="en-US" sz="1200" i="1" dirty="0">
+                <a:solidFill>
+                  <a:srgbClr val="1C2833"/>
+                </a:solidFill>
+                <a:latin typeface="Arial" pitchFamily="34" charset="0"/>
+                <a:ea typeface="Arial" pitchFamily="34" charset="-122"/>
+                <a:cs typeface="Arial" pitchFamily="34" charset="-120"/>
+              </a:rPr>
               <a:t>Encyclopaedia Britannica</a:t>
             </a:r>
             <a:pPr algn="l" indent="0" marL="0">
               <a:lnSpc>
-                <a:spcPts val="1680"/>
-              </a:lnSpc>
-              <a:spcBef>
-                <a:spcPts val="300"/>
-              </a:spcBef>
+                <a:spcPts val="1620"/>
+              </a:lnSpc>
               <a:spcAft>
                 <a:spcPts val="300"/>
               </a:spcAft>
@@ -2414,7 +6218,7 @@
                 <a:ea typeface="Georgia" pitchFamily="34" charset="-122"/>
                 <a:cs typeface="Georgia" pitchFamily="34" charset="-120"/>
               </a:rPr>
-              <a:t>Materials</a:t>
+              <a:t>Learning objective</a:t>
             </a:r>
             <a:endParaRPr lang="en-US" sz="1800" dirty="0"/>
           </a:p>
@@ -2429,7 +6233,7 @@
         <p:spPr>
           <a:xfrm>
             <a:off x="406301" y="870942"/>
-            <a:ext cx="8498026" cy="213271"/>
+            <a:ext cx="8498026" cy="426541"/>
           </a:xfrm>
           <a:prstGeom prst="rect">
             <a:avLst/>
@@ -2462,7 +6266,7 @@
                 <a:ea typeface="Arial" pitchFamily="34" charset="-122"/>
                 <a:cs typeface="Arial" pitchFamily="34" charset="-120"/>
               </a:rPr>
-              <a:t>– Board with a comparison table ready – Project supplies (continued from Day 8) – Notebooks</a:t>
+              <a:t>Students will compare the Indian lunisolar calendar with three other lunar/lunisolar calendars (Islamic Hijri, Chinese, Hebrew) — identifying what is shared (lunar month basis) and what differs (intercalation rules).</a:t>
             </a:r>
             <a:endParaRPr lang="en-US" sz="1200" dirty="0"/>
           </a:p>
@@ -2620,7 +6424,7 @@
                 <a:ea typeface="Georgia" pitchFamily="34" charset="-122"/>
                 <a:cs typeface="Georgia" pitchFamily="34" charset="-120"/>
               </a:rPr>
-              <a:t>Lesson flow</a:t>
+              <a:t>Materials</a:t>
             </a:r>
             <a:endParaRPr lang="en-US" sz="1800" dirty="0"/>
           </a:p>
@@ -2629,6 +6433,100 @@
       <p:sp>
         <p:nvSpPr>
           <p:cNvPr id="4" name="Text 2"/>
+          <p:cNvSpPr/>
+          <p:nvPr/>
+        </p:nvSpPr>
+        <p:spPr>
+          <a:xfrm>
+            <a:off x="634901" y="883593"/>
+            <a:ext cx="8102798" cy="769441"/>
+          </a:xfrm>
+          <a:prstGeom prst="rect">
+            <a:avLst/>
+          </a:prstGeom>
+          <a:noFill/>
+          <a:ln/>
+        </p:spPr>
+        <p:txBody>
+          <a:bodyPr wrap="square" lIns="0" tIns="0" rIns="0" bIns="0" rtlCol="0" anchor="t"/>
+          <a:lstStyle/>
+          <a:p>
+            <a:pPr algn="l" marL="342900" indent="-342900">
+              <a:lnSpc>
+                <a:spcPts val="1620"/>
+              </a:lnSpc>
+              <a:spcAft>
+                <a:spcPts val="300"/>
+              </a:spcAft>
+              <a:buSzPct val="100000"/>
+              <a:buChar char="•"/>
+            </a:pPr>
+            <a:r>
+              <a:rPr lang="en-US" sz="1200" dirty="0">
+                <a:solidFill>
+                  <a:srgbClr val="1C2833"/>
+                </a:solidFill>
+                <a:latin typeface="Arial" pitchFamily="34" charset="0"/>
+                <a:ea typeface="Arial" pitchFamily="34" charset="-122"/>
+                <a:cs typeface="Arial" pitchFamily="34" charset="-120"/>
+              </a:rPr>
+              <a:t>Board with a comparison table ready</a:t>
+            </a:r>
+            <a:endParaRPr lang="en-US" sz="1200" dirty="0"/>
+          </a:p>
+          <a:p>
+            <a:pPr algn="l" marL="342900" indent="-342900">
+              <a:lnSpc>
+                <a:spcPts val="1620"/>
+              </a:lnSpc>
+              <a:spcAft>
+                <a:spcPts val="300"/>
+              </a:spcAft>
+              <a:buSzPct val="100000"/>
+              <a:buChar char="•"/>
+            </a:pPr>
+            <a:r>
+              <a:rPr lang="en-US" sz="1200" dirty="0">
+                <a:solidFill>
+                  <a:srgbClr val="1C2833"/>
+                </a:solidFill>
+                <a:latin typeface="Arial" pitchFamily="34" charset="0"/>
+                <a:ea typeface="Arial" pitchFamily="34" charset="-122"/>
+                <a:cs typeface="Arial" pitchFamily="34" charset="-120"/>
+              </a:rPr>
+              <a:t>Project supplies (continued from Day 8)</a:t>
+            </a:r>
+            <a:endParaRPr lang="en-US" sz="1200" dirty="0"/>
+          </a:p>
+          <a:p>
+            <a:pPr algn="l" marL="342900" indent="-342900">
+              <a:lnSpc>
+                <a:spcPts val="1620"/>
+              </a:lnSpc>
+              <a:spcAft>
+                <a:spcPts val="300"/>
+              </a:spcAft>
+              <a:buSzPct val="100000"/>
+              <a:buChar char="•"/>
+            </a:pPr>
+            <a:r>
+              <a:rPr lang="en-US" sz="1200" dirty="0">
+                <a:solidFill>
+                  <a:srgbClr val="1C2833"/>
+                </a:solidFill>
+                <a:latin typeface="Arial" pitchFamily="34" charset="0"/>
+                <a:ea typeface="Arial" pitchFamily="34" charset="-122"/>
+                <a:cs typeface="Arial" pitchFamily="34" charset="-120"/>
+              </a:rPr>
+              <a:t>Notebooks</a:t>
+            </a:r>
+            <a:endParaRPr lang="en-US" sz="1200" dirty="0"/>
+          </a:p>
+        </p:txBody>
+      </p:sp>
+      <p:sp>
+        <p:nvSpPr>
+          <p:cNvPr id="5" name="Text 3"/>
           <p:cNvSpPr/>
           <p:nvPr/>
         </p:nvSpPr>
@@ -2778,7 +6676,7 @@
                 <a:ea typeface="Georgia" pitchFamily="34" charset="-122"/>
                 <a:cs typeface="Georgia" pitchFamily="34" charset="-120"/>
               </a:rPr>
-              <a:t>Warm-up (5 min)</a:t>
+              <a:t>Lesson flow</a:t>
             </a:r>
             <a:endParaRPr lang="en-US" sz="1800" dirty="0"/>
           </a:p>
@@ -2787,146 +6685,6 @@
       <p:sp>
         <p:nvSpPr>
           <p:cNvPr id="4" name="Text 2"/>
-          <p:cNvSpPr/>
-          <p:nvPr/>
-        </p:nvSpPr>
-        <p:spPr>
-          <a:xfrm>
-            <a:off x="406301" y="870942"/>
-            <a:ext cx="8498026" cy="213271"/>
-          </a:xfrm>
-          <a:prstGeom prst="rect">
-            <a:avLst/>
-          </a:prstGeom>
-          <a:noFill/>
-          <a:ln/>
-        </p:spPr>
-        <p:txBody>
-          <a:bodyPr wrap="square" lIns="0" tIns="0" rIns="0" bIns="0" rtlCol="0" anchor="t"/>
-          <a:lstStyle/>
-          <a:p>
-            <a:pPr algn="l" indent="0" marL="0">
-              <a:lnSpc>
-                <a:spcPts val="1680"/>
-              </a:lnSpc>
-              <a:spcBef>
-                <a:spcPts val="300"/>
-              </a:spcBef>
-              <a:spcAft>
-                <a:spcPts val="300"/>
-              </a:spcAft>
-              <a:buNone/>
-            </a:pPr>
-            <a:r>
-              <a:rPr lang="en-US" sz="1200" dirty="0">
-                <a:solidFill>
-                  <a:srgbClr val="1C2833"/>
-                </a:solidFill>
-                <a:latin typeface="Arial" pitchFamily="34" charset="0"/>
-                <a:ea typeface="Arial" pitchFamily="34" charset="-122"/>
-                <a:cs typeface="Arial" pitchFamily="34" charset="-120"/>
-              </a:rPr>
-              <a:t>– Daily prompt: </a:t>
-            </a:r>
-            <a:pPr algn="l" indent="0" marL="0">
-              <a:lnSpc>
-                <a:spcPts val="1680"/>
-              </a:lnSpc>
-              <a:spcBef>
-                <a:spcPts val="300"/>
-              </a:spcBef>
-              <a:spcAft>
-                <a:spcPts val="300"/>
-              </a:spcAft>
-              <a:buNone/>
-            </a:pPr>
-            <a:r>
-              <a:rPr lang="en-US" sz="1200" i="1" dirty="0">
-                <a:solidFill>
-                  <a:srgbClr val="1C2833"/>
-                </a:solidFill>
-                <a:latin typeface="Arial" pitchFamily="34" charset="0"/>
-                <a:ea typeface="Arial" pitchFamily="34" charset="-122"/>
-                <a:cs typeface="Arial" pitchFamily="34" charset="-120"/>
-              </a:rPr>
-              <a:t>"Did you see the Moon last night? What tithi?"</a:t>
-            </a:r>
-            <a:pPr algn="l" indent="0" marL="0">
-              <a:lnSpc>
-                <a:spcPts val="1680"/>
-              </a:lnSpc>
-              <a:spcBef>
-                <a:spcPts val="300"/>
-              </a:spcBef>
-              <a:spcAft>
-                <a:spcPts val="300"/>
-              </a:spcAft>
-              <a:buNone/>
-            </a:pPr>
-            <a:r>
-              <a:rPr lang="en-US" sz="1200" dirty="0">
-                <a:solidFill>
-                  <a:srgbClr val="1C2833"/>
-                </a:solidFill>
-                <a:latin typeface="Arial" pitchFamily="34" charset="0"/>
-                <a:ea typeface="Arial" pitchFamily="34" charset="-122"/>
-                <a:cs typeface="Arial" pitchFamily="34" charset="-120"/>
-              </a:rPr>
-              <a:t> — 2 students share.</a:t>
-            </a:r>
-            <a:endParaRPr lang="en-US" sz="1200" dirty="0"/>
-          </a:p>
-        </p:txBody>
-      </p:sp>
-      <p:sp>
-        <p:nvSpPr>
-          <p:cNvPr id="5" name="Text 3"/>
-          <p:cNvSpPr/>
-          <p:nvPr/>
-        </p:nvSpPr>
-        <p:spPr>
-          <a:xfrm>
-            <a:off x="634901" y="1173063"/>
-            <a:ext cx="8102798" cy="487561"/>
-          </a:xfrm>
-          <a:prstGeom prst="rect">
-            <a:avLst/>
-          </a:prstGeom>
-          <a:noFill/>
-          <a:ln/>
-        </p:spPr>
-        <p:txBody>
-          <a:bodyPr wrap="square" lIns="0" tIns="0" rIns="0" bIns="0" rtlCol="0" anchor="t"/>
-          <a:lstStyle/>
-          <a:p>
-            <a:pPr algn="l" marL="342900" indent="-342900">
-              <a:lnSpc>
-                <a:spcPts val="1620"/>
-              </a:lnSpc>
-              <a:spcAft>
-                <a:spcPts val="300"/>
-              </a:spcAft>
-              <a:buSzPct val="100000"/>
-              <a:buChar char="•"/>
-            </a:pPr>
-            <a:r>
-              <a:rPr lang="en-US" sz="1200" i="1" dirty="0">
-                <a:solidFill>
-                  <a:srgbClr val="1C2833"/>
-                </a:solidFill>
-                <a:latin typeface="Arial" pitchFamily="34" charset="0"/>
-                <a:ea typeface="Arial" pitchFamily="34" charset="-122"/>
-                <a:cs typeface="Arial" pitchFamily="34" charset="-120"/>
-              </a:rPr>
-              <a:t>"Many cultures, looking at the same Moon, built different calendars. Today: a 15-minute compare-and-contrast, then back to project build."</a:t>
-            </a:r>
-            <a:endParaRPr lang="en-US" sz="1200" dirty="0"/>
-          </a:p>
-        </p:txBody>
-      </p:sp>
-      <p:sp>
-        <p:nvSpPr>
-          <p:cNvPr id="6" name="Text 4"/>
           <p:cNvSpPr/>
           <p:nvPr/>
         </p:nvSpPr>
@@ -3076,7 +6834,7 @@
                 <a:ea typeface="Georgia" pitchFamily="34" charset="-122"/>
                 <a:cs typeface="Georgia" pitchFamily="34" charset="-120"/>
               </a:rPr>
-              <a:t>Activity (25 min) — Project build</a:t>
+              <a:t>Warm-up (5 min)</a:t>
             </a:r>
             <a:endParaRPr lang="en-US" sz="1800" dirty="0"/>
           </a:p>
@@ -3090,8 +6848,8 @@
         </p:nvSpPr>
         <p:spPr>
           <a:xfrm>
-            <a:off x="406301" y="870942"/>
-            <a:ext cx="8498026" cy="213271"/>
+            <a:off x="634901" y="883593"/>
+            <a:ext cx="8102798" cy="731341"/>
           </a:xfrm>
           <a:prstGeom prst="rect">
             <a:avLst/>
@@ -3103,54 +6861,6 @@
           <a:bodyPr wrap="square" lIns="0" tIns="0" rIns="0" bIns="0" rtlCol="0" anchor="t"/>
           <a:lstStyle/>
           <a:p>
-            <a:pPr algn="l" indent="0" marL="0">
-              <a:lnSpc>
-                <a:spcPts val="1680"/>
-              </a:lnSpc>
-              <a:spcBef>
-                <a:spcPts val="300"/>
-              </a:spcBef>
-              <a:spcAft>
-                <a:spcPts val="300"/>
-              </a:spcAft>
-              <a:buNone/>
-            </a:pPr>
-            <a:r>
-              <a:rPr lang="en-US" sz="1200" dirty="0">
-                <a:solidFill>
-                  <a:srgbClr val="1C2833"/>
-                </a:solidFill>
-                <a:latin typeface="Arial" pitchFamily="34" charset="0"/>
-                <a:ea typeface="Arial" pitchFamily="34" charset="-122"/>
-                <a:cs typeface="Arial" pitchFamily="34" charset="-120"/>
-              </a:rPr>
-              <a:t>Pairs continue their projects from Day 8. The teacher rotates with two priorities:</a:t>
-            </a:r>
-            <a:endParaRPr lang="en-US" sz="1200" dirty="0"/>
-          </a:p>
-        </p:txBody>
-      </p:sp>
-      <p:sp>
-        <p:nvSpPr>
-          <p:cNvPr id="5" name="Text 3"/>
-          <p:cNvSpPr/>
-          <p:nvPr/>
-        </p:nvSpPr>
-        <p:spPr>
-          <a:xfrm>
-            <a:off x="634901" y="1173063"/>
-            <a:ext cx="8102798" cy="731341"/>
-          </a:xfrm>
-          <a:prstGeom prst="rect">
-            <a:avLst/>
-          </a:prstGeom>
-          <a:noFill/>
-          <a:ln/>
-        </p:spPr>
-        <p:txBody>
-          <a:bodyPr wrap="square" lIns="0" tIns="0" rIns="0" bIns="0" rtlCol="0" anchor="t"/>
-          <a:lstStyle/>
-          <a:p>
             <a:pPr algn="l" marL="342900" indent="-342900">
               <a:lnSpc>
                 <a:spcPts val="1620"/>
@@ -3162,26 +6872,6 @@
               <a:buChar char="•"/>
             </a:pPr>
             <a:r>
-              <a:rPr lang="en-US" sz="1200" b="1" dirty="0">
-                <a:solidFill>
-                  <a:srgbClr val="1C2833"/>
-                </a:solidFill>
-                <a:latin typeface="Arial" pitchFamily="34" charset="0"/>
-                <a:ea typeface="Arial" pitchFamily="34" charset="-122"/>
-                <a:cs typeface="Arial" pitchFamily="34" charset="-120"/>
-              </a:rPr>
-              <a:t>Source check.</a:t>
-            </a:r>
-            <a:pPr algn="l" indent="0" marL="0">
-              <a:lnSpc>
-                <a:spcPts val="1620"/>
-              </a:lnSpc>
-              <a:spcAft>
-                <a:spcPts val="300"/>
-              </a:spcAft>
-              <a:buNone/>
-            </a:pPr>
-            <a:r>
               <a:rPr lang="en-US" sz="1200" dirty="0">
                 <a:solidFill>
                   <a:srgbClr val="1C2833"/>
@@ -3190,7 +6880,47 @@
                 <a:ea typeface="Arial" pitchFamily="34" charset="-122"/>
                 <a:cs typeface="Arial" pitchFamily="34" charset="-120"/>
               </a:rPr>
-              <a:t> Every project has a real, named citation by end of class today. No invented references.</a:t>
+              <a:t>Daily prompt: </a:t>
+            </a:r>
+            <a:pPr algn="l" indent="0" marL="0">
+              <a:lnSpc>
+                <a:spcPts val="1620"/>
+              </a:lnSpc>
+              <a:spcAft>
+                <a:spcPts val="300"/>
+              </a:spcAft>
+              <a:buNone/>
+            </a:pPr>
+            <a:r>
+              <a:rPr lang="en-US" sz="1200" i="1" dirty="0">
+                <a:solidFill>
+                  <a:srgbClr val="1C2833"/>
+                </a:solidFill>
+                <a:latin typeface="Arial" pitchFamily="34" charset="0"/>
+                <a:ea typeface="Arial" pitchFamily="34" charset="-122"/>
+                <a:cs typeface="Arial" pitchFamily="34" charset="-120"/>
+              </a:rPr>
+              <a:t>"Did you see the Moon last night? What tithi?"</a:t>
+            </a:r>
+            <a:pPr algn="l" indent="0" marL="0">
+              <a:lnSpc>
+                <a:spcPts val="1620"/>
+              </a:lnSpc>
+              <a:spcAft>
+                <a:spcPts val="300"/>
+              </a:spcAft>
+              <a:buNone/>
+            </a:pPr>
+            <a:r>
+              <a:rPr lang="en-US" sz="1200" dirty="0">
+                <a:solidFill>
+                  <a:srgbClr val="1C2833"/>
+                </a:solidFill>
+                <a:latin typeface="Arial" pitchFamily="34" charset="0"/>
+                <a:ea typeface="Arial" pitchFamily="34" charset="-122"/>
+                <a:cs typeface="Arial" pitchFamily="34" charset="-120"/>
+              </a:rPr>
+              <a:t> — 2 students share.</a:t>
             </a:r>
             <a:endParaRPr lang="en-US" sz="1200" dirty="0"/>
           </a:p>
@@ -3206,46 +6936,6 @@
               <a:buChar char="•"/>
             </a:pPr>
             <a:r>
-              <a:rPr lang="en-US" sz="1200" b="1" dirty="0">
-                <a:solidFill>
-                  <a:srgbClr val="1C2833"/>
-                </a:solidFill>
-                <a:latin typeface="Arial" pitchFamily="34" charset="0"/>
-                <a:ea typeface="Arial" pitchFamily="34" charset="-122"/>
-                <a:cs typeface="Arial" pitchFamily="34" charset="-120"/>
-              </a:rPr>
-              <a:t>3-minute script check.</a:t>
-            </a:r>
-            <a:pPr algn="l" indent="0" marL="0">
-              <a:lnSpc>
-                <a:spcPts val="1620"/>
-              </a:lnSpc>
-              <a:spcAft>
-                <a:spcPts val="300"/>
-              </a:spcAft>
-              <a:buNone/>
-            </a:pPr>
-            <a:r>
-              <a:rPr lang="en-US" sz="1200" dirty="0">
-                <a:solidFill>
-                  <a:srgbClr val="1C2833"/>
-                </a:solidFill>
-                <a:latin typeface="Arial" pitchFamily="34" charset="0"/>
-                <a:ea typeface="Arial" pitchFamily="34" charset="-122"/>
-                <a:cs typeface="Arial" pitchFamily="34" charset="-120"/>
-              </a:rPr>
-              <a:t> Every pair has written or rehearsed a 3-minute presentation script. The artefact alone is not the project; the </a:t>
-            </a:r>
-            <a:pPr algn="l" indent="0" marL="0">
-              <a:lnSpc>
-                <a:spcPts val="1620"/>
-              </a:lnSpc>
-              <a:spcAft>
-                <a:spcPts val="300"/>
-              </a:spcAft>
-              <a:buNone/>
-            </a:pPr>
-            <a:r>
               <a:rPr lang="en-US" sz="1200" i="1" dirty="0">
                 <a:solidFill>
                   <a:srgbClr val="1C2833"/>
@@ -3254,27 +6944,7 @@
                 <a:ea typeface="Arial" pitchFamily="34" charset="-122"/>
                 <a:cs typeface="Arial" pitchFamily="34" charset="-120"/>
               </a:rPr>
-              <a:t>explanation</a:t>
-            </a:r>
-            <a:pPr algn="l" indent="0" marL="0">
-              <a:lnSpc>
-                <a:spcPts val="1620"/>
-              </a:lnSpc>
-              <a:spcAft>
-                <a:spcPts val="300"/>
-              </a:spcAft>
-              <a:buNone/>
-            </a:pPr>
-            <a:r>
-              <a:rPr lang="en-US" sz="1200" dirty="0">
-                <a:solidFill>
-                  <a:srgbClr val="1C2833"/>
-                </a:solidFill>
-                <a:latin typeface="Arial" pitchFamily="34" charset="0"/>
-                <a:ea typeface="Arial" pitchFamily="34" charset="-122"/>
-                <a:cs typeface="Arial" pitchFamily="34" charset="-120"/>
-              </a:rPr>
-              <a:t> is.</a:t>
+              <a:t>"Many cultures, looking at the same Moon, built different calendars. Today: a 15-minute compare-and-contrast, then back to project build."</a:t>
             </a:r>
             <a:endParaRPr lang="en-US" sz="1200" dirty="0"/>
           </a:p>
@@ -3282,55 +6952,7 @@
       </p:sp>
       <p:sp>
         <p:nvSpPr>
-          <p:cNvPr id="6" name="Text 4"/>
-          <p:cNvSpPr/>
-          <p:nvPr/>
-        </p:nvSpPr>
-        <p:spPr>
-          <a:xfrm>
-            <a:off x="406301" y="1993255"/>
-            <a:ext cx="8498026" cy="426541"/>
-          </a:xfrm>
-          <a:prstGeom prst="rect">
-            <a:avLst/>
-          </a:prstGeom>
-          <a:noFill/>
-          <a:ln/>
-        </p:spPr>
-        <p:txBody>
-          <a:bodyPr wrap="square" lIns="0" tIns="0" rIns="0" bIns="0" rtlCol="0" anchor="t"/>
-          <a:lstStyle/>
-          <a:p>
-            <a:pPr algn="l" indent="0" marL="0">
-              <a:lnSpc>
-                <a:spcPts val="1680"/>
-              </a:lnSpc>
-              <a:spcBef>
-                <a:spcPts val="300"/>
-              </a:spcBef>
-              <a:spcAft>
-                <a:spcPts val="300"/>
-              </a:spcAft>
-              <a:buNone/>
-            </a:pPr>
-            <a:r>
-              <a:rPr lang="en-US" sz="1200" dirty="0">
-                <a:solidFill>
-                  <a:srgbClr val="1C2833"/>
-                </a:solidFill>
-                <a:latin typeface="Arial" pitchFamily="34" charset="0"/>
-                <a:ea typeface="Arial" pitchFamily="34" charset="-122"/>
-                <a:cs typeface="Arial" pitchFamily="34" charset="-120"/>
-              </a:rPr>
-              <a:t>Pairs whose project relates to cross-cultural lunar calendars can use the Day 9 content directly. Others are encouraged to add a one-sentence cross-cultural note ("this Indian system, like the Chinese and Hebrew, is lunisolar...").</a:t>
-            </a:r>
-            <a:endParaRPr lang="en-US" sz="1200" dirty="0"/>
-          </a:p>
-        </p:txBody>
-      </p:sp>
-      <p:sp>
-        <p:nvSpPr>
-          <p:cNvPr id="7" name="Text 5"/>
+          <p:cNvPr id="5" name="Text 3"/>
           <p:cNvSpPr/>
           <p:nvPr/>
         </p:nvSpPr>
@@ -3480,7 +7102,7 @@
                 <a:ea typeface="Georgia" pitchFamily="34" charset="-122"/>
                 <a:cs typeface="Georgia" pitchFamily="34" charset="-120"/>
               </a:rPr>
-              <a:t>Wrap-up (5 min)</a:t>
+              <a:t>Core content (15 min)</a:t>
             </a:r>
             <a:endParaRPr lang="en-US" sz="1800" dirty="0"/>
           </a:p>
@@ -3494,8 +7116,8 @@
         </p:nvSpPr>
         <p:spPr>
           <a:xfrm>
-            <a:off x="406301" y="870942"/>
-            <a:ext cx="8498026" cy="426541"/>
+            <a:off x="634901" y="883593"/>
+            <a:ext cx="8102798" cy="487561"/>
           </a:xfrm>
           <a:prstGeom prst="rect">
             <a:avLst/>
@@ -3507,13 +7129,31 @@
           <a:bodyPr wrap="square" lIns="0" tIns="0" rIns="0" bIns="0" rtlCol="0" anchor="t"/>
           <a:lstStyle/>
           <a:p>
-            <a:pPr algn="l" indent="0" marL="0">
-              <a:lnSpc>
-                <a:spcPts val="1680"/>
-              </a:lnSpc>
-              <a:spcBef>
-                <a:spcPts val="300"/>
-              </a:spcBef>
+            <a:pPr algn="l" marL="342900" indent="-342900">
+              <a:lnSpc>
+                <a:spcPts val="1620"/>
+              </a:lnSpc>
+              <a:spcAft>
+                <a:spcPts val="300"/>
+              </a:spcAft>
+              <a:buSzPct val="100000"/>
+              <a:buChar char="•"/>
+            </a:pPr>
+            <a:r>
+              <a:rPr lang="en-US" sz="1200" b="1" dirty="0">
+                <a:solidFill>
+                  <a:srgbClr val="1C2833"/>
+                </a:solidFill>
+                <a:latin typeface="Arial" pitchFamily="34" charset="0"/>
+                <a:ea typeface="Arial" pitchFamily="34" charset="-122"/>
+                <a:cs typeface="Arial" pitchFamily="34" charset="-120"/>
+              </a:rPr>
+              <a:t>The common starting point.</a:t>
+            </a:r>
+            <a:pPr algn="l" indent="0" marL="0">
+              <a:lnSpc>
+                <a:spcPts val="1620"/>
+              </a:lnSpc>
               <a:spcAft>
                 <a:spcPts val="300"/>
               </a:spcAft>
@@ -3528,15 +7168,12 @@
                 <a:ea typeface="Arial" pitchFamily="34" charset="-122"/>
                 <a:cs typeface="Arial" pitchFamily="34" charset="-120"/>
               </a:rPr>
-              <a:t>– All pairs submit a near-final draft (photo / file). – One sentence from each pair on the board: </a:t>
-            </a:r>
-            <a:pPr algn="l" indent="0" marL="0">
-              <a:lnSpc>
-                <a:spcPts val="1680"/>
-              </a:lnSpc>
-              <a:spcBef>
-                <a:spcPts val="300"/>
-              </a:spcBef>
+              <a:t> Every culture observing the Moon notices the ~29.5-day cycle. The question every culture answers: </a:t>
+            </a:r>
+            <a:pPr algn="l" indent="0" marL="0">
+              <a:lnSpc>
+                <a:spcPts val="1620"/>
+              </a:lnSpc>
               <a:spcAft>
                 <a:spcPts val="300"/>
               </a:spcAft>
@@ -3551,7 +7188,7 @@
                 <a:ea typeface="Arial" pitchFamily="34" charset="-122"/>
                 <a:cs typeface="Arial" pitchFamily="34" charset="-120"/>
               </a:rPr>
-              <a:t>"Our project covers ___ and our source is ___."</a:t>
+              <a:t>how do we fit 29.5-day lunar months into a 365.24-day solar year?</a:t>
             </a:r>
             <a:endParaRPr lang="en-US" sz="1200" dirty="0"/>
           </a:p>
@@ -3565,8 +7202,8 @@
         </p:nvSpPr>
         <p:spPr>
           <a:xfrm>
-            <a:off x="634901" y="1386334"/>
-            <a:ext cx="8102798" cy="281880"/>
+            <a:off x="406301" y="1460004"/>
+            <a:ext cx="8498026" cy="213271"/>
           </a:xfrm>
           <a:prstGeom prst="rect">
             <a:avLst/>
@@ -3578,31 +7215,13 @@
           <a:bodyPr wrap="square" lIns="0" tIns="0" rIns="0" bIns="0" rtlCol="0" anchor="t"/>
           <a:lstStyle/>
           <a:p>
-            <a:pPr algn="l" marL="342900" indent="-342900">
-              <a:lnSpc>
-                <a:spcPts val="1620"/>
-              </a:lnSpc>
-              <a:spcAft>
-                <a:spcPts val="300"/>
-              </a:spcAft>
-              <a:buSzPct val="100000"/>
-              <a:buChar char="•"/>
-            </a:pPr>
-            <a:r>
-              <a:rPr lang="en-US" sz="1200" b="1" dirty="0">
-                <a:solidFill>
-                  <a:srgbClr val="1C2833"/>
-                </a:solidFill>
-                <a:latin typeface="Arial" pitchFamily="34" charset="0"/>
-                <a:ea typeface="Arial" pitchFamily="34" charset="-122"/>
-                <a:cs typeface="Arial" pitchFamily="34" charset="-120"/>
-              </a:rPr>
-              <a:t>Tomorrow:</a:t>
-            </a:r>
-            <a:pPr algn="l" indent="0" marL="0">
-              <a:lnSpc>
-                <a:spcPts val="1620"/>
-              </a:lnSpc>
+            <a:pPr algn="l" indent="0" marL="0">
+              <a:lnSpc>
+                <a:spcPts val="1680"/>
+              </a:lnSpc>
+              <a:spcBef>
+                <a:spcPts val="300"/>
+              </a:spcBef>
               <a:spcAft>
                 <a:spcPts val="300"/>
               </a:spcAft>
@@ -3617,7 +7236,7 @@
                 <a:ea typeface="Arial" pitchFamily="34" charset="-122"/>
                 <a:cs typeface="Arial" pitchFamily="34" charset="-120"/>
               </a:rPr>
-              <a:t> Day 10. 3-minute presentations. Summative quiz.</a:t>
+              <a:t>The three resolutions:</a:t>
             </a:r>
             <a:endParaRPr lang="en-US" sz="1200" dirty="0"/>
           </a:p>
@@ -3775,7 +7394,7 @@
                 <a:ea typeface="Georgia" pitchFamily="34" charset="-122"/>
                 <a:cs typeface="Georgia" pitchFamily="34" charset="-120"/>
               </a:rPr>
-              <a:t>Homework</a:t>
+              <a:t>Core content (15 min) (cont.)</a:t>
             </a:r>
             <a:endParaRPr lang="en-US" sz="1800" dirty="0"/>
           </a:p>
@@ -3789,8 +7408,8 @@
         </p:nvSpPr>
         <p:spPr>
           <a:xfrm>
-            <a:off x="406301" y="870942"/>
-            <a:ext cx="8498026" cy="213271"/>
+            <a:off x="634901" y="883593"/>
+            <a:ext cx="8102798" cy="769441"/>
           </a:xfrm>
           <a:prstGeom prst="rect">
             <a:avLst/>
@@ -3802,13 +7421,31 @@
           <a:bodyPr wrap="square" lIns="0" tIns="0" rIns="0" bIns="0" rtlCol="0" anchor="t"/>
           <a:lstStyle/>
           <a:p>
-            <a:pPr algn="l" indent="0" marL="0">
-              <a:lnSpc>
-                <a:spcPts val="1680"/>
-              </a:lnSpc>
-              <a:spcBef>
-                <a:spcPts val="300"/>
-              </a:spcBef>
+            <a:pPr algn="l" marL="342900" indent="-342900">
+              <a:lnSpc>
+                <a:spcPts val="1620"/>
+              </a:lnSpc>
+              <a:spcAft>
+                <a:spcPts val="300"/>
+              </a:spcAft>
+              <a:buSzPct val="100000"/>
+              <a:buChar char="•"/>
+            </a:pPr>
+            <a:r>
+              <a:rPr lang="en-US" sz="1200" b="1" dirty="0">
+                <a:solidFill>
+                  <a:srgbClr val="1C2833"/>
+                </a:solidFill>
+                <a:latin typeface="Arial" pitchFamily="34" charset="0"/>
+                <a:ea typeface="Arial" pitchFamily="34" charset="-122"/>
+                <a:cs typeface="Arial" pitchFamily="34" charset="-120"/>
+              </a:rPr>
+              <a:t>Ignore the solar year.</a:t>
+            </a:r>
+            <a:pPr algn="l" indent="0" marL="0">
+              <a:lnSpc>
+                <a:spcPts val="1620"/>
+              </a:lnSpc>
               <a:spcAft>
                 <a:spcPts val="300"/>
               </a:spcAft>
@@ -3823,15 +7460,169 @@
                 <a:ea typeface="Arial" pitchFamily="34" charset="-122"/>
                 <a:cs typeface="Arial" pitchFamily="34" charset="-120"/>
               </a:rPr>
-              <a:t>– Continue the Moon diary (one night left). – Final touches on your project. Bring everything to class tomorrow.</a:t>
+              <a:t> Use only lunar months. The months drift through the seasons. (Islamic / Hijri)</a:t>
             </a:r>
             <a:endParaRPr lang="en-US" sz="1200" dirty="0"/>
           </a:p>
+          <a:p>
+            <a:pPr algn="l" marL="342900" indent="-342900">
+              <a:lnSpc>
+                <a:spcPts val="1620"/>
+              </a:lnSpc>
+              <a:spcAft>
+                <a:spcPts val="300"/>
+              </a:spcAft>
+              <a:buSzPct val="100000"/>
+              <a:buChar char="•"/>
+            </a:pPr>
+            <a:r>
+              <a:rPr lang="en-US" sz="1200" b="1" dirty="0">
+                <a:solidFill>
+                  <a:srgbClr val="1C2833"/>
+                </a:solidFill>
+                <a:latin typeface="Arial" pitchFamily="34" charset="0"/>
+                <a:ea typeface="Arial" pitchFamily="34" charset="-122"/>
+                <a:cs typeface="Arial" pitchFamily="34" charset="-120"/>
+              </a:rPr>
+              <a:t>Re-align periodically with an extra month.</a:t>
+            </a:r>
+            <a:pPr algn="l" indent="0" marL="0">
+              <a:lnSpc>
+                <a:spcPts val="1620"/>
+              </a:lnSpc>
+              <a:spcAft>
+                <a:spcPts val="300"/>
+              </a:spcAft>
+              <a:buNone/>
+            </a:pPr>
+            <a:r>
+              <a:rPr lang="en-US" sz="1200" dirty="0">
+                <a:solidFill>
+                  <a:srgbClr val="1C2833"/>
+                </a:solidFill>
+                <a:latin typeface="Arial" pitchFamily="34" charset="0"/>
+                <a:ea typeface="Arial" pitchFamily="34" charset="-122"/>
+                <a:cs typeface="Arial" pitchFamily="34" charset="-120"/>
+              </a:rPr>
+              <a:t> Lunisolar. (Indian, Chinese, Hebrew)</a:t>
+            </a:r>
+            <a:endParaRPr lang="en-US" sz="1200" dirty="0"/>
+          </a:p>
+          <a:p>
+            <a:pPr algn="l" marL="342900" indent="-342900">
+              <a:lnSpc>
+                <a:spcPts val="1620"/>
+              </a:lnSpc>
+              <a:spcAft>
+                <a:spcPts val="300"/>
+              </a:spcAft>
+              <a:buSzPct val="100000"/>
+              <a:buChar char="•"/>
+            </a:pPr>
+            <a:r>
+              <a:rPr lang="en-US" sz="1200" b="1" dirty="0">
+                <a:solidFill>
+                  <a:srgbClr val="1C2833"/>
+                </a:solidFill>
+                <a:latin typeface="Arial" pitchFamily="34" charset="0"/>
+                <a:ea typeface="Arial" pitchFamily="34" charset="-122"/>
+                <a:cs typeface="Arial" pitchFamily="34" charset="-120"/>
+              </a:rPr>
+              <a:t>Ignore the lunar month.</a:t>
+            </a:r>
+            <a:pPr algn="l" indent="0" marL="0">
+              <a:lnSpc>
+                <a:spcPts val="1620"/>
+              </a:lnSpc>
+              <a:spcAft>
+                <a:spcPts val="300"/>
+              </a:spcAft>
+              <a:buNone/>
+            </a:pPr>
+            <a:r>
+              <a:rPr lang="en-US" sz="1200" dirty="0">
+                <a:solidFill>
+                  <a:srgbClr val="1C2833"/>
+                </a:solidFill>
+                <a:latin typeface="Arial" pitchFamily="34" charset="0"/>
+                <a:ea typeface="Arial" pitchFamily="34" charset="-122"/>
+                <a:cs typeface="Arial" pitchFamily="34" charset="-120"/>
+              </a:rPr>
+              <a:t> Use only the solar year, fix months at 30–31 days. (Modern Gregorian)</a:t>
+            </a:r>
+            <a:endParaRPr lang="en-US" sz="1200" dirty="0"/>
+          </a:p>
         </p:txBody>
       </p:sp>
       <p:sp>
         <p:nvSpPr>
           <p:cNvPr id="5" name="Text 3"/>
+          <p:cNvSpPr/>
+          <p:nvPr/>
+        </p:nvSpPr>
+        <p:spPr>
+          <a:xfrm>
+            <a:off x="634901" y="1754535"/>
+            <a:ext cx="8102798" cy="281880"/>
+          </a:xfrm>
+          <a:prstGeom prst="rect">
+            <a:avLst/>
+          </a:prstGeom>
+          <a:noFill/>
+          <a:ln/>
+        </p:spPr>
+        <p:txBody>
+          <a:bodyPr wrap="square" lIns="0" tIns="0" rIns="0" bIns="0" rtlCol="0" anchor="t"/>
+          <a:lstStyle/>
+          <a:p>
+            <a:pPr algn="l" marL="342900" indent="-342900">
+              <a:lnSpc>
+                <a:spcPts val="1620"/>
+              </a:lnSpc>
+              <a:spcAft>
+                <a:spcPts val="300"/>
+              </a:spcAft>
+              <a:buSzPct val="100000"/>
+              <a:buChar char="•"/>
+            </a:pPr>
+            <a:r>
+              <a:rPr lang="en-US" sz="1200" b="1" dirty="0">
+                <a:solidFill>
+                  <a:srgbClr val="1C2833"/>
+                </a:solidFill>
+                <a:latin typeface="Arial" pitchFamily="34" charset="0"/>
+                <a:ea typeface="Arial" pitchFamily="34" charset="-122"/>
+                <a:cs typeface="Arial" pitchFamily="34" charset="-120"/>
+              </a:rPr>
+              <a:t>The four calendar table.</a:t>
+            </a:r>
+            <a:pPr algn="l" indent="0" marL="0">
+              <a:lnSpc>
+                <a:spcPts val="1620"/>
+              </a:lnSpc>
+              <a:spcAft>
+                <a:spcPts val="300"/>
+              </a:spcAft>
+              <a:buNone/>
+            </a:pPr>
+            <a:r>
+              <a:rPr lang="en-US" sz="1200" dirty="0">
+                <a:solidFill>
+                  <a:srgbClr val="1C2833"/>
+                </a:solidFill>
+                <a:latin typeface="Arial" pitchFamily="34" charset="0"/>
+                <a:ea typeface="Arial" pitchFamily="34" charset="-122"/>
+                <a:cs typeface="Arial" pitchFamily="34" charset="-120"/>
+              </a:rPr>
+              <a:t> Build on the board:</a:t>
+            </a:r>
+            <a:endParaRPr lang="en-US" sz="1200" dirty="0"/>
+          </a:p>
+        </p:txBody>
+      </p:sp>
+      <p:sp>
+        <p:nvSpPr>
+          <p:cNvPr id="6" name="Text 4"/>
           <p:cNvSpPr/>
           <p:nvPr/>
         </p:nvSpPr>
@@ -3981,7 +7772,7 @@
                 <a:ea typeface="Georgia" pitchFamily="34" charset="-122"/>
                 <a:cs typeface="Georgia" pitchFamily="34" charset="-120"/>
               </a:rPr>
-              <a:t>Differentiation</a:t>
+              <a:t>Core content (15 min) (cont.)</a:t>
             </a:r>
             <a:endParaRPr lang="en-US" sz="1800" dirty="0"/>
           </a:p>
@@ -3995,8 +7786,8 @@
         </p:nvSpPr>
         <p:spPr>
           <a:xfrm>
-            <a:off x="634901" y="883593"/>
-            <a:ext cx="8102798" cy="937022"/>
+            <a:off x="406301" y="870942"/>
+            <a:ext cx="8498026" cy="213271"/>
           </a:xfrm>
           <a:prstGeom prst="rect">
             <a:avLst/>
@@ -4008,90 +7799,28 @@
           <a:bodyPr wrap="square" lIns="0" tIns="0" rIns="0" bIns="0" rtlCol="0" anchor="t"/>
           <a:lstStyle/>
           <a:p>
-            <a:pPr algn="l" marL="342900" indent="-342900">
-              <a:lnSpc>
-                <a:spcPts val="1620"/>
-              </a:lnSpc>
-              <a:spcAft>
-                <a:spcPts val="300"/>
-              </a:spcAft>
-              <a:buSzPct val="100000"/>
-              <a:buChar char="•"/>
-            </a:pPr>
-            <a:r>
-              <a:rPr lang="en-US" sz="1200" b="1" dirty="0">
-                <a:solidFill>
-                  <a:srgbClr val="1C2833"/>
-                </a:solidFill>
-                <a:latin typeface="Arial" pitchFamily="34" charset="0"/>
-                <a:ea typeface="Arial" pitchFamily="34" charset="-122"/>
-                <a:cs typeface="Arial" pitchFamily="34" charset="-120"/>
-              </a:rPr>
-              <a:t>One tier up:</a:t>
-            </a:r>
-            <a:pPr algn="l" indent="0" marL="0">
-              <a:lnSpc>
-                <a:spcPts val="1620"/>
-              </a:lnSpc>
-              <a:spcAft>
-                <a:spcPts val="300"/>
-              </a:spcAft>
-              <a:buNone/>
-            </a:pPr>
-            <a:r>
-              <a:rPr lang="en-US" sz="1200" dirty="0">
-                <a:solidFill>
-                  <a:srgbClr val="1C2833"/>
-                </a:solidFill>
-                <a:latin typeface="Arial" pitchFamily="34" charset="0"/>
-                <a:ea typeface="Arial" pitchFamily="34" charset="-122"/>
-                <a:cs typeface="Arial" pitchFamily="34" charset="-120"/>
-              </a:rPr>
-              <a:t> Pick TWO calendars and write a paragraph: under what circumstances does each calendar's design choice make sense? (Pure lunar — when religious months not tied to season matter most; lunisolar — when agriculture matters; pure solar — when civil administration matters.)</a:t>
-            </a:r>
-            <a:endParaRPr lang="en-US" sz="1200" dirty="0"/>
-          </a:p>
-          <a:p>
-            <a:pPr algn="l" marL="342900" indent="-342900">
-              <a:lnSpc>
-                <a:spcPts val="1620"/>
-              </a:lnSpc>
-              <a:spcAft>
-                <a:spcPts val="300"/>
-              </a:spcAft>
-              <a:buSzPct val="100000"/>
-              <a:buChar char="•"/>
-            </a:pPr>
-            <a:r>
-              <a:rPr lang="en-US" sz="1200" b="1" dirty="0">
-                <a:solidFill>
-                  <a:srgbClr val="1C2833"/>
-                </a:solidFill>
-                <a:latin typeface="Arial" pitchFamily="34" charset="0"/>
-                <a:ea typeface="Arial" pitchFamily="34" charset="-122"/>
-                <a:cs typeface="Arial" pitchFamily="34" charset="-120"/>
-              </a:rPr>
-              <a:t>One tier down:</a:t>
-            </a:r>
-            <a:pPr algn="l" indent="0" marL="0">
-              <a:lnSpc>
-                <a:spcPts val="1620"/>
-              </a:lnSpc>
-              <a:spcAft>
-                <a:spcPts val="300"/>
-              </a:spcAft>
-              <a:buNone/>
-            </a:pPr>
-            <a:r>
-              <a:rPr lang="en-US" sz="1200" dirty="0">
-                <a:solidFill>
-                  <a:srgbClr val="1C2833"/>
-                </a:solidFill>
-                <a:latin typeface="Arial" pitchFamily="34" charset="0"/>
-                <a:ea typeface="Arial" pitchFamily="34" charset="-122"/>
-                <a:cs typeface="Arial" pitchFamily="34" charset="-120"/>
-              </a:rPr>
-              <a:t> Compare just the Indian and the Hijri (pure lunar). One difference, one similarity. That's enough.</a:t>
+            <a:pPr algn="l" indent="0" marL="0">
+              <a:lnSpc>
+                <a:spcPts val="1680"/>
+              </a:lnSpc>
+              <a:spcBef>
+                <a:spcPts val="300"/>
+              </a:spcBef>
+              <a:spcAft>
+                <a:spcPts val="300"/>
+              </a:spcAft>
+              <a:buNone/>
+            </a:pPr>
+            <a:r>
+              <a:rPr lang="en-US" sz="1200" i="1" dirty="0">
+                <a:solidFill>
+                  <a:srgbClr val="1C2833"/>
+                </a:solidFill>
+                <a:latin typeface="Arial" pitchFamily="34" charset="0"/>
+                <a:ea typeface="Arial" pitchFamily="34" charset="-122"/>
+                <a:cs typeface="Arial" pitchFamily="34" charset="-120"/>
+              </a:rPr>
+              <a:t>Each row: Feature · Indian (Hindu) · Islamic (Hijri) · Chinese · Hebrew.</a:t>
             </a:r>
             <a:endParaRPr lang="en-US" sz="1200" dirty="0"/>
           </a:p>
@@ -4249,7 +7978,7 @@
                 <a:ea typeface="Georgia" pitchFamily="34" charset="-122"/>
                 <a:cs typeface="Georgia" pitchFamily="34" charset="-120"/>
               </a:rPr>
-              <a:t>Teacher notes</a:t>
+              <a:t>Core content (15 min) (cont.)</a:t>
             </a:r>
             <a:endParaRPr lang="en-US" sz="1800" dirty="0"/>
           </a:p>
@@ -4263,8 +7992,8 @@
         </p:nvSpPr>
         <p:spPr>
           <a:xfrm>
-            <a:off x="406301" y="870942"/>
-            <a:ext cx="8498026" cy="853083"/>
+            <a:off x="634901" y="883593"/>
+            <a:ext cx="8102798" cy="1668363"/>
           </a:xfrm>
           <a:prstGeom prst="rect">
             <a:avLst/>
@@ -4276,13 +8005,31 @@
           <a:bodyPr wrap="square" lIns="0" tIns="0" rIns="0" bIns="0" rtlCol="0" anchor="t"/>
           <a:lstStyle/>
           <a:p>
-            <a:pPr algn="l" indent="0" marL="0">
-              <a:lnSpc>
-                <a:spcPts val="1680"/>
-              </a:lnSpc>
-              <a:spcBef>
-                <a:spcPts val="300"/>
-              </a:spcBef>
+            <a:pPr algn="l" marL="342900" indent="-342900">
+              <a:lnSpc>
+                <a:spcPts val="1620"/>
+              </a:lnSpc>
+              <a:spcAft>
+                <a:spcPts val="300"/>
+              </a:spcAft>
+              <a:buSzPct val="100000"/>
+              <a:buChar char="•"/>
+            </a:pPr>
+            <a:r>
+              <a:rPr lang="en-US" sz="1200" b="1" dirty="0">
+                <a:solidFill>
+                  <a:srgbClr val="1C2833"/>
+                </a:solidFill>
+                <a:latin typeface="Arial" pitchFamily="34" charset="0"/>
+                <a:ea typeface="Arial" pitchFamily="34" charset="-122"/>
+                <a:cs typeface="Arial" pitchFamily="34" charset="-120"/>
+              </a:rPr>
+              <a:t>Type</a:t>
+            </a:r>
+            <a:pPr algn="l" indent="0" marL="0">
+              <a:lnSpc>
+                <a:spcPts val="1620"/>
+              </a:lnSpc>
               <a:spcAft>
                 <a:spcPts val="300"/>
               </a:spcAft>
@@ -4297,7 +8044,543 @@
                 <a:ea typeface="Arial" pitchFamily="34" charset="-122"/>
                 <a:cs typeface="Arial" pitchFamily="34" charset="-120"/>
               </a:rPr>
-              <a:t>– This content is genuinely cross-cultural. Avoid framing as "ours is best." All four systems work; they encode different priorities. – The Metonic cycle (19-year Hebrew cycle) and the Indian intercalation rule converge to about the same accuracy. This is mathematically interesting — students at Senior band can explore it. – Keep this part to 15 minutes. The project is the major work today.</a:t>
+              <a:t> — Lunisolar · Pure lunar · Lunisolar · Lunisolar</a:t>
+            </a:r>
+            <a:endParaRPr lang="en-US" sz="1200" dirty="0"/>
+          </a:p>
+          <a:p>
+            <a:pPr algn="l" marL="342900" indent="-342900">
+              <a:lnSpc>
+                <a:spcPts val="1620"/>
+              </a:lnSpc>
+              <a:spcAft>
+                <a:spcPts val="300"/>
+              </a:spcAft>
+              <a:buSzPct val="100000"/>
+              <a:buChar char="•"/>
+            </a:pPr>
+            <a:r>
+              <a:rPr lang="en-US" sz="1200" b="1" dirty="0">
+                <a:solidFill>
+                  <a:srgbClr val="1C2833"/>
+                </a:solidFill>
+                <a:latin typeface="Arial" pitchFamily="34" charset="0"/>
+                <a:ea typeface="Arial" pitchFamily="34" charset="-122"/>
+                <a:cs typeface="Arial" pitchFamily="34" charset="-120"/>
+              </a:rPr>
+              <a:t>Months/year</a:t>
+            </a:r>
+            <a:pPr algn="l" indent="0" marL="0">
+              <a:lnSpc>
+                <a:spcPts val="1620"/>
+              </a:lnSpc>
+              <a:spcAft>
+                <a:spcPts val="300"/>
+              </a:spcAft>
+              <a:buNone/>
+            </a:pPr>
+            <a:r>
+              <a:rPr lang="en-US" sz="1200" dirty="0">
+                <a:solidFill>
+                  <a:srgbClr val="1C2833"/>
+                </a:solidFill>
+                <a:latin typeface="Arial" pitchFamily="34" charset="0"/>
+                <a:ea typeface="Arial" pitchFamily="34" charset="-122"/>
+                <a:cs typeface="Arial" pitchFamily="34" charset="-120"/>
+              </a:rPr>
+              <a:t> — 12 (or 13 with </a:t>
+            </a:r>
+            <a:pPr algn="l" indent="0" marL="0">
+              <a:lnSpc>
+                <a:spcPts val="1620"/>
+              </a:lnSpc>
+              <a:spcAft>
+                <a:spcPts val="300"/>
+              </a:spcAft>
+              <a:buNone/>
+            </a:pPr>
+            <a:r>
+              <a:rPr lang="en-US" sz="1200" i="1" dirty="0">
+                <a:solidFill>
+                  <a:srgbClr val="1C2833"/>
+                </a:solidFill>
+                <a:latin typeface="Arial" pitchFamily="34" charset="0"/>
+                <a:ea typeface="Arial" pitchFamily="34" charset="-122"/>
+                <a:cs typeface="Arial" pitchFamily="34" charset="-120"/>
+              </a:rPr>
+              <a:t>adhika māsa</a:t>
+            </a:r>
+            <a:pPr algn="l" indent="0" marL="0">
+              <a:lnSpc>
+                <a:spcPts val="1620"/>
+              </a:lnSpc>
+              <a:spcAft>
+                <a:spcPts val="300"/>
+              </a:spcAft>
+              <a:buNone/>
+            </a:pPr>
+            <a:r>
+              <a:rPr lang="en-US" sz="1200" dirty="0">
+                <a:solidFill>
+                  <a:srgbClr val="1C2833"/>
+                </a:solidFill>
+                <a:latin typeface="Arial" pitchFamily="34" charset="0"/>
+                <a:ea typeface="Arial" pitchFamily="34" charset="-122"/>
+                <a:cs typeface="Arial" pitchFamily="34" charset="-120"/>
+              </a:rPr>
+              <a:t>) · 12 · 12 (or 13 with leap month) · 12 (or 13 with </a:t>
+            </a:r>
+            <a:pPr algn="l" indent="0" marL="0">
+              <a:lnSpc>
+                <a:spcPts val="1620"/>
+              </a:lnSpc>
+              <a:spcAft>
+                <a:spcPts val="300"/>
+              </a:spcAft>
+              <a:buNone/>
+            </a:pPr>
+            <a:r>
+              <a:rPr lang="en-US" sz="1200" i="1" dirty="0">
+                <a:solidFill>
+                  <a:srgbClr val="1C2833"/>
+                </a:solidFill>
+                <a:latin typeface="Arial" pitchFamily="34" charset="0"/>
+                <a:ea typeface="Arial" pitchFamily="34" charset="-122"/>
+                <a:cs typeface="Arial" pitchFamily="34" charset="-120"/>
+              </a:rPr>
+              <a:t>Adar II</a:t>
+            </a:r>
+            <a:pPr algn="l" indent="0" marL="0">
+              <a:lnSpc>
+                <a:spcPts val="1620"/>
+              </a:lnSpc>
+              <a:spcAft>
+                <a:spcPts val="300"/>
+              </a:spcAft>
+              <a:buNone/>
+            </a:pPr>
+            <a:r>
+              <a:rPr lang="en-US" sz="1200" dirty="0">
+                <a:solidFill>
+                  <a:srgbClr val="1C2833"/>
+                </a:solidFill>
+                <a:latin typeface="Arial" pitchFamily="34" charset="0"/>
+                <a:ea typeface="Arial" pitchFamily="34" charset="-122"/>
+                <a:cs typeface="Arial" pitchFamily="34" charset="-120"/>
+              </a:rPr>
+              <a:t>)</a:t>
+            </a:r>
+            <a:endParaRPr lang="en-US" sz="1200" dirty="0"/>
+          </a:p>
+          <a:p>
+            <a:pPr algn="l" marL="342900" indent="-342900">
+              <a:lnSpc>
+                <a:spcPts val="1620"/>
+              </a:lnSpc>
+              <a:spcAft>
+                <a:spcPts val="300"/>
+              </a:spcAft>
+              <a:buSzPct val="100000"/>
+              <a:buChar char="•"/>
+            </a:pPr>
+            <a:r>
+              <a:rPr lang="en-US" sz="1200" b="1" dirty="0">
+                <a:solidFill>
+                  <a:srgbClr val="1C2833"/>
+                </a:solidFill>
+                <a:latin typeface="Arial" pitchFamily="34" charset="0"/>
+                <a:ea typeface="Arial" pitchFamily="34" charset="-122"/>
+                <a:cs typeface="Arial" pitchFamily="34" charset="-120"/>
+              </a:rPr>
+              <a:t>New month begins at</a:t>
+            </a:r>
+            <a:pPr algn="l" indent="0" marL="0">
+              <a:lnSpc>
+                <a:spcPts val="1620"/>
+              </a:lnSpc>
+              <a:spcAft>
+                <a:spcPts val="300"/>
+              </a:spcAft>
+              <a:buNone/>
+            </a:pPr>
+            <a:r>
+              <a:rPr lang="en-US" sz="1200" dirty="0">
+                <a:solidFill>
+                  <a:srgbClr val="1C2833"/>
+                </a:solidFill>
+                <a:latin typeface="Arial" pitchFamily="34" charset="0"/>
+                <a:ea typeface="Arial" pitchFamily="34" charset="-122"/>
+                <a:cs typeface="Arial" pitchFamily="34" charset="-120"/>
+              </a:rPr>
+              <a:t> — </a:t>
+            </a:r>
+            <a:pPr algn="l" indent="0" marL="0">
+              <a:lnSpc>
+                <a:spcPts val="1620"/>
+              </a:lnSpc>
+              <a:spcAft>
+                <a:spcPts val="300"/>
+              </a:spcAft>
+              <a:buNone/>
+            </a:pPr>
+            <a:r>
+              <a:rPr lang="en-US" sz="1200" i="1" dirty="0">
+                <a:solidFill>
+                  <a:srgbClr val="1C2833"/>
+                </a:solidFill>
+                <a:latin typeface="Arial" pitchFamily="34" charset="0"/>
+                <a:ea typeface="Arial" pitchFamily="34" charset="-122"/>
+                <a:cs typeface="Arial" pitchFamily="34" charset="-120"/>
+              </a:rPr>
+              <a:t>amāvasyā</a:t>
+            </a:r>
+            <a:pPr algn="l" indent="0" marL="0">
+              <a:lnSpc>
+                <a:spcPts val="1620"/>
+              </a:lnSpc>
+              <a:spcAft>
+                <a:spcPts val="300"/>
+              </a:spcAft>
+              <a:buNone/>
+            </a:pPr>
+            <a:r>
+              <a:rPr lang="en-US" sz="1200" dirty="0">
+                <a:solidFill>
+                  <a:srgbClr val="1C2833"/>
+                </a:solidFill>
+                <a:latin typeface="Arial" pitchFamily="34" charset="0"/>
+                <a:ea typeface="Arial" pitchFamily="34" charset="-122"/>
+                <a:cs typeface="Arial" pitchFamily="34" charset="-120"/>
+              </a:rPr>
+              <a:t> or </a:t>
+            </a:r>
+            <a:pPr algn="l" indent="0" marL="0">
+              <a:lnSpc>
+                <a:spcPts val="1620"/>
+              </a:lnSpc>
+              <a:spcAft>
+                <a:spcPts val="300"/>
+              </a:spcAft>
+              <a:buNone/>
+            </a:pPr>
+            <a:r>
+              <a:rPr lang="en-US" sz="1200" i="1" dirty="0">
+                <a:solidFill>
+                  <a:srgbClr val="1C2833"/>
+                </a:solidFill>
+                <a:latin typeface="Arial" pitchFamily="34" charset="0"/>
+                <a:ea typeface="Arial" pitchFamily="34" charset="-122"/>
+                <a:cs typeface="Arial" pitchFamily="34" charset="-120"/>
+              </a:rPr>
+              <a:t>pūrṇimā</a:t>
+            </a:r>
+            <a:pPr algn="l" indent="0" marL="0">
+              <a:lnSpc>
+                <a:spcPts val="1620"/>
+              </a:lnSpc>
+              <a:spcAft>
+                <a:spcPts val="300"/>
+              </a:spcAft>
+              <a:buNone/>
+            </a:pPr>
+            <a:r>
+              <a:rPr lang="en-US" sz="1200" dirty="0">
+                <a:solidFill>
+                  <a:srgbClr val="1C2833"/>
+                </a:solidFill>
+                <a:latin typeface="Arial" pitchFamily="34" charset="0"/>
+                <a:ea typeface="Arial" pitchFamily="34" charset="-122"/>
+                <a:cs typeface="Arial" pitchFamily="34" charset="-120"/>
+              </a:rPr>
+              <a:t> (region-dependent) · First sighting of crescent after new moon · </a:t>
+            </a:r>
+            <a:pPr algn="l" indent="0" marL="0">
+              <a:lnSpc>
+                <a:spcPts val="1620"/>
+              </a:lnSpc>
+              <a:spcAft>
+                <a:spcPts val="300"/>
+              </a:spcAft>
+              <a:buNone/>
+            </a:pPr>
+            <a:r>
+              <a:rPr lang="en-US" sz="1200" i="1" dirty="0">
+                <a:solidFill>
+                  <a:srgbClr val="1C2833"/>
+                </a:solidFill>
+                <a:latin typeface="Arial" pitchFamily="34" charset="0"/>
+                <a:ea typeface="Arial" pitchFamily="34" charset="-122"/>
+                <a:cs typeface="Arial" pitchFamily="34" charset="-120"/>
+              </a:rPr>
+              <a:t>amāvasyā</a:t>
+            </a:r>
+            <a:pPr algn="l" indent="0" marL="0">
+              <a:lnSpc>
+                <a:spcPts val="1620"/>
+              </a:lnSpc>
+              <a:spcAft>
+                <a:spcPts val="300"/>
+              </a:spcAft>
+              <a:buNone/>
+            </a:pPr>
+            <a:r>
+              <a:rPr lang="en-US" sz="1200" dirty="0">
+                <a:solidFill>
+                  <a:srgbClr val="1C2833"/>
+                </a:solidFill>
+                <a:latin typeface="Arial" pitchFamily="34" charset="0"/>
+                <a:ea typeface="Arial" pitchFamily="34" charset="-122"/>
+                <a:cs typeface="Arial" pitchFamily="34" charset="-120"/>
+              </a:rPr>
+              <a:t> (new moon) · </a:t>
+            </a:r>
+            <a:pPr algn="l" indent="0" marL="0">
+              <a:lnSpc>
+                <a:spcPts val="1620"/>
+              </a:lnSpc>
+              <a:spcAft>
+                <a:spcPts val="300"/>
+              </a:spcAft>
+              <a:buNone/>
+            </a:pPr>
+            <a:r>
+              <a:rPr lang="en-US" sz="1200" i="1" dirty="0">
+                <a:solidFill>
+                  <a:srgbClr val="1C2833"/>
+                </a:solidFill>
+                <a:latin typeface="Arial" pitchFamily="34" charset="0"/>
+                <a:ea typeface="Arial" pitchFamily="34" charset="-122"/>
+                <a:cs typeface="Arial" pitchFamily="34" charset="-120"/>
+              </a:rPr>
+              <a:t>amāvasyā</a:t>
+            </a:r>
+            <a:pPr algn="l" indent="0" marL="0">
+              <a:lnSpc>
+                <a:spcPts val="1620"/>
+              </a:lnSpc>
+              <a:spcAft>
+                <a:spcPts val="300"/>
+              </a:spcAft>
+              <a:buNone/>
+            </a:pPr>
+            <a:r>
+              <a:rPr lang="en-US" sz="1200" dirty="0">
+                <a:solidFill>
+                  <a:srgbClr val="1C2833"/>
+                </a:solidFill>
+                <a:latin typeface="Arial" pitchFamily="34" charset="0"/>
+                <a:ea typeface="Arial" pitchFamily="34" charset="-122"/>
+                <a:cs typeface="Arial" pitchFamily="34" charset="-120"/>
+              </a:rPr>
+              <a:t> (with calculated rules)</a:t>
+            </a:r>
+            <a:endParaRPr lang="en-US" sz="1200" dirty="0"/>
+          </a:p>
+          <a:p>
+            <a:pPr algn="l" marL="342900" indent="-342900">
+              <a:lnSpc>
+                <a:spcPts val="1620"/>
+              </a:lnSpc>
+              <a:spcAft>
+                <a:spcPts val="300"/>
+              </a:spcAft>
+              <a:buSzPct val="100000"/>
+              <a:buChar char="•"/>
+            </a:pPr>
+            <a:r>
+              <a:rPr lang="en-US" sz="1200" b="1" dirty="0">
+                <a:solidFill>
+                  <a:srgbClr val="1C2833"/>
+                </a:solidFill>
+                <a:latin typeface="Arial" pitchFamily="34" charset="0"/>
+                <a:ea typeface="Arial" pitchFamily="34" charset="-122"/>
+                <a:cs typeface="Arial" pitchFamily="34" charset="-120"/>
+              </a:rPr>
+              <a:t>Days per year (average)</a:t>
+            </a:r>
+            <a:pPr algn="l" indent="0" marL="0">
+              <a:lnSpc>
+                <a:spcPts val="1620"/>
+              </a:lnSpc>
+              <a:spcAft>
+                <a:spcPts val="300"/>
+              </a:spcAft>
+              <a:buNone/>
+            </a:pPr>
+            <a:r>
+              <a:rPr lang="en-US" sz="1200" dirty="0">
+                <a:solidFill>
+                  <a:srgbClr val="1C2833"/>
+                </a:solidFill>
+                <a:latin typeface="Arial" pitchFamily="34" charset="0"/>
+                <a:ea typeface="Arial" pitchFamily="34" charset="-122"/>
+                <a:cs typeface="Arial" pitchFamily="34" charset="-120"/>
+              </a:rPr>
+              <a:t> — ~365.25 · ~354 · ~365.25 · ~365.25</a:t>
+            </a:r>
+            <a:endParaRPr lang="en-US" sz="1200" dirty="0"/>
+          </a:p>
+          <a:p>
+            <a:pPr algn="l" marL="342900" indent="-342900">
+              <a:lnSpc>
+                <a:spcPts val="1620"/>
+              </a:lnSpc>
+              <a:spcAft>
+                <a:spcPts val="300"/>
+              </a:spcAft>
+              <a:buSzPct val="100000"/>
+              <a:buChar char="•"/>
+            </a:pPr>
+            <a:r>
+              <a:rPr lang="en-US" sz="1200" b="1" dirty="0">
+                <a:solidFill>
+                  <a:srgbClr val="1C2833"/>
+                </a:solidFill>
+                <a:latin typeface="Arial" pitchFamily="34" charset="0"/>
+                <a:ea typeface="Arial" pitchFamily="34" charset="-122"/>
+                <a:cs typeface="Arial" pitchFamily="34" charset="-120"/>
+              </a:rPr>
+              <a:t>Intercalation rule</a:t>
+            </a:r>
+            <a:pPr algn="l" indent="0" marL="0">
+              <a:lnSpc>
+                <a:spcPts val="1620"/>
+              </a:lnSpc>
+              <a:spcAft>
+                <a:spcPts val="300"/>
+              </a:spcAft>
+              <a:buNone/>
+            </a:pPr>
+            <a:r>
+              <a:rPr lang="en-US" sz="1200" dirty="0">
+                <a:solidFill>
+                  <a:srgbClr val="1C2833"/>
+                </a:solidFill>
+                <a:latin typeface="Arial" pitchFamily="34" charset="0"/>
+                <a:ea typeface="Arial" pitchFamily="34" charset="-122"/>
+                <a:cs typeface="Arial" pitchFamily="34" charset="-120"/>
+              </a:rPr>
+              <a:t> — Month with no </a:t>
+            </a:r>
+            <a:pPr algn="l" indent="0" marL="0">
+              <a:lnSpc>
+                <a:spcPts val="1620"/>
+              </a:lnSpc>
+              <a:spcAft>
+                <a:spcPts val="300"/>
+              </a:spcAft>
+              <a:buNone/>
+            </a:pPr>
+            <a:r>
+              <a:rPr lang="en-US" sz="1200" i="1" dirty="0">
+                <a:solidFill>
+                  <a:srgbClr val="1C2833"/>
+                </a:solidFill>
+                <a:latin typeface="Arial" pitchFamily="34" charset="0"/>
+                <a:ea typeface="Arial" pitchFamily="34" charset="-122"/>
+                <a:cs typeface="Arial" pitchFamily="34" charset="-120"/>
+              </a:rPr>
+              <a:t>saṁkrānti</a:t>
+            </a:r>
+            <a:pPr algn="l" indent="0" marL="0">
+              <a:lnSpc>
+                <a:spcPts val="1620"/>
+              </a:lnSpc>
+              <a:spcAft>
+                <a:spcPts val="300"/>
+              </a:spcAft>
+              <a:buNone/>
+            </a:pPr>
+            <a:r>
+              <a:rPr lang="en-US" sz="1200" dirty="0">
+                <a:solidFill>
+                  <a:srgbClr val="1C2833"/>
+                </a:solidFill>
+                <a:latin typeface="Arial" pitchFamily="34" charset="0"/>
+                <a:ea typeface="Arial" pitchFamily="34" charset="-122"/>
+                <a:cs typeface="Arial" pitchFamily="34" charset="-120"/>
+              </a:rPr>
+              <a:t> becomes </a:t>
+            </a:r>
+            <a:pPr algn="l" indent="0" marL="0">
+              <a:lnSpc>
+                <a:spcPts val="1620"/>
+              </a:lnSpc>
+              <a:spcAft>
+                <a:spcPts val="300"/>
+              </a:spcAft>
+              <a:buNone/>
+            </a:pPr>
+            <a:r>
+              <a:rPr lang="en-US" sz="1200" i="1" dirty="0">
+                <a:solidFill>
+                  <a:srgbClr val="1C2833"/>
+                </a:solidFill>
+                <a:latin typeface="Arial" pitchFamily="34" charset="0"/>
+                <a:ea typeface="Arial" pitchFamily="34" charset="-122"/>
+                <a:cs typeface="Arial" pitchFamily="34" charset="-120"/>
+              </a:rPr>
+              <a:t>adhika</a:t>
+            </a:r>
+            <a:pPr algn="l" indent="0" marL="0">
+              <a:lnSpc>
+                <a:spcPts val="1620"/>
+              </a:lnSpc>
+              <a:spcAft>
+                <a:spcPts val="300"/>
+              </a:spcAft>
+              <a:buNone/>
+            </a:pPr>
+            <a:r>
+              <a:rPr lang="en-US" sz="1200" dirty="0">
+                <a:solidFill>
+                  <a:srgbClr val="1C2833"/>
+                </a:solidFill>
+                <a:latin typeface="Arial" pitchFamily="34" charset="0"/>
+                <a:ea typeface="Arial" pitchFamily="34" charset="-122"/>
+                <a:cs typeface="Arial" pitchFamily="34" charset="-120"/>
+              </a:rPr>
+              <a:t> (extra) · None · Month with no </a:t>
+            </a:r>
+            <a:pPr algn="l" indent="0" marL="0">
+              <a:lnSpc>
+                <a:spcPts val="1620"/>
+              </a:lnSpc>
+              <a:spcAft>
+                <a:spcPts val="300"/>
+              </a:spcAft>
+              <a:buNone/>
+            </a:pPr>
+            <a:r>
+              <a:rPr lang="en-US" sz="1200" i="1" dirty="0">
+                <a:solidFill>
+                  <a:srgbClr val="1C2833"/>
+                </a:solidFill>
+                <a:latin typeface="Arial" pitchFamily="34" charset="0"/>
+                <a:ea typeface="Arial" pitchFamily="34" charset="-122"/>
+                <a:cs typeface="Arial" pitchFamily="34" charset="-120"/>
+              </a:rPr>
+              <a:t>zhōngqì</a:t>
+            </a:r>
+            <a:pPr algn="l" indent="0" marL="0">
+              <a:lnSpc>
+                <a:spcPts val="1620"/>
+              </a:lnSpc>
+              <a:spcAft>
+                <a:spcPts val="300"/>
+              </a:spcAft>
+              <a:buNone/>
+            </a:pPr>
+            <a:r>
+              <a:rPr lang="en-US" sz="1200" dirty="0">
+                <a:solidFill>
+                  <a:srgbClr val="1C2833"/>
+                </a:solidFill>
+                <a:latin typeface="Arial" pitchFamily="34" charset="0"/>
+                <a:ea typeface="Arial" pitchFamily="34" charset="-122"/>
+                <a:cs typeface="Arial" pitchFamily="34" charset="-120"/>
+              </a:rPr>
+              <a:t> (zhongqi solar term) · 7 leap months in 19 years (Metonic)</a:t>
             </a:r>
             <a:endParaRPr lang="en-US" sz="1200" dirty="0"/>
           </a:p>
